--- a/outputs/MY4_Education_Ministry_Proposal.pptx
+++ b/outputs/MY4_Education_Ministry_Proposal.pptx
@@ -3194,8 +3194,8 @@
         </p:blipFill>
         <p:spPr>
           <a:xfrm>
-            <a:off x="11183112" y="0"/>
-            <a:ext cx="1005840" cy="6858000"/>
+            <a:off x="11503152" y="0"/>
+            <a:ext cx="685800" cy="6858000"/>
           </a:xfrm>
           <a:prstGeom prst="rect">
             <a:avLst/>
@@ -3211,7 +3211,7 @@
         <p:spPr>
           <a:xfrm>
             <a:off x="0" y="0"/>
-            <a:ext cx="11183112" cy="63500"/>
+            <a:ext cx="11503152" cy="63500"/>
           </a:xfrm>
           <a:prstGeom prst="rect">
             <a:avLst/>
@@ -3627,7 +3627,7 @@
         <p:spPr>
           <a:xfrm>
             <a:off x="0" y="0"/>
-            <a:ext cx="12188952" cy="6858000"/>
+            <a:ext cx="5850696" cy="6858000"/>
           </a:xfrm>
           <a:prstGeom prst="rect">
             <a:avLst/>
@@ -3642,8 +3642,8 @@
         </p:nvSpPr>
         <p:spPr>
           <a:xfrm>
-            <a:off x="4875580" y="0"/>
-            <a:ext cx="7313371" cy="6858000"/>
+            <a:off x="5485028" y="0"/>
+            <a:ext cx="6703923" cy="6858000"/>
           </a:xfrm>
           <a:prstGeom prst="rect">
             <a:avLst/>
@@ -3686,7 +3686,7 @@
         <p:spPr>
           <a:xfrm>
             <a:off x="0" y="0"/>
-            <a:ext cx="109728" cy="6858000"/>
+            <a:ext cx="63500" cy="6858000"/>
           </a:xfrm>
           <a:prstGeom prst="rect">
             <a:avLst/>
@@ -3728,8 +3728,8 @@
         </p:nvSpPr>
         <p:spPr>
           <a:xfrm>
-            <a:off x="109728" y="2400300"/>
-            <a:ext cx="54864" cy="2057400"/>
+            <a:off x="63500" y="2606040"/>
+            <a:ext cx="50800" cy="1645920"/>
           </a:xfrm>
           <a:prstGeom prst="rect">
             <a:avLst/>
@@ -3779,8 +3779,8 @@
         </p:blipFill>
         <p:spPr>
           <a:xfrm>
-            <a:off x="11274552" y="0"/>
-            <a:ext cx="914400" cy="6858000"/>
+            <a:off x="11503152" y="0"/>
+            <a:ext cx="685800" cy="6858000"/>
           </a:xfrm>
           <a:prstGeom prst="rect">
             <a:avLst/>
@@ -3795,8 +3795,8 @@
         </p:nvSpPr>
         <p:spPr>
           <a:xfrm>
-            <a:off x="274320" y="1097280"/>
-            <a:ext cx="4572000" cy="2743200"/>
+            <a:off x="457200" y="731520"/>
+            <a:ext cx="5486400" cy="3200400"/>
           </a:xfrm>
           <a:prstGeom prst="rect">
             <a:avLst/>
@@ -3811,9 +3811,9 @@
           <a:p>
             <a:pPr algn="l"/>
             <a:r>
-              <a:rPr sz="14000" b="1" i="0">
-                <a:solidFill>
-                  <a:srgbClr val="282008"/>
+              <a:rPr sz="16000" b="1" i="0">
+                <a:solidFill>
+                  <a:srgbClr val="221A06"/>
                 </a:solidFill>
                 <a:latin typeface="Montserrat"/>
               </a:rPr>
@@ -3830,8 +3830,8 @@
         </p:nvSpPr>
         <p:spPr>
           <a:xfrm>
-            <a:off x="274320" y="2286000"/>
-            <a:ext cx="10725912" cy="1097280"/>
+            <a:off x="457200" y="2194560"/>
+            <a:ext cx="10863072" cy="1188720"/>
           </a:xfrm>
           <a:prstGeom prst="rect">
             <a:avLst/>
@@ -3846,7 +3846,7 @@
           <a:p>
             <a:pPr algn="r" rtl="1"/>
             <a:r>
-              <a:rPr sz="5200" b="1" i="0">
+              <a:rPr sz="5400" b="1" i="0">
                 <a:solidFill>
                   <a:srgbClr val="FFFFFF"/>
                 </a:solidFill>
@@ -3865,8 +3865,8 @@
         </p:nvSpPr>
         <p:spPr>
           <a:xfrm>
-            <a:off x="274320" y="3474720"/>
-            <a:ext cx="10725912" cy="38100"/>
+            <a:off x="457200" y="3474720"/>
+            <a:ext cx="10863072" cy="38100"/>
           </a:xfrm>
           <a:prstGeom prst="rect">
             <a:avLst/>
@@ -3908,8 +3908,8 @@
         </p:nvSpPr>
         <p:spPr>
           <a:xfrm>
-            <a:off x="274320" y="3611880"/>
-            <a:ext cx="10725912" cy="548640"/>
+            <a:off x="457200" y="3611880"/>
+            <a:ext cx="10863072" cy="594360"/>
           </a:xfrm>
           <a:prstGeom prst="rect">
             <a:avLst/>
@@ -3924,7 +3924,7 @@
           <a:p>
             <a:pPr algn="r" rtl="1"/>
             <a:r>
-              <a:rPr sz="1800" b="0" i="0">
+              <a:rPr sz="2000" b="0" i="0">
                 <a:solidFill>
                   <a:srgbClr val="C8A24C"/>
                 </a:solidFill>
@@ -4091,7 +4091,7 @@
         <p:spPr>
           <a:xfrm>
             <a:off x="0" y="0"/>
-            <a:ext cx="914400" cy="6858000"/>
+            <a:ext cx="347472" cy="6858000"/>
           </a:xfrm>
           <a:prstGeom prst="rect">
             <a:avLst/>
@@ -4114,8 +4114,8 @@
         </p:blipFill>
         <p:spPr>
           <a:xfrm>
-            <a:off x="11274552" y="0"/>
-            <a:ext cx="914400" cy="6858000"/>
+            <a:off x="11503152" y="0"/>
+            <a:ext cx="685800" cy="6858000"/>
           </a:xfrm>
           <a:prstGeom prst="rect">
             <a:avLst/>
@@ -4130,8 +4130,8 @@
         </p:nvSpPr>
         <p:spPr>
           <a:xfrm>
-            <a:off x="914400" y="0"/>
-            <a:ext cx="10360152" cy="50800"/>
+            <a:off x="347472" y="0"/>
+            <a:ext cx="11155680" cy="50800"/>
           </a:xfrm>
           <a:prstGeom prst="rect">
             <a:avLst/>
@@ -4208,8 +4208,8 @@
         </p:nvSpPr>
         <p:spPr>
           <a:xfrm>
-            <a:off x="1097280" y="411480"/>
-            <a:ext cx="9902952" cy="594360"/>
+            <a:off x="530352" y="411480"/>
+            <a:ext cx="10789920" cy="594360"/>
           </a:xfrm>
           <a:prstGeom prst="rect">
             <a:avLst/>
@@ -4243,8 +4243,8 @@
         </p:nvSpPr>
         <p:spPr>
           <a:xfrm>
-            <a:off x="1097280" y="1051560"/>
-            <a:ext cx="9902952" cy="25400"/>
+            <a:off x="530352" y="1051560"/>
+            <a:ext cx="10789920" cy="25400"/>
           </a:xfrm>
           <a:prstGeom prst="rect">
             <a:avLst/>
@@ -4286,8 +4286,8 @@
         </p:nvSpPr>
         <p:spPr>
           <a:xfrm>
-            <a:off x="1097280" y="1234440"/>
-            <a:ext cx="3099816" cy="4846320"/>
+            <a:off x="530352" y="1234440"/>
+            <a:ext cx="3474720" cy="4846320"/>
           </a:xfrm>
           <a:prstGeom prst="rect">
             <a:avLst/>
@@ -4331,8 +4331,8 @@
         </p:nvSpPr>
         <p:spPr>
           <a:xfrm>
-            <a:off x="1097280" y="1234440"/>
-            <a:ext cx="3099816" cy="109728"/>
+            <a:off x="530352" y="1234440"/>
+            <a:ext cx="3474720" cy="91440"/>
           </a:xfrm>
           <a:prstGeom prst="rect">
             <a:avLst/>
@@ -4382,7 +4382,7 @@
         </p:blipFill>
         <p:spPr>
           <a:xfrm>
-            <a:off x="2327148" y="1417320"/>
+            <a:off x="1947672" y="1399032"/>
             <a:ext cx="640080" cy="640080"/>
           </a:xfrm>
           <a:prstGeom prst="rect">
@@ -4398,8 +4398,8 @@
         </p:nvSpPr>
         <p:spPr>
           <a:xfrm>
-            <a:off x="1097280" y="2148840"/>
-            <a:ext cx="3008376" cy="365760"/>
+            <a:off x="621792" y="2148840"/>
+            <a:ext cx="3291840" cy="347472"/>
           </a:xfrm>
           <a:prstGeom prst="rect">
             <a:avLst/>
@@ -4433,8 +4433,8 @@
         </p:nvSpPr>
         <p:spPr>
           <a:xfrm>
-            <a:off x="1097280" y="2514600"/>
-            <a:ext cx="3008376" cy="457200"/>
+            <a:off x="621792" y="2496312"/>
+            <a:ext cx="3291840" cy="457200"/>
           </a:xfrm>
           <a:prstGeom prst="rect">
             <a:avLst/>
@@ -4468,8 +4468,8 @@
         </p:nvSpPr>
         <p:spPr>
           <a:xfrm>
-            <a:off x="1188720" y="3017520"/>
-            <a:ext cx="2916936" cy="292608"/>
+            <a:off x="621792" y="2990088"/>
+            <a:ext cx="3291840" cy="274320"/>
           </a:xfrm>
           <a:prstGeom prst="rect">
             <a:avLst/>
@@ -4511,8 +4511,8 @@
         </p:nvSpPr>
         <p:spPr>
           <a:xfrm>
-            <a:off x="1188720" y="3017520"/>
-            <a:ext cx="2916936" cy="292608"/>
+            <a:off x="621792" y="2990088"/>
+            <a:ext cx="3291840" cy="274320"/>
           </a:xfrm>
           <a:prstGeom prst="rect">
             <a:avLst/>
@@ -4527,7 +4527,7 @@
           <a:p>
             <a:pPr algn="r" rtl="1"/>
             <a:r>
-              <a:rPr sz="850" b="0" i="0">
+              <a:rPr sz="800" b="0" i="0">
                 <a:solidFill>
                   <a:srgbClr val="C8A24C"/>
                 </a:solidFill>
@@ -4546,8 +4546,8 @@
         </p:nvSpPr>
         <p:spPr>
           <a:xfrm>
-            <a:off x="1188720" y="3383280"/>
-            <a:ext cx="2916936" cy="12700"/>
+            <a:off x="621792" y="3319271"/>
+            <a:ext cx="3291840" cy="12700"/>
           </a:xfrm>
           <a:prstGeom prst="rect">
             <a:avLst/>
@@ -4589,8 +4589,8 @@
         </p:nvSpPr>
         <p:spPr>
           <a:xfrm>
-            <a:off x="3922776" y="3657600"/>
-            <a:ext cx="54864" cy="201168"/>
+            <a:off x="3749040" y="3639312"/>
+            <a:ext cx="54864" cy="182880"/>
           </a:xfrm>
           <a:prstGeom prst="rect">
             <a:avLst/>
@@ -4632,8 +4632,8 @@
         </p:nvSpPr>
         <p:spPr>
           <a:xfrm>
-            <a:off x="1188720" y="3520440"/>
-            <a:ext cx="2642616" cy="685800"/>
+            <a:off x="621792" y="3474720"/>
+            <a:ext cx="3063240" cy="749808"/>
           </a:xfrm>
           <a:prstGeom prst="rect">
             <a:avLst/>
@@ -4667,8 +4667,8 @@
         </p:nvSpPr>
         <p:spPr>
           <a:xfrm>
-            <a:off x="3922776" y="4434840"/>
-            <a:ext cx="54864" cy="201168"/>
+            <a:off x="3749040" y="4462272"/>
+            <a:ext cx="54864" cy="182880"/>
           </a:xfrm>
           <a:prstGeom prst="rect">
             <a:avLst/>
@@ -4710,8 +4710,8 @@
         </p:nvSpPr>
         <p:spPr>
           <a:xfrm>
-            <a:off x="1188720" y="4297680"/>
-            <a:ext cx="2642616" cy="685800"/>
+            <a:off x="621792" y="4297680"/>
+            <a:ext cx="3063240" cy="749808"/>
           </a:xfrm>
           <a:prstGeom prst="rect">
             <a:avLst/>
@@ -4745,8 +4745,8 @@
         </p:nvSpPr>
         <p:spPr>
           <a:xfrm>
-            <a:off x="3922776" y="5212080"/>
-            <a:ext cx="54864" cy="201168"/>
+            <a:off x="3749040" y="5285232"/>
+            <a:ext cx="54864" cy="182880"/>
           </a:xfrm>
           <a:prstGeom prst="rect">
             <a:avLst/>
@@ -4788,8 +4788,8 @@
         </p:nvSpPr>
         <p:spPr>
           <a:xfrm>
-            <a:off x="1188720" y="5074920"/>
-            <a:ext cx="2642616" cy="685800"/>
+            <a:off x="621792" y="5120640"/>
+            <a:ext cx="3063240" cy="749808"/>
           </a:xfrm>
           <a:prstGeom prst="rect">
             <a:avLst/>
@@ -4823,8 +4823,8 @@
         </p:nvSpPr>
         <p:spPr>
           <a:xfrm>
-            <a:off x="4361688" y="1234440"/>
-            <a:ext cx="3099816" cy="4846320"/>
+            <a:off x="4187952" y="1234440"/>
+            <a:ext cx="3474720" cy="4846320"/>
           </a:xfrm>
           <a:prstGeom prst="rect">
             <a:avLst/>
@@ -4834,7 +4834,7 @@
           </a:solidFill>
           <a:ln w="25400">
             <a:solidFill>
-              <a:srgbClr val="E8C46C"/>
+              <a:srgbClr val="E0BC60"/>
             </a:solidFill>
           </a:ln>
         </p:spPr>
@@ -4868,14 +4868,14 @@
         </p:nvSpPr>
         <p:spPr>
           <a:xfrm>
-            <a:off x="4361688" y="1234440"/>
-            <a:ext cx="3099816" cy="109728"/>
+            <a:off x="4187952" y="1234440"/>
+            <a:ext cx="3474720" cy="91440"/>
           </a:xfrm>
           <a:prstGeom prst="rect">
             <a:avLst/>
           </a:prstGeom>
           <a:solidFill>
-            <a:srgbClr val="E8C46C"/>
+            <a:srgbClr val="E0BC60"/>
           </a:solidFill>
           <a:ln>
             <a:noFill/>
@@ -4919,7 +4919,7 @@
         </p:blipFill>
         <p:spPr>
           <a:xfrm>
-            <a:off x="5591556" y="1417320"/>
+            <a:off x="5605272" y="1399032"/>
             <a:ext cx="640080" cy="640080"/>
           </a:xfrm>
           <a:prstGeom prst="rect">
@@ -4935,8 +4935,8 @@
         </p:nvSpPr>
         <p:spPr>
           <a:xfrm>
-            <a:off x="4361688" y="2148840"/>
-            <a:ext cx="3008376" cy="365760"/>
+            <a:off x="4279392" y="2148840"/>
+            <a:ext cx="3291840" cy="347472"/>
           </a:xfrm>
           <a:prstGeom prst="rect">
             <a:avLst/>
@@ -4953,7 +4953,7 @@
             <a:r>
               <a:rPr sz="900" b="1" i="0">
                 <a:solidFill>
-                  <a:srgbClr val="E8C46C"/>
+                  <a:srgbClr val="E0BC60"/>
                 </a:solidFill>
                 <a:latin typeface="Inter"/>
               </a:rPr>
@@ -4970,8 +4970,8 @@
         </p:nvSpPr>
         <p:spPr>
           <a:xfrm>
-            <a:off x="4361688" y="2514600"/>
-            <a:ext cx="3008376" cy="457200"/>
+            <a:off x="4279392" y="2496312"/>
+            <a:ext cx="3291840" cy="457200"/>
           </a:xfrm>
           <a:prstGeom prst="rect">
             <a:avLst/>
@@ -5005,8 +5005,8 @@
         </p:nvSpPr>
         <p:spPr>
           <a:xfrm>
-            <a:off x="4453128" y="3017520"/>
-            <a:ext cx="2916936" cy="292608"/>
+            <a:off x="4279392" y="2990088"/>
+            <a:ext cx="3291840" cy="274320"/>
           </a:xfrm>
           <a:prstGeom prst="rect">
             <a:avLst/>
@@ -5048,8 +5048,8 @@
         </p:nvSpPr>
         <p:spPr>
           <a:xfrm>
-            <a:off x="4453128" y="3017520"/>
-            <a:ext cx="2916936" cy="292608"/>
+            <a:off x="4279392" y="2990088"/>
+            <a:ext cx="3291840" cy="274320"/>
           </a:xfrm>
           <a:prstGeom prst="rect">
             <a:avLst/>
@@ -5064,7 +5064,7 @@
           <a:p>
             <a:pPr algn="r" rtl="1"/>
             <a:r>
-              <a:rPr sz="850" b="0" i="0">
+              <a:rPr sz="800" b="0" i="0">
                 <a:solidFill>
                   <a:srgbClr val="C8A24C"/>
                 </a:solidFill>
@@ -5083,8 +5083,8 @@
         </p:nvSpPr>
         <p:spPr>
           <a:xfrm>
-            <a:off x="4453128" y="3383280"/>
-            <a:ext cx="2916936" cy="12700"/>
+            <a:off x="4279392" y="3319271"/>
+            <a:ext cx="3291840" cy="12700"/>
           </a:xfrm>
           <a:prstGeom prst="rect">
             <a:avLst/>
@@ -5126,8 +5126,8 @@
         </p:nvSpPr>
         <p:spPr>
           <a:xfrm>
-            <a:off x="7187184" y="3657600"/>
-            <a:ext cx="54864" cy="201168"/>
+            <a:off x="7406640" y="3639312"/>
+            <a:ext cx="54864" cy="182880"/>
           </a:xfrm>
           <a:prstGeom prst="rect">
             <a:avLst/>
@@ -5169,8 +5169,8 @@
         </p:nvSpPr>
         <p:spPr>
           <a:xfrm>
-            <a:off x="4453128" y="3520440"/>
-            <a:ext cx="2642616" cy="685800"/>
+            <a:off x="4279392" y="3474720"/>
+            <a:ext cx="3063240" cy="749808"/>
           </a:xfrm>
           <a:prstGeom prst="rect">
             <a:avLst/>
@@ -5204,8 +5204,8 @@
         </p:nvSpPr>
         <p:spPr>
           <a:xfrm>
-            <a:off x="7187184" y="4434840"/>
-            <a:ext cx="54864" cy="201168"/>
+            <a:off x="7406640" y="4462272"/>
+            <a:ext cx="54864" cy="182880"/>
           </a:xfrm>
           <a:prstGeom prst="rect">
             <a:avLst/>
@@ -5247,8 +5247,8 @@
         </p:nvSpPr>
         <p:spPr>
           <a:xfrm>
-            <a:off x="4453128" y="4297680"/>
-            <a:ext cx="2642616" cy="685800"/>
+            <a:off x="4279392" y="4297680"/>
+            <a:ext cx="3063240" cy="749808"/>
           </a:xfrm>
           <a:prstGeom prst="rect">
             <a:avLst/>
@@ -5282,8 +5282,8 @@
         </p:nvSpPr>
         <p:spPr>
           <a:xfrm>
-            <a:off x="7187184" y="5212080"/>
-            <a:ext cx="54864" cy="201168"/>
+            <a:off x="7406640" y="5285232"/>
+            <a:ext cx="54864" cy="182880"/>
           </a:xfrm>
           <a:prstGeom prst="rect">
             <a:avLst/>
@@ -5325,8 +5325,8 @@
         </p:nvSpPr>
         <p:spPr>
           <a:xfrm>
-            <a:off x="4453128" y="5074920"/>
-            <a:ext cx="2642616" cy="685800"/>
+            <a:off x="4279392" y="5120640"/>
+            <a:ext cx="3063240" cy="749808"/>
           </a:xfrm>
           <a:prstGeom prst="rect">
             <a:avLst/>
@@ -5360,8 +5360,8 @@
         </p:nvSpPr>
         <p:spPr>
           <a:xfrm>
-            <a:off x="7626096" y="1234440"/>
-            <a:ext cx="3099816" cy="4846320"/>
+            <a:off x="7845552" y="1234440"/>
+            <a:ext cx="3474720" cy="4846320"/>
           </a:xfrm>
           <a:prstGeom prst="rect">
             <a:avLst/>
@@ -5405,8 +5405,8 @@
         </p:nvSpPr>
         <p:spPr>
           <a:xfrm>
-            <a:off x="7626096" y="1234440"/>
-            <a:ext cx="3099816" cy="109728"/>
+            <a:off x="7845552" y="1234440"/>
+            <a:ext cx="3474720" cy="91440"/>
           </a:xfrm>
           <a:prstGeom prst="rect">
             <a:avLst/>
@@ -5456,7 +5456,7 @@
         </p:blipFill>
         <p:spPr>
           <a:xfrm>
-            <a:off x="8855964" y="1417320"/>
+            <a:off x="9262872" y="1399032"/>
             <a:ext cx="640080" cy="640080"/>
           </a:xfrm>
           <a:prstGeom prst="rect">
@@ -5472,8 +5472,8 @@
         </p:nvSpPr>
         <p:spPr>
           <a:xfrm>
-            <a:off x="7626096" y="2148840"/>
-            <a:ext cx="3008376" cy="365760"/>
+            <a:off x="7936992" y="2148840"/>
+            <a:ext cx="3291840" cy="347472"/>
           </a:xfrm>
           <a:prstGeom prst="rect">
             <a:avLst/>
@@ -5507,8 +5507,8 @@
         </p:nvSpPr>
         <p:spPr>
           <a:xfrm>
-            <a:off x="7626096" y="2514600"/>
-            <a:ext cx="3008376" cy="457200"/>
+            <a:off x="7936992" y="2496312"/>
+            <a:ext cx="3291840" cy="457200"/>
           </a:xfrm>
           <a:prstGeom prst="rect">
             <a:avLst/>
@@ -5542,8 +5542,8 @@
         </p:nvSpPr>
         <p:spPr>
           <a:xfrm>
-            <a:off x="7717536" y="3017520"/>
-            <a:ext cx="2916936" cy="292608"/>
+            <a:off x="7936992" y="2990088"/>
+            <a:ext cx="3291840" cy="274320"/>
           </a:xfrm>
           <a:prstGeom prst="rect">
             <a:avLst/>
@@ -5585,8 +5585,8 @@
         </p:nvSpPr>
         <p:spPr>
           <a:xfrm>
-            <a:off x="7717536" y="3017520"/>
-            <a:ext cx="2916936" cy="292608"/>
+            <a:off x="7936992" y="2990088"/>
+            <a:ext cx="3291840" cy="274320"/>
           </a:xfrm>
           <a:prstGeom prst="rect">
             <a:avLst/>
@@ -5601,7 +5601,7 @@
           <a:p>
             <a:pPr algn="r" rtl="1"/>
             <a:r>
-              <a:rPr sz="850" b="0" i="0">
+              <a:rPr sz="800" b="0" i="0">
                 <a:solidFill>
                   <a:srgbClr val="C8A24C"/>
                 </a:solidFill>
@@ -5620,8 +5620,8 @@
         </p:nvSpPr>
         <p:spPr>
           <a:xfrm>
-            <a:off x="7717536" y="3383280"/>
-            <a:ext cx="2916936" cy="12700"/>
+            <a:off x="7936992" y="3319271"/>
+            <a:ext cx="3291840" cy="12700"/>
           </a:xfrm>
           <a:prstGeom prst="rect">
             <a:avLst/>
@@ -5663,8 +5663,8 @@
         </p:nvSpPr>
         <p:spPr>
           <a:xfrm>
-            <a:off x="10451592" y="3657600"/>
-            <a:ext cx="54864" cy="201168"/>
+            <a:off x="11064240" y="3639312"/>
+            <a:ext cx="54864" cy="182880"/>
           </a:xfrm>
           <a:prstGeom prst="rect">
             <a:avLst/>
@@ -5706,8 +5706,8 @@
         </p:nvSpPr>
         <p:spPr>
           <a:xfrm>
-            <a:off x="7717536" y="3520440"/>
-            <a:ext cx="2642616" cy="685800"/>
+            <a:off x="7936992" y="3474720"/>
+            <a:ext cx="3063240" cy="749808"/>
           </a:xfrm>
           <a:prstGeom prst="rect">
             <a:avLst/>
@@ -5741,8 +5741,8 @@
         </p:nvSpPr>
         <p:spPr>
           <a:xfrm>
-            <a:off x="10451592" y="4434840"/>
-            <a:ext cx="54864" cy="201168"/>
+            <a:off x="11064240" y="4462272"/>
+            <a:ext cx="54864" cy="182880"/>
           </a:xfrm>
           <a:prstGeom prst="rect">
             <a:avLst/>
@@ -5784,8 +5784,8 @@
         </p:nvSpPr>
         <p:spPr>
           <a:xfrm>
-            <a:off x="7717536" y="4297680"/>
-            <a:ext cx="2642616" cy="685800"/>
+            <a:off x="7936992" y="4297680"/>
+            <a:ext cx="3063240" cy="749808"/>
           </a:xfrm>
           <a:prstGeom prst="rect">
             <a:avLst/>
@@ -5819,8 +5819,8 @@
         </p:nvSpPr>
         <p:spPr>
           <a:xfrm>
-            <a:off x="10451592" y="5212080"/>
-            <a:ext cx="54864" cy="201168"/>
+            <a:off x="11064240" y="5285232"/>
+            <a:ext cx="54864" cy="182880"/>
           </a:xfrm>
           <a:prstGeom prst="rect">
             <a:avLst/>
@@ -5862,8 +5862,8 @@
         </p:nvSpPr>
         <p:spPr>
           <a:xfrm>
-            <a:off x="7717536" y="5074920"/>
-            <a:ext cx="2642616" cy="685800"/>
+            <a:off x="7936992" y="5120640"/>
+            <a:ext cx="3063240" cy="749808"/>
           </a:xfrm>
           <a:prstGeom prst="rect">
             <a:avLst/>
@@ -6045,7 +6045,7 @@
         <p:spPr>
           <a:xfrm>
             <a:off x="0" y="0"/>
-            <a:ext cx="12188952" cy="6858000"/>
+            <a:ext cx="5850696" cy="6858000"/>
           </a:xfrm>
           <a:prstGeom prst="rect">
             <a:avLst/>
@@ -6060,8 +6060,8 @@
         </p:nvSpPr>
         <p:spPr>
           <a:xfrm>
-            <a:off x="4875580" y="0"/>
-            <a:ext cx="7313371" cy="6858000"/>
+            <a:off x="5485028" y="0"/>
+            <a:ext cx="6703923" cy="6858000"/>
           </a:xfrm>
           <a:prstGeom prst="rect">
             <a:avLst/>
@@ -6104,7 +6104,7 @@
         <p:spPr>
           <a:xfrm>
             <a:off x="0" y="0"/>
-            <a:ext cx="109728" cy="6858000"/>
+            <a:ext cx="63500" cy="6858000"/>
           </a:xfrm>
           <a:prstGeom prst="rect">
             <a:avLst/>
@@ -6146,8 +6146,8 @@
         </p:nvSpPr>
         <p:spPr>
           <a:xfrm>
-            <a:off x="109728" y="2400300"/>
-            <a:ext cx="54864" cy="2057400"/>
+            <a:off x="63500" y="2606040"/>
+            <a:ext cx="50800" cy="1645920"/>
           </a:xfrm>
           <a:prstGeom prst="rect">
             <a:avLst/>
@@ -6197,8 +6197,8 @@
         </p:blipFill>
         <p:spPr>
           <a:xfrm>
-            <a:off x="11274552" y="0"/>
-            <a:ext cx="914400" cy="6858000"/>
+            <a:off x="11503152" y="0"/>
+            <a:ext cx="685800" cy="6858000"/>
           </a:xfrm>
           <a:prstGeom prst="rect">
             <a:avLst/>
@@ -6213,8 +6213,8 @@
         </p:nvSpPr>
         <p:spPr>
           <a:xfrm>
-            <a:off x="274320" y="1097280"/>
-            <a:ext cx="4572000" cy="2743200"/>
+            <a:off x="457200" y="731520"/>
+            <a:ext cx="5486400" cy="3200400"/>
           </a:xfrm>
           <a:prstGeom prst="rect">
             <a:avLst/>
@@ -6229,9 +6229,9 @@
           <a:p>
             <a:pPr algn="l"/>
             <a:r>
-              <a:rPr sz="14000" b="1" i="0">
-                <a:solidFill>
-                  <a:srgbClr val="282008"/>
+              <a:rPr sz="16000" b="1" i="0">
+                <a:solidFill>
+                  <a:srgbClr val="221A06"/>
                 </a:solidFill>
                 <a:latin typeface="Montserrat"/>
               </a:rPr>
@@ -6248,8 +6248,8 @@
         </p:nvSpPr>
         <p:spPr>
           <a:xfrm>
-            <a:off x="274320" y="2286000"/>
-            <a:ext cx="10725912" cy="1097280"/>
+            <a:off x="457200" y="2194560"/>
+            <a:ext cx="10863072" cy="1188720"/>
           </a:xfrm>
           <a:prstGeom prst="rect">
             <a:avLst/>
@@ -6264,7 +6264,7 @@
           <a:p>
             <a:pPr algn="r" rtl="1"/>
             <a:r>
-              <a:rPr sz="5200" b="1" i="0">
+              <a:rPr sz="5400" b="1" i="0">
                 <a:solidFill>
                   <a:srgbClr val="FFFFFF"/>
                 </a:solidFill>
@@ -6283,8 +6283,8 @@
         </p:nvSpPr>
         <p:spPr>
           <a:xfrm>
-            <a:off x="274320" y="3474720"/>
-            <a:ext cx="10725912" cy="38100"/>
+            <a:off x="457200" y="3474720"/>
+            <a:ext cx="10863072" cy="38100"/>
           </a:xfrm>
           <a:prstGeom prst="rect">
             <a:avLst/>
@@ -6326,8 +6326,8 @@
         </p:nvSpPr>
         <p:spPr>
           <a:xfrm>
-            <a:off x="274320" y="3611880"/>
-            <a:ext cx="10725912" cy="548640"/>
+            <a:off x="457200" y="3611880"/>
+            <a:ext cx="10863072" cy="594360"/>
           </a:xfrm>
           <a:prstGeom prst="rect">
             <a:avLst/>
@@ -6342,7 +6342,7 @@
           <a:p>
             <a:pPr algn="r" rtl="1"/>
             <a:r>
-              <a:rPr sz="1800" b="0" i="0">
+              <a:rPr sz="2000" b="0" i="0">
                 <a:solidFill>
                   <a:srgbClr val="C8A24C"/>
                 </a:solidFill>
@@ -6509,7 +6509,7 @@
         <p:spPr>
           <a:xfrm>
             <a:off x="0" y="0"/>
-            <a:ext cx="914400" cy="6858000"/>
+            <a:ext cx="347472" cy="6858000"/>
           </a:xfrm>
           <a:prstGeom prst="rect">
             <a:avLst/>
@@ -6532,8 +6532,8 @@
         </p:blipFill>
         <p:spPr>
           <a:xfrm>
-            <a:off x="11274552" y="0"/>
-            <a:ext cx="914400" cy="6858000"/>
+            <a:off x="11503152" y="0"/>
+            <a:ext cx="685800" cy="6858000"/>
           </a:xfrm>
           <a:prstGeom prst="rect">
             <a:avLst/>
@@ -6548,8 +6548,8 @@
         </p:nvSpPr>
         <p:spPr>
           <a:xfrm>
-            <a:off x="914400" y="0"/>
-            <a:ext cx="10360152" cy="50800"/>
+            <a:off x="347472" y="0"/>
+            <a:ext cx="11155680" cy="50800"/>
           </a:xfrm>
           <a:prstGeom prst="rect">
             <a:avLst/>
@@ -6626,8 +6626,8 @@
         </p:nvSpPr>
         <p:spPr>
           <a:xfrm>
-            <a:off x="1097280" y="411480"/>
-            <a:ext cx="9902952" cy="594360"/>
+            <a:off x="530352" y="411480"/>
+            <a:ext cx="10789920" cy="594360"/>
           </a:xfrm>
           <a:prstGeom prst="rect">
             <a:avLst/>
@@ -6661,8 +6661,8 @@
         </p:nvSpPr>
         <p:spPr>
           <a:xfrm>
-            <a:off x="1097280" y="1051560"/>
-            <a:ext cx="9902952" cy="25400"/>
+            <a:off x="530352" y="1051560"/>
+            <a:ext cx="10789920" cy="25400"/>
           </a:xfrm>
           <a:prstGeom prst="rect">
             <a:avLst/>
@@ -6704,8 +6704,8 @@
         </p:nvSpPr>
         <p:spPr>
           <a:xfrm>
-            <a:off x="1097280" y="1234440"/>
-            <a:ext cx="2297430" cy="2377440"/>
+            <a:off x="530352" y="1234440"/>
+            <a:ext cx="2574036" cy="2331720"/>
           </a:xfrm>
           <a:prstGeom prst="rect">
             <a:avLst/>
@@ -6757,7 +6757,7 @@
         </p:blipFill>
         <p:spPr>
           <a:xfrm>
-            <a:off x="1971675" y="1344168"/>
+            <a:off x="1543050" y="1344168"/>
             <a:ext cx="548640" cy="548640"/>
           </a:xfrm>
           <a:prstGeom prst="rect">
@@ -6773,8 +6773,8 @@
         </p:nvSpPr>
         <p:spPr>
           <a:xfrm>
-            <a:off x="1097280" y="1965960"/>
-            <a:ext cx="2251710" cy="731520"/>
+            <a:off x="621792" y="1984248"/>
+            <a:ext cx="2391156" cy="713232"/>
           </a:xfrm>
           <a:prstGeom prst="rect">
             <a:avLst/>
@@ -6789,7 +6789,7 @@
           <a:p>
             <a:pPr algn="r"/>
             <a:r>
-              <a:rPr sz="3400" b="1" i="0">
+              <a:rPr sz="3200" b="1" i="0">
                 <a:solidFill>
                   <a:srgbClr val="C8A24C"/>
                 </a:solidFill>
@@ -6808,8 +6808,8 @@
         </p:nvSpPr>
         <p:spPr>
           <a:xfrm>
-            <a:off x="1097280" y="2651760"/>
-            <a:ext cx="2251710" cy="457200"/>
+            <a:off x="621792" y="2651760"/>
+            <a:ext cx="2391156" cy="457200"/>
           </a:xfrm>
           <a:prstGeom prst="rect">
             <a:avLst/>
@@ -6843,8 +6843,8 @@
         </p:nvSpPr>
         <p:spPr>
           <a:xfrm>
-            <a:off x="1097280" y="3108959"/>
-            <a:ext cx="2251710" cy="411480"/>
+            <a:off x="621792" y="3108959"/>
+            <a:ext cx="2391156" cy="384048"/>
           </a:xfrm>
           <a:prstGeom prst="rect">
             <a:avLst/>
@@ -6878,8 +6878,8 @@
         </p:nvSpPr>
         <p:spPr>
           <a:xfrm>
-            <a:off x="3541014" y="1234440"/>
-            <a:ext cx="2297430" cy="2377440"/>
+            <a:off x="3268980" y="1234440"/>
+            <a:ext cx="2574036" cy="2331720"/>
           </a:xfrm>
           <a:prstGeom prst="rect">
             <a:avLst/>
@@ -6931,7 +6931,7 @@
         </p:blipFill>
         <p:spPr>
           <a:xfrm>
-            <a:off x="4415409" y="1344168"/>
+            <a:off x="4281678" y="1344168"/>
             <a:ext cx="548640" cy="548640"/>
           </a:xfrm>
           <a:prstGeom prst="rect">
@@ -6947,8 +6947,8 @@
         </p:nvSpPr>
         <p:spPr>
           <a:xfrm>
-            <a:off x="3541014" y="1965960"/>
-            <a:ext cx="2251710" cy="731520"/>
+            <a:off x="3360420" y="1984248"/>
+            <a:ext cx="2391156" cy="713232"/>
           </a:xfrm>
           <a:prstGeom prst="rect">
             <a:avLst/>
@@ -6963,7 +6963,7 @@
           <a:p>
             <a:pPr algn="r"/>
             <a:r>
-              <a:rPr sz="3400" b="1" i="0">
+              <a:rPr sz="3200" b="1" i="0">
                 <a:solidFill>
                   <a:srgbClr val="C8A24C"/>
                 </a:solidFill>
@@ -6982,8 +6982,8 @@
         </p:nvSpPr>
         <p:spPr>
           <a:xfrm>
-            <a:off x="3541014" y="2651760"/>
-            <a:ext cx="2251710" cy="457200"/>
+            <a:off x="3360420" y="2651760"/>
+            <a:ext cx="2391156" cy="457200"/>
           </a:xfrm>
           <a:prstGeom prst="rect">
             <a:avLst/>
@@ -7017,8 +7017,8 @@
         </p:nvSpPr>
         <p:spPr>
           <a:xfrm>
-            <a:off x="3541014" y="3108959"/>
-            <a:ext cx="2251710" cy="411480"/>
+            <a:off x="3360420" y="3108959"/>
+            <a:ext cx="2391156" cy="384048"/>
           </a:xfrm>
           <a:prstGeom prst="rect">
             <a:avLst/>
@@ -7052,8 +7052,8 @@
         </p:nvSpPr>
         <p:spPr>
           <a:xfrm>
-            <a:off x="5984748" y="1234440"/>
-            <a:ext cx="2297430" cy="2377440"/>
+            <a:off x="6007608" y="1234440"/>
+            <a:ext cx="2574036" cy="2331720"/>
           </a:xfrm>
           <a:prstGeom prst="rect">
             <a:avLst/>
@@ -7105,7 +7105,7 @@
         </p:blipFill>
         <p:spPr>
           <a:xfrm>
-            <a:off x="6859143" y="1344168"/>
+            <a:off x="7020306" y="1344168"/>
             <a:ext cx="548640" cy="548640"/>
           </a:xfrm>
           <a:prstGeom prst="rect">
@@ -7121,8 +7121,8 @@
         </p:nvSpPr>
         <p:spPr>
           <a:xfrm>
-            <a:off x="5984748" y="1965960"/>
-            <a:ext cx="2251710" cy="731520"/>
+            <a:off x="6099048" y="1984248"/>
+            <a:ext cx="2391156" cy="713232"/>
           </a:xfrm>
           <a:prstGeom prst="rect">
             <a:avLst/>
@@ -7137,7 +7137,7 @@
           <a:p>
             <a:pPr algn="r"/>
             <a:r>
-              <a:rPr sz="3400" b="1" i="0">
+              <a:rPr sz="3200" b="1" i="0">
                 <a:solidFill>
                   <a:srgbClr val="C8A24C"/>
                 </a:solidFill>
@@ -7156,8 +7156,8 @@
         </p:nvSpPr>
         <p:spPr>
           <a:xfrm>
-            <a:off x="5984748" y="2651760"/>
-            <a:ext cx="2251710" cy="457200"/>
+            <a:off x="6099048" y="2651760"/>
+            <a:ext cx="2391156" cy="457200"/>
           </a:xfrm>
           <a:prstGeom prst="rect">
             <a:avLst/>
@@ -7191,8 +7191,8 @@
         </p:nvSpPr>
         <p:spPr>
           <a:xfrm>
-            <a:off x="5984748" y="3108959"/>
-            <a:ext cx="2251710" cy="411480"/>
+            <a:off x="6099048" y="3108959"/>
+            <a:ext cx="2391156" cy="384048"/>
           </a:xfrm>
           <a:prstGeom prst="rect">
             <a:avLst/>
@@ -7226,8 +7226,8 @@
         </p:nvSpPr>
         <p:spPr>
           <a:xfrm>
-            <a:off x="8428482" y="1234440"/>
-            <a:ext cx="2297430" cy="2377440"/>
+            <a:off x="8746236" y="1234440"/>
+            <a:ext cx="2574036" cy="2331720"/>
           </a:xfrm>
           <a:prstGeom prst="rect">
             <a:avLst/>
@@ -7279,7 +7279,7 @@
         </p:blipFill>
         <p:spPr>
           <a:xfrm>
-            <a:off x="9302877" y="1344168"/>
+            <a:off x="9758934" y="1344168"/>
             <a:ext cx="548640" cy="548640"/>
           </a:xfrm>
           <a:prstGeom prst="rect">
@@ -7295,8 +7295,8 @@
         </p:nvSpPr>
         <p:spPr>
           <a:xfrm>
-            <a:off x="8428482" y="1965960"/>
-            <a:ext cx="2251710" cy="731520"/>
+            <a:off x="8837676" y="1984248"/>
+            <a:ext cx="2391156" cy="713232"/>
           </a:xfrm>
           <a:prstGeom prst="rect">
             <a:avLst/>
@@ -7311,7 +7311,7 @@
           <a:p>
             <a:pPr algn="r"/>
             <a:r>
-              <a:rPr sz="3400" b="1" i="0">
+              <a:rPr sz="3200" b="1" i="0">
                 <a:solidFill>
                   <a:srgbClr val="C8A24C"/>
                 </a:solidFill>
@@ -7330,8 +7330,8 @@
         </p:nvSpPr>
         <p:spPr>
           <a:xfrm>
-            <a:off x="8428482" y="2651760"/>
-            <a:ext cx="2251710" cy="457200"/>
+            <a:off x="8837676" y="2651760"/>
+            <a:ext cx="2391156" cy="457200"/>
           </a:xfrm>
           <a:prstGeom prst="rect">
             <a:avLst/>
@@ -7365,8 +7365,8 @@
         </p:nvSpPr>
         <p:spPr>
           <a:xfrm>
-            <a:off x="8428482" y="3108959"/>
-            <a:ext cx="2251710" cy="411480"/>
+            <a:off x="8837676" y="3108959"/>
+            <a:ext cx="2391156" cy="384048"/>
           </a:xfrm>
           <a:prstGeom prst="rect">
             <a:avLst/>
@@ -7400,8 +7400,8 @@
         </p:nvSpPr>
         <p:spPr>
           <a:xfrm>
-            <a:off x="1097280" y="3749039"/>
-            <a:ext cx="9902952" cy="320040"/>
+            <a:off x="530352" y="3712463"/>
+            <a:ext cx="10789920" cy="320040"/>
           </a:xfrm>
           <a:prstGeom prst="rect">
             <a:avLst/>
@@ -7443,8 +7443,8 @@
         </p:blipFill>
         <p:spPr>
           <a:xfrm>
-            <a:off x="5362956" y="4114800"/>
-            <a:ext cx="384048" cy="384048"/>
+            <a:off x="5358384" y="4078224"/>
+            <a:ext cx="402336" cy="402336"/>
           </a:xfrm>
           <a:prstGeom prst="rect">
             <a:avLst/>
@@ -7459,8 +7459,8 @@
         </p:nvSpPr>
         <p:spPr>
           <a:xfrm>
-            <a:off x="1097280" y="4114800"/>
-            <a:ext cx="4174236" cy="411480"/>
+            <a:off x="530352" y="4096512"/>
+            <a:ext cx="4754880" cy="402336"/>
           </a:xfrm>
           <a:prstGeom prst="rect">
             <a:avLst/>
@@ -7502,8 +7502,8 @@
         </p:blipFill>
         <p:spPr>
           <a:xfrm>
-            <a:off x="10268712" y="4114800"/>
-            <a:ext cx="384048" cy="384048"/>
+            <a:off x="10844784" y="4078224"/>
+            <a:ext cx="402336" cy="402336"/>
           </a:xfrm>
           <a:prstGeom prst="rect">
             <a:avLst/>
@@ -7518,8 +7518,8 @@
         </p:nvSpPr>
         <p:spPr>
           <a:xfrm>
-            <a:off x="6003036" y="4114800"/>
-            <a:ext cx="4174236" cy="411480"/>
+            <a:off x="6016752" y="4096512"/>
+            <a:ext cx="4754880" cy="402336"/>
           </a:xfrm>
           <a:prstGeom prst="rect">
             <a:avLst/>
@@ -7561,8 +7561,8 @@
         </p:blipFill>
         <p:spPr>
           <a:xfrm>
-            <a:off x="5362956" y="4572000"/>
-            <a:ext cx="384048" cy="384048"/>
+            <a:off x="5358384" y="4553712"/>
+            <a:ext cx="402336" cy="402336"/>
           </a:xfrm>
           <a:prstGeom prst="rect">
             <a:avLst/>
@@ -7577,8 +7577,8 @@
         </p:nvSpPr>
         <p:spPr>
           <a:xfrm>
-            <a:off x="1097280" y="4572000"/>
-            <a:ext cx="4174236" cy="411480"/>
+            <a:off x="530352" y="4572000"/>
+            <a:ext cx="4754880" cy="402336"/>
           </a:xfrm>
           <a:prstGeom prst="rect">
             <a:avLst/>
@@ -7620,8 +7620,8 @@
         </p:blipFill>
         <p:spPr>
           <a:xfrm>
-            <a:off x="10268712" y="4572000"/>
-            <a:ext cx="384048" cy="384048"/>
+            <a:off x="10844784" y="4553712"/>
+            <a:ext cx="402336" cy="402336"/>
           </a:xfrm>
           <a:prstGeom prst="rect">
             <a:avLst/>
@@ -7636,8 +7636,8 @@
         </p:nvSpPr>
         <p:spPr>
           <a:xfrm>
-            <a:off x="6003036" y="4572000"/>
-            <a:ext cx="4174236" cy="411480"/>
+            <a:off x="6016752" y="4572000"/>
+            <a:ext cx="4754880" cy="402336"/>
           </a:xfrm>
           <a:prstGeom prst="rect">
             <a:avLst/>
@@ -7819,7 +7819,7 @@
         <p:spPr>
           <a:xfrm>
             <a:off x="0" y="0"/>
-            <a:ext cx="12188952" cy="6858000"/>
+            <a:ext cx="5850696" cy="6858000"/>
           </a:xfrm>
           <a:prstGeom prst="rect">
             <a:avLst/>
@@ -7834,8 +7834,8 @@
         </p:nvSpPr>
         <p:spPr>
           <a:xfrm>
-            <a:off x="4875580" y="0"/>
-            <a:ext cx="7313371" cy="6858000"/>
+            <a:off x="5485028" y="0"/>
+            <a:ext cx="6703923" cy="6858000"/>
           </a:xfrm>
           <a:prstGeom prst="rect">
             <a:avLst/>
@@ -7878,7 +7878,7 @@
         <p:spPr>
           <a:xfrm>
             <a:off x="0" y="0"/>
-            <a:ext cx="109728" cy="6858000"/>
+            <a:ext cx="63500" cy="6858000"/>
           </a:xfrm>
           <a:prstGeom prst="rect">
             <a:avLst/>
@@ -7920,8 +7920,8 @@
         </p:nvSpPr>
         <p:spPr>
           <a:xfrm>
-            <a:off x="109728" y="2400300"/>
-            <a:ext cx="54864" cy="2057400"/>
+            <a:off x="63500" y="2606040"/>
+            <a:ext cx="50800" cy="1645920"/>
           </a:xfrm>
           <a:prstGeom prst="rect">
             <a:avLst/>
@@ -7971,8 +7971,8 @@
         </p:blipFill>
         <p:spPr>
           <a:xfrm>
-            <a:off x="11274552" y="0"/>
-            <a:ext cx="914400" cy="6858000"/>
+            <a:off x="11503152" y="0"/>
+            <a:ext cx="685800" cy="6858000"/>
           </a:xfrm>
           <a:prstGeom prst="rect">
             <a:avLst/>
@@ -7987,8 +7987,8 @@
         </p:nvSpPr>
         <p:spPr>
           <a:xfrm>
-            <a:off x="274320" y="1097280"/>
-            <a:ext cx="4572000" cy="2743200"/>
+            <a:off x="457200" y="731520"/>
+            <a:ext cx="5486400" cy="3200400"/>
           </a:xfrm>
           <a:prstGeom prst="rect">
             <a:avLst/>
@@ -8003,9 +8003,9 @@
           <a:p>
             <a:pPr algn="l"/>
             <a:r>
-              <a:rPr sz="14000" b="1" i="0">
-                <a:solidFill>
-                  <a:srgbClr val="282008"/>
+              <a:rPr sz="16000" b="1" i="0">
+                <a:solidFill>
+                  <a:srgbClr val="221A06"/>
                 </a:solidFill>
                 <a:latin typeface="Montserrat"/>
               </a:rPr>
@@ -8022,8 +8022,8 @@
         </p:nvSpPr>
         <p:spPr>
           <a:xfrm>
-            <a:off x="274320" y="2286000"/>
-            <a:ext cx="10725912" cy="1097280"/>
+            <a:off x="457200" y="2194560"/>
+            <a:ext cx="10863072" cy="1188720"/>
           </a:xfrm>
           <a:prstGeom prst="rect">
             <a:avLst/>
@@ -8038,7 +8038,7 @@
           <a:p>
             <a:pPr algn="r" rtl="1"/>
             <a:r>
-              <a:rPr sz="5200" b="1" i="0">
+              <a:rPr sz="5400" b="1" i="0">
                 <a:solidFill>
                   <a:srgbClr val="FFFFFF"/>
                 </a:solidFill>
@@ -8057,8 +8057,8 @@
         </p:nvSpPr>
         <p:spPr>
           <a:xfrm>
-            <a:off x="274320" y="3474720"/>
-            <a:ext cx="10725912" cy="38100"/>
+            <a:off x="457200" y="3474720"/>
+            <a:ext cx="10863072" cy="38100"/>
           </a:xfrm>
           <a:prstGeom prst="rect">
             <a:avLst/>
@@ -8100,8 +8100,8 @@
         </p:nvSpPr>
         <p:spPr>
           <a:xfrm>
-            <a:off x="274320" y="3611880"/>
-            <a:ext cx="10725912" cy="548640"/>
+            <a:off x="457200" y="3611880"/>
+            <a:ext cx="10863072" cy="594360"/>
           </a:xfrm>
           <a:prstGeom prst="rect">
             <a:avLst/>
@@ -8116,7 +8116,7 @@
           <a:p>
             <a:pPr algn="r" rtl="1"/>
             <a:r>
-              <a:rPr sz="1800" b="0" i="0">
+              <a:rPr sz="2000" b="0" i="0">
                 <a:solidFill>
                   <a:srgbClr val="C8A24C"/>
                 </a:solidFill>
@@ -8283,7 +8283,7 @@
         <p:spPr>
           <a:xfrm>
             <a:off x="0" y="0"/>
-            <a:ext cx="914400" cy="6858000"/>
+            <a:ext cx="347472" cy="6858000"/>
           </a:xfrm>
           <a:prstGeom prst="rect">
             <a:avLst/>
@@ -8306,8 +8306,8 @@
         </p:blipFill>
         <p:spPr>
           <a:xfrm>
-            <a:off x="11274552" y="0"/>
-            <a:ext cx="914400" cy="6858000"/>
+            <a:off x="11503152" y="0"/>
+            <a:ext cx="685800" cy="6858000"/>
           </a:xfrm>
           <a:prstGeom prst="rect">
             <a:avLst/>
@@ -8322,8 +8322,8 @@
         </p:nvSpPr>
         <p:spPr>
           <a:xfrm>
-            <a:off x="914400" y="0"/>
-            <a:ext cx="10360152" cy="50800"/>
+            <a:off x="347472" y="0"/>
+            <a:ext cx="11155680" cy="50800"/>
           </a:xfrm>
           <a:prstGeom prst="rect">
             <a:avLst/>
@@ -8400,8 +8400,8 @@
         </p:nvSpPr>
         <p:spPr>
           <a:xfrm>
-            <a:off x="1097280" y="411480"/>
-            <a:ext cx="9902952" cy="594360"/>
+            <a:off x="530352" y="411480"/>
+            <a:ext cx="10789920" cy="594360"/>
           </a:xfrm>
           <a:prstGeom prst="rect">
             <a:avLst/>
@@ -8435,8 +8435,8 @@
         </p:nvSpPr>
         <p:spPr>
           <a:xfrm>
-            <a:off x="1097280" y="1051560"/>
-            <a:ext cx="9902952" cy="25400"/>
+            <a:off x="530352" y="1051560"/>
+            <a:ext cx="10789920" cy="25400"/>
           </a:xfrm>
           <a:prstGeom prst="rect">
             <a:avLst/>
@@ -8478,8 +8478,8 @@
         </p:nvSpPr>
         <p:spPr>
           <a:xfrm>
-            <a:off x="1097280" y="1234440"/>
-            <a:ext cx="4704588" cy="804672"/>
+            <a:off x="530352" y="1234440"/>
+            <a:ext cx="5303520" cy="786384"/>
           </a:xfrm>
           <a:prstGeom prst="rect">
             <a:avLst/>
@@ -8531,8 +8531,8 @@
         </p:blipFill>
         <p:spPr>
           <a:xfrm>
-            <a:off x="5253228" y="1408176"/>
-            <a:ext cx="457200" cy="457200"/>
+            <a:off x="5303520" y="1399032"/>
+            <a:ext cx="438912" cy="438912"/>
           </a:xfrm>
           <a:prstGeom prst="rect">
             <a:avLst/>
@@ -8547,8 +8547,8 @@
         </p:nvSpPr>
         <p:spPr>
           <a:xfrm>
-            <a:off x="1097280" y="1289304"/>
-            <a:ext cx="4064508" cy="320040"/>
+            <a:off x="621792" y="1289304"/>
+            <a:ext cx="4645152" cy="329184"/>
           </a:xfrm>
           <a:prstGeom prst="rect">
             <a:avLst/>
@@ -8582,8 +8582,8 @@
         </p:nvSpPr>
         <p:spPr>
           <a:xfrm>
-            <a:off x="1097280" y="1618488"/>
-            <a:ext cx="4064508" cy="365760"/>
+            <a:off x="621792" y="1636776"/>
+            <a:ext cx="4645152" cy="347472"/>
           </a:xfrm>
           <a:prstGeom prst="rect">
             <a:avLst/>
@@ -8617,8 +8617,8 @@
         </p:nvSpPr>
         <p:spPr>
           <a:xfrm>
-            <a:off x="6021324" y="1234440"/>
-            <a:ext cx="4704588" cy="804672"/>
+            <a:off x="6016752" y="1234440"/>
+            <a:ext cx="5303520" cy="786384"/>
           </a:xfrm>
           <a:prstGeom prst="rect">
             <a:avLst/>
@@ -8670,8 +8670,8 @@
         </p:blipFill>
         <p:spPr>
           <a:xfrm>
-            <a:off x="10177272" y="1408176"/>
-            <a:ext cx="457200" cy="457200"/>
+            <a:off x="10789920" y="1399032"/>
+            <a:ext cx="438912" cy="438912"/>
           </a:xfrm>
           <a:prstGeom prst="rect">
             <a:avLst/>
@@ -8686,8 +8686,8 @@
         </p:nvSpPr>
         <p:spPr>
           <a:xfrm>
-            <a:off x="6021324" y="1289304"/>
-            <a:ext cx="4064508" cy="320040"/>
+            <a:off x="6108192" y="1289304"/>
+            <a:ext cx="4645152" cy="329184"/>
           </a:xfrm>
           <a:prstGeom prst="rect">
             <a:avLst/>
@@ -8721,8 +8721,8 @@
         </p:nvSpPr>
         <p:spPr>
           <a:xfrm>
-            <a:off x="6021324" y="1618488"/>
-            <a:ext cx="4064508" cy="365760"/>
+            <a:off x="6108192" y="1636776"/>
+            <a:ext cx="4645152" cy="347472"/>
           </a:xfrm>
           <a:prstGeom prst="rect">
             <a:avLst/>
@@ -8756,8 +8756,8 @@
         </p:nvSpPr>
         <p:spPr>
           <a:xfrm>
-            <a:off x="1097280" y="2148840"/>
-            <a:ext cx="4704588" cy="804672"/>
+            <a:off x="530352" y="2148840"/>
+            <a:ext cx="5303520" cy="786384"/>
           </a:xfrm>
           <a:prstGeom prst="rect">
             <a:avLst/>
@@ -8809,8 +8809,8 @@
         </p:blipFill>
         <p:spPr>
           <a:xfrm>
-            <a:off x="5253228" y="2322576"/>
-            <a:ext cx="457200" cy="457200"/>
+            <a:off x="5303520" y="2313432"/>
+            <a:ext cx="438912" cy="438912"/>
           </a:xfrm>
           <a:prstGeom prst="rect">
             <a:avLst/>
@@ -8825,8 +8825,8 @@
         </p:nvSpPr>
         <p:spPr>
           <a:xfrm>
-            <a:off x="1097280" y="2203704"/>
-            <a:ext cx="4064508" cy="320040"/>
+            <a:off x="621792" y="2203704"/>
+            <a:ext cx="4645152" cy="329184"/>
           </a:xfrm>
           <a:prstGeom prst="rect">
             <a:avLst/>
@@ -8860,8 +8860,8 @@
         </p:nvSpPr>
         <p:spPr>
           <a:xfrm>
-            <a:off x="1097280" y="2532888"/>
-            <a:ext cx="4064508" cy="365760"/>
+            <a:off x="621792" y="2551176"/>
+            <a:ext cx="4645152" cy="347472"/>
           </a:xfrm>
           <a:prstGeom prst="rect">
             <a:avLst/>
@@ -8895,8 +8895,8 @@
         </p:nvSpPr>
         <p:spPr>
           <a:xfrm>
-            <a:off x="6021324" y="2148840"/>
-            <a:ext cx="4704588" cy="804672"/>
+            <a:off x="6016752" y="2148840"/>
+            <a:ext cx="5303520" cy="786384"/>
           </a:xfrm>
           <a:prstGeom prst="rect">
             <a:avLst/>
@@ -8948,8 +8948,8 @@
         </p:blipFill>
         <p:spPr>
           <a:xfrm>
-            <a:off x="10177272" y="2322576"/>
-            <a:ext cx="457200" cy="457200"/>
+            <a:off x="10789920" y="2313432"/>
+            <a:ext cx="438912" cy="438912"/>
           </a:xfrm>
           <a:prstGeom prst="rect">
             <a:avLst/>
@@ -8964,8 +8964,8 @@
         </p:nvSpPr>
         <p:spPr>
           <a:xfrm>
-            <a:off x="6021324" y="2203704"/>
-            <a:ext cx="4064508" cy="320040"/>
+            <a:off x="6108192" y="2203704"/>
+            <a:ext cx="4645152" cy="329184"/>
           </a:xfrm>
           <a:prstGeom prst="rect">
             <a:avLst/>
@@ -8999,8 +8999,8 @@
         </p:nvSpPr>
         <p:spPr>
           <a:xfrm>
-            <a:off x="6021324" y="2532888"/>
-            <a:ext cx="4064508" cy="365760"/>
+            <a:off x="6108192" y="2551176"/>
+            <a:ext cx="4645152" cy="347472"/>
           </a:xfrm>
           <a:prstGeom prst="rect">
             <a:avLst/>
@@ -9034,8 +9034,8 @@
         </p:nvSpPr>
         <p:spPr>
           <a:xfrm>
-            <a:off x="1097280" y="3200400"/>
-            <a:ext cx="9902952" cy="25400"/>
+            <a:off x="530352" y="3175000"/>
+            <a:ext cx="10789920" cy="25400"/>
           </a:xfrm>
           <a:prstGeom prst="rect">
             <a:avLst/>
@@ -9077,8 +9077,8 @@
         </p:nvSpPr>
         <p:spPr>
           <a:xfrm>
-            <a:off x="1097280" y="3246120"/>
-            <a:ext cx="9902952" cy="365760"/>
+            <a:off x="530352" y="3200400"/>
+            <a:ext cx="10789920" cy="347472"/>
           </a:xfrm>
           <a:prstGeom prst="rect">
             <a:avLst/>
@@ -9112,8 +9112,8 @@
         </p:nvSpPr>
         <p:spPr>
           <a:xfrm>
-            <a:off x="1097280" y="3703320"/>
-            <a:ext cx="4704588" cy="1828800"/>
+            <a:off x="530352" y="3639312"/>
+            <a:ext cx="5303520" cy="1920240"/>
           </a:xfrm>
           <a:prstGeom prst="rect">
             <a:avLst/>
@@ -9157,8 +9157,8 @@
         </p:nvSpPr>
         <p:spPr>
           <a:xfrm>
-            <a:off x="1097280" y="3703320"/>
-            <a:ext cx="4704588" cy="91440"/>
+            <a:off x="530352" y="3639312"/>
+            <a:ext cx="5303520" cy="91440"/>
           </a:xfrm>
           <a:prstGeom prst="rect">
             <a:avLst/>
@@ -9200,8 +9200,8 @@
         </p:nvSpPr>
         <p:spPr>
           <a:xfrm>
-            <a:off x="1097280" y="3813048"/>
-            <a:ext cx="731520" cy="320040"/>
+            <a:off x="621792" y="3749040"/>
+            <a:ext cx="731520" cy="310896"/>
           </a:xfrm>
           <a:prstGeom prst="rect">
             <a:avLst/>
@@ -9235,8 +9235,8 @@
         </p:nvSpPr>
         <p:spPr>
           <a:xfrm>
-            <a:off x="1097280" y="4114800"/>
-            <a:ext cx="4613148" cy="365760"/>
+            <a:off x="621792" y="4078224"/>
+            <a:ext cx="5120640" cy="384048"/>
           </a:xfrm>
           <a:prstGeom prst="rect">
             <a:avLst/>
@@ -9270,8 +9270,8 @@
         </p:nvSpPr>
         <p:spPr>
           <a:xfrm>
-            <a:off x="1097280" y="4526280"/>
-            <a:ext cx="4613148" cy="914400"/>
+            <a:off x="621792" y="4507992"/>
+            <a:ext cx="5120640" cy="960120"/>
           </a:xfrm>
           <a:prstGeom prst="rect">
             <a:avLst/>
@@ -9305,8 +9305,8 @@
         </p:nvSpPr>
         <p:spPr>
           <a:xfrm>
-            <a:off x="6021324" y="3703320"/>
-            <a:ext cx="4704588" cy="1828800"/>
+            <a:off x="6016752" y="3639312"/>
+            <a:ext cx="5303520" cy="1920240"/>
           </a:xfrm>
           <a:prstGeom prst="rect">
             <a:avLst/>
@@ -9350,8 +9350,8 @@
         </p:nvSpPr>
         <p:spPr>
           <a:xfrm>
-            <a:off x="6021324" y="3703320"/>
-            <a:ext cx="4704588" cy="91440"/>
+            <a:off x="6016752" y="3639312"/>
+            <a:ext cx="5303520" cy="91440"/>
           </a:xfrm>
           <a:prstGeom prst="rect">
             <a:avLst/>
@@ -9393,8 +9393,8 @@
         </p:nvSpPr>
         <p:spPr>
           <a:xfrm>
-            <a:off x="6021324" y="3813048"/>
-            <a:ext cx="731520" cy="320040"/>
+            <a:off x="6108192" y="3749040"/>
+            <a:ext cx="731520" cy="310896"/>
           </a:xfrm>
           <a:prstGeom prst="rect">
             <a:avLst/>
@@ -9428,8 +9428,8 @@
         </p:nvSpPr>
         <p:spPr>
           <a:xfrm>
-            <a:off x="6021324" y="4114800"/>
-            <a:ext cx="4613148" cy="365760"/>
+            <a:off x="6108192" y="4078224"/>
+            <a:ext cx="5120640" cy="384048"/>
           </a:xfrm>
           <a:prstGeom prst="rect">
             <a:avLst/>
@@ -9463,8 +9463,8 @@
         </p:nvSpPr>
         <p:spPr>
           <a:xfrm>
-            <a:off x="6021324" y="4526280"/>
-            <a:ext cx="4613148" cy="914400"/>
+            <a:off x="6108192" y="4507992"/>
+            <a:ext cx="5120640" cy="960120"/>
           </a:xfrm>
           <a:prstGeom prst="rect">
             <a:avLst/>
@@ -9669,8 +9669,8 @@
         </p:blipFill>
         <p:spPr>
           <a:xfrm>
-            <a:off x="11183112" y="0"/>
-            <a:ext cx="1005840" cy="6858000"/>
+            <a:off x="11503152" y="0"/>
+            <a:ext cx="685800" cy="6858000"/>
           </a:xfrm>
           <a:prstGeom prst="rect">
             <a:avLst/>
@@ -9686,7 +9686,7 @@
         <p:spPr>
           <a:xfrm>
             <a:off x="0" y="0"/>
-            <a:ext cx="91440" cy="6858000"/>
+            <a:ext cx="63500" cy="6858000"/>
           </a:xfrm>
           <a:prstGeom prst="rect">
             <a:avLst/>
@@ -9728,8 +9728,8 @@
         </p:nvSpPr>
         <p:spPr>
           <a:xfrm>
-            <a:off x="91440" y="2743200"/>
-            <a:ext cx="54864" cy="1371600"/>
+            <a:off x="63500" y="2743200"/>
+            <a:ext cx="50800" cy="1371600"/>
           </a:xfrm>
           <a:prstGeom prst="rect">
             <a:avLst/>
@@ -9772,7 +9772,7 @@
         <p:spPr>
           <a:xfrm>
             <a:off x="274320" y="1371600"/>
-            <a:ext cx="10634472" cy="1463040"/>
+            <a:ext cx="11137392" cy="1463040"/>
           </a:xfrm>
           <a:prstGeom prst="rect">
             <a:avLst/>
@@ -9807,7 +9807,7 @@
         <p:spPr>
           <a:xfrm>
             <a:off x="274320" y="2926080"/>
-            <a:ext cx="10634472" cy="38100"/>
+            <a:ext cx="11137392" cy="38100"/>
           </a:xfrm>
           <a:prstGeom prst="rect">
             <a:avLst/>
@@ -9850,7 +9850,7 @@
         <p:spPr>
           <a:xfrm>
             <a:off x="274320" y="3063240"/>
-            <a:ext cx="10634472" cy="548640"/>
+            <a:ext cx="11137392" cy="548640"/>
           </a:xfrm>
           <a:prstGeom prst="rect">
             <a:avLst/>
@@ -9892,7 +9892,7 @@
         </p:blipFill>
         <p:spPr>
           <a:xfrm>
-            <a:off x="10177272" y="3840480"/>
+            <a:off x="10936224" y="3904488"/>
             <a:ext cx="411480" cy="411480"/>
           </a:xfrm>
           <a:prstGeom prst="rect">
@@ -9909,7 +9909,7 @@
         <p:spPr>
           <a:xfrm>
             <a:off x="274320" y="3840480"/>
-            <a:ext cx="9537192" cy="457200"/>
+            <a:ext cx="10570464" cy="457200"/>
           </a:xfrm>
           <a:prstGeom prst="rect">
             <a:avLst/>
@@ -9951,7 +9951,7 @@
         </p:blipFill>
         <p:spPr>
           <a:xfrm>
-            <a:off x="10177272" y="4407408"/>
+            <a:off x="10936224" y="4471416"/>
             <a:ext cx="411480" cy="411480"/>
           </a:xfrm>
           <a:prstGeom prst="rect">
@@ -9968,7 +9968,7 @@
         <p:spPr>
           <a:xfrm>
             <a:off x="274320" y="4407408"/>
-            <a:ext cx="9537192" cy="457200"/>
+            <a:ext cx="10570464" cy="457200"/>
           </a:xfrm>
           <a:prstGeom prst="rect">
             <a:avLst/>
@@ -10010,7 +10010,7 @@
         </p:blipFill>
         <p:spPr>
           <a:xfrm>
-            <a:off x="10177272" y="4974336"/>
+            <a:off x="10936224" y="5038344"/>
             <a:ext cx="411480" cy="411480"/>
           </a:xfrm>
           <a:prstGeom prst="rect">
@@ -10027,7 +10027,7 @@
         <p:spPr>
           <a:xfrm>
             <a:off x="274320" y="4974336"/>
-            <a:ext cx="9537192" cy="457200"/>
+            <a:ext cx="10570464" cy="457200"/>
           </a:xfrm>
           <a:prstGeom prst="rect">
             <a:avLst/>
@@ -10069,8 +10069,8 @@
         </p:blipFill>
         <p:spPr>
           <a:xfrm>
-            <a:off x="0" y="6172200"/>
-            <a:ext cx="11183112" cy="685800"/>
+            <a:off x="0" y="6455664"/>
+            <a:ext cx="11503152" cy="402336"/>
           </a:xfrm>
           <a:prstGeom prst="rect">
             <a:avLst/>
@@ -10233,7 +10233,7 @@
         <p:spPr>
           <a:xfrm>
             <a:off x="0" y="0"/>
-            <a:ext cx="1097280" cy="6858000"/>
+            <a:ext cx="347472" cy="6858000"/>
           </a:xfrm>
           <a:prstGeom prst="rect">
             <a:avLst/>
@@ -10256,8 +10256,8 @@
         </p:blipFill>
         <p:spPr>
           <a:xfrm>
-            <a:off x="11274552" y="0"/>
-            <a:ext cx="914400" cy="6858000"/>
+            <a:off x="11503152" y="0"/>
+            <a:ext cx="685800" cy="6858000"/>
           </a:xfrm>
           <a:prstGeom prst="rect">
             <a:avLst/>
@@ -10272,8 +10272,8 @@
         </p:nvSpPr>
         <p:spPr>
           <a:xfrm>
-            <a:off x="1097280" y="0"/>
-            <a:ext cx="10177272" cy="50800"/>
+            <a:off x="347472" y="0"/>
+            <a:ext cx="11155680" cy="50800"/>
           </a:xfrm>
           <a:prstGeom prst="rect">
             <a:avLst/>
@@ -10315,8 +10315,8 @@
         </p:nvSpPr>
         <p:spPr>
           <a:xfrm>
-            <a:off x="1280160" y="228600"/>
-            <a:ext cx="9628632" cy="548640"/>
+            <a:off x="530352" y="164592"/>
+            <a:ext cx="10789920" cy="548640"/>
           </a:xfrm>
           <a:prstGeom prst="rect">
             <a:avLst/>
@@ -10350,8 +10350,8 @@
         </p:nvSpPr>
         <p:spPr>
           <a:xfrm>
-            <a:off x="1280160" y="868680"/>
-            <a:ext cx="0" cy="25400"/>
+            <a:off x="530352" y="777240"/>
+            <a:ext cx="10789920" cy="25400"/>
           </a:xfrm>
           <a:prstGeom prst="rect">
             <a:avLst/>
@@ -10385,52 +10385,9 @@
           </a:p>
         </p:txBody>
       </p:sp>
-      <p:sp>
-        <p:nvSpPr>
-          <p:cNvPr id="7" name="Rectangle 6"/>
-          <p:cNvSpPr/>
-          <p:nvPr/>
-        </p:nvSpPr>
-        <p:spPr>
-          <a:xfrm>
-            <a:off x="1280160" y="868680"/>
-            <a:ext cx="9628632" cy="25400"/>
-          </a:xfrm>
-          <a:prstGeom prst="rect">
-            <a:avLst/>
-          </a:prstGeom>
-          <a:solidFill>
-            <a:srgbClr val="C8A24C"/>
-          </a:solidFill>
-          <a:ln>
-            <a:noFill/>
-          </a:ln>
-        </p:spPr>
-        <p:style>
-          <a:lnRef idx="1">
-            <a:schemeClr val="accent1"/>
-          </a:lnRef>
-          <a:fillRef idx="3">
-            <a:schemeClr val="accent1"/>
-          </a:fillRef>
-          <a:effectRef idx="2">
-            <a:schemeClr val="accent1"/>
-          </a:effectRef>
-          <a:fontRef idx="minor">
-            <a:schemeClr val="lt1"/>
-          </a:fontRef>
-        </p:style>
-        <p:txBody>
-          <a:bodyPr rtlCol="0" anchor="ctr"/>
-          <a:lstStyle/>
-          <a:p>
-            <a:pPr algn="ctr"/>
-          </a:p>
-        </p:txBody>
-      </p:sp>
       <p:pic>
         <p:nvPicPr>
-          <p:cNvPr id="8" name="Picture 7" descr="image-10-2.png"/>
+          <p:cNvPr id="7" name="Picture 6" descr="image-10-2.png"/>
           <p:cNvPicPr>
             <a:picLocks noChangeAspect="1"/>
           </p:cNvPicPr>
@@ -10444,8 +10401,8 @@
         </p:blipFill>
         <p:spPr>
           <a:xfrm>
-            <a:off x="9811512" y="1097280"/>
-            <a:ext cx="502920" cy="502920"/>
+            <a:off x="10908792" y="1088136"/>
+            <a:ext cx="475488" cy="475488"/>
           </a:xfrm>
           <a:prstGeom prst="rect">
             <a:avLst/>
@@ -10454,102 +10411,102 @@
       </p:pic>
       <p:sp>
         <p:nvSpPr>
+          <p:cNvPr id="8" name="TextBox 7"/>
+          <p:cNvSpPr txBox="1"/>
+          <p:nvPr/>
+        </p:nvSpPr>
+        <p:spPr>
+          <a:xfrm>
+            <a:off x="10314432" y="1097280"/>
+            <a:ext cx="502920" cy="384048"/>
+          </a:xfrm>
+          <a:prstGeom prst="rect">
+            <a:avLst/>
+          </a:prstGeom>
+          <a:noFill/>
+        </p:spPr>
+        <p:txBody>
+          <a:bodyPr wrap="square">
+            <a:spAutoFit/>
+          </a:bodyPr>
+          <a:lstStyle/>
+          <a:p>
+            <a:pPr algn="ctr"/>
+            <a:r>
+              <a:rPr sz="1000" b="1" i="0">
+                <a:solidFill>
+                  <a:srgbClr val="C8A24C"/>
+                </a:solidFill>
+                <a:latin typeface="Montserrat"/>
+              </a:rPr>
+              <a:t>01</a:t>
+            </a:r>
+          </a:p>
+        </p:txBody>
+      </p:sp>
+      <p:sp>
+        <p:nvSpPr>
           <p:cNvPr id="9" name="TextBox 8"/>
           <p:cNvSpPr txBox="1"/>
           <p:nvPr/>
         </p:nvSpPr>
         <p:spPr>
           <a:xfrm>
-            <a:off x="8988552" y="1143000"/>
-            <a:ext cx="548640" cy="411480"/>
-          </a:xfrm>
-          <a:prstGeom prst="rect">
-            <a:avLst/>
-          </a:prstGeom>
-          <a:noFill/>
-        </p:spPr>
-        <p:txBody>
-          <a:bodyPr wrap="square">
-            <a:spAutoFit/>
-          </a:bodyPr>
-          <a:lstStyle/>
-          <a:p>
-            <a:pPr algn="ctr"/>
-            <a:r>
-              <a:rPr sz="1100" b="1" i="0">
+            <a:off x="530352" y="960120"/>
+            <a:ext cx="9601200" cy="347472"/>
+          </a:xfrm>
+          <a:prstGeom prst="rect">
+            <a:avLst/>
+          </a:prstGeom>
+          <a:noFill/>
+        </p:spPr>
+        <p:txBody>
+          <a:bodyPr wrap="square">
+            <a:spAutoFit/>
+          </a:bodyPr>
+          <a:lstStyle/>
+          <a:p>
+            <a:pPr algn="r" rtl="1"/>
+            <a:r>
+              <a:rPr sz="1300" b="1" i="0">
+                <a:solidFill>
+                  <a:srgbClr val="FFFFFF"/>
+                </a:solidFill>
+                <a:latin typeface="Montserrat"/>
+              </a:rPr>
+              <a:t>الإشكالية</a:t>
+            </a:r>
+          </a:p>
+        </p:txBody>
+      </p:sp>
+      <p:sp>
+        <p:nvSpPr>
+          <p:cNvPr id="10" name="TextBox 9"/>
+          <p:cNvSpPr txBox="1"/>
+          <p:nvPr/>
+        </p:nvSpPr>
+        <p:spPr>
+          <a:xfrm>
+            <a:off x="530352" y="1298448"/>
+            <a:ext cx="9601200" cy="320040"/>
+          </a:xfrm>
+          <a:prstGeom prst="rect">
+            <a:avLst/>
+          </a:prstGeom>
+          <a:noFill/>
+        </p:spPr>
+        <p:txBody>
+          <a:bodyPr wrap="square">
+            <a:spAutoFit/>
+          </a:bodyPr>
+          <a:lstStyle/>
+          <a:p>
+            <a:pPr algn="r" rtl="1"/>
+            <a:r>
+              <a:rPr sz="900" b="0" i="0">
                 <a:solidFill>
                   <a:srgbClr val="C8A24C"/>
                 </a:solidFill>
-                <a:latin typeface="Montserrat"/>
-              </a:rPr>
-              <a:t>01</a:t>
-            </a:r>
-          </a:p>
-        </p:txBody>
-      </p:sp>
-      <p:sp>
-        <p:nvSpPr>
-          <p:cNvPr id="10" name="TextBox 9"/>
-          <p:cNvSpPr txBox="1"/>
-          <p:nvPr/>
-        </p:nvSpPr>
-        <p:spPr>
-          <a:xfrm>
-            <a:off x="1280160" y="1097280"/>
-            <a:ext cx="7434072" cy="320040"/>
-          </a:xfrm>
-          <a:prstGeom prst="rect">
-            <a:avLst/>
-          </a:prstGeom>
-          <a:noFill/>
-        </p:spPr>
-        <p:txBody>
-          <a:bodyPr wrap="square">
-            <a:spAutoFit/>
-          </a:bodyPr>
-          <a:lstStyle/>
-          <a:p>
-            <a:pPr algn="r" rtl="1"/>
-            <a:r>
-              <a:rPr sz="1300" b="1" i="0">
-                <a:solidFill>
-                  <a:srgbClr val="FFFFFF"/>
-                </a:solidFill>
-                <a:latin typeface="Montserrat"/>
-              </a:rPr>
-              <a:t>الإشكالية</a:t>
-            </a:r>
-          </a:p>
-        </p:txBody>
-      </p:sp>
-      <p:sp>
-        <p:nvSpPr>
-          <p:cNvPr id="11" name="TextBox 10"/>
-          <p:cNvSpPr txBox="1"/>
-          <p:nvPr/>
-        </p:nvSpPr>
-        <p:spPr>
-          <a:xfrm>
-            <a:off x="1280160" y="1417320"/>
-            <a:ext cx="7434072" cy="320040"/>
-          </a:xfrm>
-          <a:prstGeom prst="rect">
-            <a:avLst/>
-          </a:prstGeom>
-          <a:noFill/>
-        </p:spPr>
-        <p:txBody>
-          <a:bodyPr wrap="square">
-            <a:spAutoFit/>
-          </a:bodyPr>
-          <a:lstStyle/>
-          <a:p>
-            <a:pPr algn="r" rtl="1"/>
-            <a:r>
-              <a:rPr sz="900" b="0" i="0">
-                <a:solidFill>
-                  <a:srgbClr val="C8A24C"/>
-                </a:solidFill>
                 <a:latin typeface="Inter"/>
               </a:rPr>
               <a:t>الشهادة وحدها لا تصنع فرصة عمل</a:t>
@@ -10559,14 +10516,14 @@
       </p:sp>
       <p:sp>
         <p:nvSpPr>
-          <p:cNvPr id="12" name="Rectangle 11"/>
+          <p:cNvPr id="11" name="Rectangle 10"/>
           <p:cNvSpPr/>
           <p:nvPr/>
         </p:nvSpPr>
         <p:spPr>
           <a:xfrm>
-            <a:off x="1280160" y="1889252"/>
-            <a:ext cx="9628632" cy="12700"/>
+            <a:off x="530352" y="1724660"/>
+            <a:ext cx="10789920" cy="12700"/>
           </a:xfrm>
           <a:prstGeom prst="rect">
             <a:avLst/>
@@ -10602,7 +10559,7 @@
       </p:sp>
       <p:pic>
         <p:nvPicPr>
-          <p:cNvPr id="13" name="Picture 12" descr="image-10-3.png"/>
+          <p:cNvPr id="12" name="Picture 11" descr="image-10-3.png"/>
           <p:cNvPicPr>
             <a:picLocks noChangeAspect="1"/>
           </p:cNvPicPr>
@@ -10616,8 +10573,8 @@
         </p:blipFill>
         <p:spPr>
           <a:xfrm>
-            <a:off x="9811512" y="1901952"/>
-            <a:ext cx="502920" cy="502920"/>
+            <a:off x="10908792" y="1911096"/>
+            <a:ext cx="475488" cy="475488"/>
           </a:xfrm>
           <a:prstGeom prst="rect">
             <a:avLst/>
@@ -10626,102 +10583,102 @@
       </p:pic>
       <p:sp>
         <p:nvSpPr>
+          <p:cNvPr id="13" name="TextBox 12"/>
+          <p:cNvSpPr txBox="1"/>
+          <p:nvPr/>
+        </p:nvSpPr>
+        <p:spPr>
+          <a:xfrm>
+            <a:off x="10314432" y="1920240"/>
+            <a:ext cx="502920" cy="384048"/>
+          </a:xfrm>
+          <a:prstGeom prst="rect">
+            <a:avLst/>
+          </a:prstGeom>
+          <a:noFill/>
+        </p:spPr>
+        <p:txBody>
+          <a:bodyPr wrap="square">
+            <a:spAutoFit/>
+          </a:bodyPr>
+          <a:lstStyle/>
+          <a:p>
+            <a:pPr algn="ctr"/>
+            <a:r>
+              <a:rPr sz="1000" b="1" i="0">
+                <a:solidFill>
+                  <a:srgbClr val="C8A24C"/>
+                </a:solidFill>
+                <a:latin typeface="Montserrat"/>
+              </a:rPr>
+              <a:t>02</a:t>
+            </a:r>
+          </a:p>
+        </p:txBody>
+      </p:sp>
+      <p:sp>
+        <p:nvSpPr>
           <p:cNvPr id="14" name="TextBox 13"/>
           <p:cNvSpPr txBox="1"/>
           <p:nvPr/>
         </p:nvSpPr>
         <p:spPr>
           <a:xfrm>
-            <a:off x="8988552" y="1947672"/>
-            <a:ext cx="548640" cy="411480"/>
-          </a:xfrm>
-          <a:prstGeom prst="rect">
-            <a:avLst/>
-          </a:prstGeom>
-          <a:noFill/>
-        </p:spPr>
-        <p:txBody>
-          <a:bodyPr wrap="square">
-            <a:spAutoFit/>
-          </a:bodyPr>
-          <a:lstStyle/>
-          <a:p>
-            <a:pPr algn="ctr"/>
-            <a:r>
-              <a:rPr sz="1100" b="1" i="0">
+            <a:off x="530352" y="1783080"/>
+            <a:ext cx="9601200" cy="347472"/>
+          </a:xfrm>
+          <a:prstGeom prst="rect">
+            <a:avLst/>
+          </a:prstGeom>
+          <a:noFill/>
+        </p:spPr>
+        <p:txBody>
+          <a:bodyPr wrap="square">
+            <a:spAutoFit/>
+          </a:bodyPr>
+          <a:lstStyle/>
+          <a:p>
+            <a:pPr algn="r" rtl="1"/>
+            <a:r>
+              <a:rPr sz="1300" b="1" i="0">
+                <a:solidFill>
+                  <a:srgbClr val="FFFFFF"/>
+                </a:solidFill>
+                <a:latin typeface="Montserrat"/>
+              </a:rPr>
+              <a:t>الحل</a:t>
+            </a:r>
+          </a:p>
+        </p:txBody>
+      </p:sp>
+      <p:sp>
+        <p:nvSpPr>
+          <p:cNvPr id="15" name="TextBox 14"/>
+          <p:cNvSpPr txBox="1"/>
+          <p:nvPr/>
+        </p:nvSpPr>
+        <p:spPr>
+          <a:xfrm>
+            <a:off x="530352" y="2121408"/>
+            <a:ext cx="9601200" cy="320040"/>
+          </a:xfrm>
+          <a:prstGeom prst="rect">
+            <a:avLst/>
+          </a:prstGeom>
+          <a:noFill/>
+        </p:spPr>
+        <p:txBody>
+          <a:bodyPr wrap="square">
+            <a:spAutoFit/>
+          </a:bodyPr>
+          <a:lstStyle/>
+          <a:p>
+            <a:pPr algn="r" rtl="1"/>
+            <a:r>
+              <a:rPr sz="900" b="0" i="0">
                 <a:solidFill>
                   <a:srgbClr val="C8A24C"/>
                 </a:solidFill>
-                <a:latin typeface="Montserrat"/>
-              </a:rPr>
-              <a:t>02</a:t>
-            </a:r>
-          </a:p>
-        </p:txBody>
-      </p:sp>
-      <p:sp>
-        <p:nvSpPr>
-          <p:cNvPr id="15" name="TextBox 14"/>
-          <p:cNvSpPr txBox="1"/>
-          <p:nvPr/>
-        </p:nvSpPr>
-        <p:spPr>
-          <a:xfrm>
-            <a:off x="1280160" y="1901952"/>
-            <a:ext cx="7434072" cy="320040"/>
-          </a:xfrm>
-          <a:prstGeom prst="rect">
-            <a:avLst/>
-          </a:prstGeom>
-          <a:noFill/>
-        </p:spPr>
-        <p:txBody>
-          <a:bodyPr wrap="square">
-            <a:spAutoFit/>
-          </a:bodyPr>
-          <a:lstStyle/>
-          <a:p>
-            <a:pPr algn="r" rtl="1"/>
-            <a:r>
-              <a:rPr sz="1300" b="1" i="0">
-                <a:solidFill>
-                  <a:srgbClr val="FFFFFF"/>
-                </a:solidFill>
-                <a:latin typeface="Montserrat"/>
-              </a:rPr>
-              <a:t>الحل</a:t>
-            </a:r>
-          </a:p>
-        </p:txBody>
-      </p:sp>
-      <p:sp>
-        <p:nvSpPr>
-          <p:cNvPr id="16" name="TextBox 15"/>
-          <p:cNvSpPr txBox="1"/>
-          <p:nvPr/>
-        </p:nvSpPr>
-        <p:spPr>
-          <a:xfrm>
-            <a:off x="1280160" y="2221992"/>
-            <a:ext cx="7434072" cy="320040"/>
-          </a:xfrm>
-          <a:prstGeom prst="rect">
-            <a:avLst/>
-          </a:prstGeom>
-          <a:noFill/>
-        </p:spPr>
-        <p:txBody>
-          <a:bodyPr wrap="square">
-            <a:spAutoFit/>
-          </a:bodyPr>
-          <a:lstStyle/>
-          <a:p>
-            <a:pPr algn="r" rtl="1"/>
-            <a:r>
-              <a:rPr sz="900" b="0" i="0">
-                <a:solidFill>
-                  <a:srgbClr val="C8A24C"/>
-                </a:solidFill>
                 <a:latin typeface="Inter"/>
               </a:rPr>
               <a:t>تدريب حقيقي — إثبات حقيقي</a:t>
@@ -10731,14 +10688,14 @@
       </p:sp>
       <p:sp>
         <p:nvSpPr>
-          <p:cNvPr id="17" name="Rectangle 16"/>
+          <p:cNvPr id="16" name="Rectangle 15"/>
           <p:cNvSpPr/>
           <p:nvPr/>
         </p:nvSpPr>
         <p:spPr>
           <a:xfrm>
-            <a:off x="1280160" y="2693924"/>
-            <a:ext cx="9628632" cy="12700"/>
+            <a:off x="530352" y="2547620"/>
+            <a:ext cx="10789920" cy="12700"/>
           </a:xfrm>
           <a:prstGeom prst="rect">
             <a:avLst/>
@@ -10774,7 +10731,7 @@
       </p:sp>
       <p:pic>
         <p:nvPicPr>
-          <p:cNvPr id="18" name="Picture 17" descr="image-10-4.png"/>
+          <p:cNvPr id="17" name="Picture 16" descr="image-10-4.png"/>
           <p:cNvPicPr>
             <a:picLocks noChangeAspect="1"/>
           </p:cNvPicPr>
@@ -10788,8 +10745,8 @@
         </p:blipFill>
         <p:spPr>
           <a:xfrm>
-            <a:off x="9811512" y="2706624"/>
-            <a:ext cx="502920" cy="502920"/>
+            <a:off x="10908792" y="2734056"/>
+            <a:ext cx="475488" cy="475488"/>
           </a:xfrm>
           <a:prstGeom prst="rect">
             <a:avLst/>
@@ -10798,102 +10755,102 @@
       </p:pic>
       <p:sp>
         <p:nvSpPr>
+          <p:cNvPr id="18" name="TextBox 17"/>
+          <p:cNvSpPr txBox="1"/>
+          <p:nvPr/>
+        </p:nvSpPr>
+        <p:spPr>
+          <a:xfrm>
+            <a:off x="10314432" y="2743200"/>
+            <a:ext cx="502920" cy="384048"/>
+          </a:xfrm>
+          <a:prstGeom prst="rect">
+            <a:avLst/>
+          </a:prstGeom>
+          <a:noFill/>
+        </p:spPr>
+        <p:txBody>
+          <a:bodyPr wrap="square">
+            <a:spAutoFit/>
+          </a:bodyPr>
+          <a:lstStyle/>
+          <a:p>
+            <a:pPr algn="ctr"/>
+            <a:r>
+              <a:rPr sz="1000" b="1" i="0">
+                <a:solidFill>
+                  <a:srgbClr val="C8A24C"/>
+                </a:solidFill>
+                <a:latin typeface="Montserrat"/>
+              </a:rPr>
+              <a:t>03</a:t>
+            </a:r>
+          </a:p>
+        </p:txBody>
+      </p:sp>
+      <p:sp>
+        <p:nvSpPr>
           <p:cNvPr id="19" name="TextBox 18"/>
           <p:cNvSpPr txBox="1"/>
           <p:nvPr/>
         </p:nvSpPr>
         <p:spPr>
           <a:xfrm>
-            <a:off x="8988552" y="2752344"/>
-            <a:ext cx="548640" cy="411480"/>
-          </a:xfrm>
-          <a:prstGeom prst="rect">
-            <a:avLst/>
-          </a:prstGeom>
-          <a:noFill/>
-        </p:spPr>
-        <p:txBody>
-          <a:bodyPr wrap="square">
-            <a:spAutoFit/>
-          </a:bodyPr>
-          <a:lstStyle/>
-          <a:p>
-            <a:pPr algn="ctr"/>
-            <a:r>
-              <a:rPr sz="1100" b="1" i="0">
+            <a:off x="530352" y="2606040"/>
+            <a:ext cx="9601200" cy="347472"/>
+          </a:xfrm>
+          <a:prstGeom prst="rect">
+            <a:avLst/>
+          </a:prstGeom>
+          <a:noFill/>
+        </p:spPr>
+        <p:txBody>
+          <a:bodyPr wrap="square">
+            <a:spAutoFit/>
+          </a:bodyPr>
+          <a:lstStyle/>
+          <a:p>
+            <a:pPr algn="r" rtl="1"/>
+            <a:r>
+              <a:rPr sz="1300" b="1" i="0">
+                <a:solidFill>
+                  <a:srgbClr val="FFFFFF"/>
+                </a:solidFill>
+                <a:latin typeface="Montserrat"/>
+              </a:rPr>
+              <a:t>إثبات النموذج</a:t>
+            </a:r>
+          </a:p>
+        </p:txBody>
+      </p:sp>
+      <p:sp>
+        <p:nvSpPr>
+          <p:cNvPr id="20" name="TextBox 19"/>
+          <p:cNvSpPr txBox="1"/>
+          <p:nvPr/>
+        </p:nvSpPr>
+        <p:spPr>
+          <a:xfrm>
+            <a:off x="530352" y="2944368"/>
+            <a:ext cx="9601200" cy="320040"/>
+          </a:xfrm>
+          <a:prstGeom prst="rect">
+            <a:avLst/>
+          </a:prstGeom>
+          <a:noFill/>
+        </p:spPr>
+        <p:txBody>
+          <a:bodyPr wrap="square">
+            <a:spAutoFit/>
+          </a:bodyPr>
+          <a:lstStyle/>
+          <a:p>
+            <a:pPr algn="r" rtl="1"/>
+            <a:r>
+              <a:rPr sz="900" b="0" i="0">
                 <a:solidFill>
                   <a:srgbClr val="C8A24C"/>
                 </a:solidFill>
-                <a:latin typeface="Montserrat"/>
-              </a:rPr>
-              <a:t>03</a:t>
-            </a:r>
-          </a:p>
-        </p:txBody>
-      </p:sp>
-      <p:sp>
-        <p:nvSpPr>
-          <p:cNvPr id="20" name="TextBox 19"/>
-          <p:cNvSpPr txBox="1"/>
-          <p:nvPr/>
-        </p:nvSpPr>
-        <p:spPr>
-          <a:xfrm>
-            <a:off x="1280160" y="2706624"/>
-            <a:ext cx="7434072" cy="320040"/>
-          </a:xfrm>
-          <a:prstGeom prst="rect">
-            <a:avLst/>
-          </a:prstGeom>
-          <a:noFill/>
-        </p:spPr>
-        <p:txBody>
-          <a:bodyPr wrap="square">
-            <a:spAutoFit/>
-          </a:bodyPr>
-          <a:lstStyle/>
-          <a:p>
-            <a:pPr algn="r" rtl="1"/>
-            <a:r>
-              <a:rPr sz="1300" b="1" i="0">
-                <a:solidFill>
-                  <a:srgbClr val="FFFFFF"/>
-                </a:solidFill>
-                <a:latin typeface="Montserrat"/>
-              </a:rPr>
-              <a:t>إثبات النموذج</a:t>
-            </a:r>
-          </a:p>
-        </p:txBody>
-      </p:sp>
-      <p:sp>
-        <p:nvSpPr>
-          <p:cNvPr id="21" name="TextBox 20"/>
-          <p:cNvSpPr txBox="1"/>
-          <p:nvPr/>
-        </p:nvSpPr>
-        <p:spPr>
-          <a:xfrm>
-            <a:off x="1280160" y="3026664"/>
-            <a:ext cx="7434072" cy="320040"/>
-          </a:xfrm>
-          <a:prstGeom prst="rect">
-            <a:avLst/>
-          </a:prstGeom>
-          <a:noFill/>
-        </p:spPr>
-        <p:txBody>
-          <a:bodyPr wrap="square">
-            <a:spAutoFit/>
-          </a:bodyPr>
-          <a:lstStyle/>
-          <a:p>
-            <a:pPr algn="r" rtl="1"/>
-            <a:r>
-              <a:rPr sz="900" b="0" i="0">
-                <a:solidFill>
-                  <a:srgbClr val="C8A24C"/>
-                </a:solidFill>
                 <a:latin typeface="Inter"/>
               </a:rPr>
               <a:t>التجربة الريادية — الأكاديمية العربية</a:t>
@@ -10903,14 +10860,14 @@
       </p:sp>
       <p:sp>
         <p:nvSpPr>
-          <p:cNvPr id="22" name="Rectangle 21"/>
+          <p:cNvPr id="21" name="Rectangle 20"/>
           <p:cNvSpPr/>
           <p:nvPr/>
         </p:nvSpPr>
         <p:spPr>
           <a:xfrm>
-            <a:off x="1280160" y="3498596"/>
-            <a:ext cx="9628632" cy="12700"/>
+            <a:off x="530352" y="3370580"/>
+            <a:ext cx="10789920" cy="12700"/>
           </a:xfrm>
           <a:prstGeom prst="rect">
             <a:avLst/>
@@ -10946,7 +10903,7 @@
       </p:sp>
       <p:pic>
         <p:nvPicPr>
-          <p:cNvPr id="23" name="Picture 22" descr="image-10-5.png"/>
+          <p:cNvPr id="22" name="Picture 21" descr="image-10-5.png"/>
           <p:cNvPicPr>
             <a:picLocks noChangeAspect="1"/>
           </p:cNvPicPr>
@@ -10960,8 +10917,8 @@
         </p:blipFill>
         <p:spPr>
           <a:xfrm>
-            <a:off x="9811512" y="3511296"/>
-            <a:ext cx="502920" cy="502920"/>
+            <a:off x="10908792" y="3557016"/>
+            <a:ext cx="475488" cy="475488"/>
           </a:xfrm>
           <a:prstGeom prst="rect">
             <a:avLst/>
@@ -10970,102 +10927,102 @@
       </p:pic>
       <p:sp>
         <p:nvSpPr>
+          <p:cNvPr id="23" name="TextBox 22"/>
+          <p:cNvSpPr txBox="1"/>
+          <p:nvPr/>
+        </p:nvSpPr>
+        <p:spPr>
+          <a:xfrm>
+            <a:off x="10314432" y="3566160"/>
+            <a:ext cx="502920" cy="384048"/>
+          </a:xfrm>
+          <a:prstGeom prst="rect">
+            <a:avLst/>
+          </a:prstGeom>
+          <a:noFill/>
+        </p:spPr>
+        <p:txBody>
+          <a:bodyPr wrap="square">
+            <a:spAutoFit/>
+          </a:bodyPr>
+          <a:lstStyle/>
+          <a:p>
+            <a:pPr algn="ctr"/>
+            <a:r>
+              <a:rPr sz="1000" b="1" i="0">
+                <a:solidFill>
+                  <a:srgbClr val="C8A24C"/>
+                </a:solidFill>
+                <a:latin typeface="Montserrat"/>
+              </a:rPr>
+              <a:t>04</a:t>
+            </a:r>
+          </a:p>
+        </p:txBody>
+      </p:sp>
+      <p:sp>
+        <p:nvSpPr>
           <p:cNvPr id="24" name="TextBox 23"/>
           <p:cNvSpPr txBox="1"/>
           <p:nvPr/>
         </p:nvSpPr>
         <p:spPr>
           <a:xfrm>
-            <a:off x="8988552" y="3557016"/>
-            <a:ext cx="548640" cy="411480"/>
-          </a:xfrm>
-          <a:prstGeom prst="rect">
-            <a:avLst/>
-          </a:prstGeom>
-          <a:noFill/>
-        </p:spPr>
-        <p:txBody>
-          <a:bodyPr wrap="square">
-            <a:spAutoFit/>
-          </a:bodyPr>
-          <a:lstStyle/>
-          <a:p>
-            <a:pPr algn="ctr"/>
-            <a:r>
-              <a:rPr sz="1100" b="1" i="0">
+            <a:off x="530352" y="3429000"/>
+            <a:ext cx="9601200" cy="347472"/>
+          </a:xfrm>
+          <a:prstGeom prst="rect">
+            <a:avLst/>
+          </a:prstGeom>
+          <a:noFill/>
+        </p:spPr>
+        <p:txBody>
+          <a:bodyPr wrap="square">
+            <a:spAutoFit/>
+          </a:bodyPr>
+          <a:lstStyle/>
+          <a:p>
+            <a:pPr algn="r" rtl="1"/>
+            <a:r>
+              <a:rPr sz="1300" b="1" i="0">
+                <a:solidFill>
+                  <a:srgbClr val="FFFFFF"/>
+                </a:solidFill>
+                <a:latin typeface="Montserrat"/>
+              </a:rPr>
+              <a:t>خطة المراحل</a:t>
+            </a:r>
+          </a:p>
+        </p:txBody>
+      </p:sp>
+      <p:sp>
+        <p:nvSpPr>
+          <p:cNvPr id="25" name="TextBox 24"/>
+          <p:cNvSpPr txBox="1"/>
+          <p:nvPr/>
+        </p:nvSpPr>
+        <p:spPr>
+          <a:xfrm>
+            <a:off x="530352" y="3767328"/>
+            <a:ext cx="9601200" cy="320040"/>
+          </a:xfrm>
+          <a:prstGeom prst="rect">
+            <a:avLst/>
+          </a:prstGeom>
+          <a:noFill/>
+        </p:spPr>
+        <p:txBody>
+          <a:bodyPr wrap="square">
+            <a:spAutoFit/>
+          </a:bodyPr>
+          <a:lstStyle/>
+          <a:p>
+            <a:pPr algn="r" rtl="1"/>
+            <a:r>
+              <a:rPr sz="900" b="0" i="0">
                 <a:solidFill>
                   <a:srgbClr val="C8A24C"/>
                 </a:solidFill>
-                <a:latin typeface="Montserrat"/>
-              </a:rPr>
-              <a:t>04</a:t>
-            </a:r>
-          </a:p>
-        </p:txBody>
-      </p:sp>
-      <p:sp>
-        <p:nvSpPr>
-          <p:cNvPr id="25" name="TextBox 24"/>
-          <p:cNvSpPr txBox="1"/>
-          <p:nvPr/>
-        </p:nvSpPr>
-        <p:spPr>
-          <a:xfrm>
-            <a:off x="1280160" y="3511296"/>
-            <a:ext cx="7434072" cy="320040"/>
-          </a:xfrm>
-          <a:prstGeom prst="rect">
-            <a:avLst/>
-          </a:prstGeom>
-          <a:noFill/>
-        </p:spPr>
-        <p:txBody>
-          <a:bodyPr wrap="square">
-            <a:spAutoFit/>
-          </a:bodyPr>
-          <a:lstStyle/>
-          <a:p>
-            <a:pPr algn="r" rtl="1"/>
-            <a:r>
-              <a:rPr sz="1300" b="1" i="0">
-                <a:solidFill>
-                  <a:srgbClr val="FFFFFF"/>
-                </a:solidFill>
-                <a:latin typeface="Montserrat"/>
-              </a:rPr>
-              <a:t>خطة المراحل</a:t>
-            </a:r>
-          </a:p>
-        </p:txBody>
-      </p:sp>
-      <p:sp>
-        <p:nvSpPr>
-          <p:cNvPr id="26" name="TextBox 25"/>
-          <p:cNvSpPr txBox="1"/>
-          <p:nvPr/>
-        </p:nvSpPr>
-        <p:spPr>
-          <a:xfrm>
-            <a:off x="1280160" y="3831336"/>
-            <a:ext cx="7434072" cy="320040"/>
-          </a:xfrm>
-          <a:prstGeom prst="rect">
-            <a:avLst/>
-          </a:prstGeom>
-          <a:noFill/>
-        </p:spPr>
-        <p:txBody>
-          <a:bodyPr wrap="square">
-            <a:spAutoFit/>
-          </a:bodyPr>
-          <a:lstStyle/>
-          <a:p>
-            <a:pPr algn="r" rtl="1"/>
-            <a:r>
-              <a:rPr sz="900" b="0" i="0">
-                <a:solidFill>
-                  <a:srgbClr val="C8A24C"/>
-                </a:solidFill>
                 <a:latin typeface="Inter"/>
               </a:rPr>
               <a:t>من 60 شابًا إلى برنامج وطني</a:t>
@@ -11075,14 +11032,14 @@
       </p:sp>
       <p:sp>
         <p:nvSpPr>
-          <p:cNvPr id="27" name="Rectangle 26"/>
+          <p:cNvPr id="26" name="Rectangle 25"/>
           <p:cNvSpPr/>
           <p:nvPr/>
         </p:nvSpPr>
         <p:spPr>
           <a:xfrm>
-            <a:off x="1280160" y="4303268"/>
-            <a:ext cx="9628632" cy="12700"/>
+            <a:off x="530352" y="4193540"/>
+            <a:ext cx="10789920" cy="12700"/>
           </a:xfrm>
           <a:prstGeom prst="rect">
             <a:avLst/>
@@ -11118,7 +11075,7 @@
       </p:sp>
       <p:pic>
         <p:nvPicPr>
-          <p:cNvPr id="28" name="Picture 27" descr="image-10-6.png"/>
+          <p:cNvPr id="27" name="Picture 26" descr="image-10-6.png"/>
           <p:cNvPicPr>
             <a:picLocks noChangeAspect="1"/>
           </p:cNvPicPr>
@@ -11132,8 +11089,8 @@
         </p:blipFill>
         <p:spPr>
           <a:xfrm>
-            <a:off x="9811512" y="4315968"/>
-            <a:ext cx="502920" cy="502920"/>
+            <a:off x="10908792" y="4379976"/>
+            <a:ext cx="475488" cy="475488"/>
           </a:xfrm>
           <a:prstGeom prst="rect">
             <a:avLst/>
@@ -11142,102 +11099,102 @@
       </p:pic>
       <p:sp>
         <p:nvSpPr>
+          <p:cNvPr id="28" name="TextBox 27"/>
+          <p:cNvSpPr txBox="1"/>
+          <p:nvPr/>
+        </p:nvSpPr>
+        <p:spPr>
+          <a:xfrm>
+            <a:off x="10314432" y="4389120"/>
+            <a:ext cx="502920" cy="384048"/>
+          </a:xfrm>
+          <a:prstGeom prst="rect">
+            <a:avLst/>
+          </a:prstGeom>
+          <a:noFill/>
+        </p:spPr>
+        <p:txBody>
+          <a:bodyPr wrap="square">
+            <a:spAutoFit/>
+          </a:bodyPr>
+          <a:lstStyle/>
+          <a:p>
+            <a:pPr algn="ctr"/>
+            <a:r>
+              <a:rPr sz="1000" b="1" i="0">
+                <a:solidFill>
+                  <a:srgbClr val="C8A24C"/>
+                </a:solidFill>
+                <a:latin typeface="Montserrat"/>
+              </a:rPr>
+              <a:t>05</a:t>
+            </a:r>
+          </a:p>
+        </p:txBody>
+      </p:sp>
+      <p:sp>
+        <p:nvSpPr>
           <p:cNvPr id="29" name="TextBox 28"/>
           <p:cNvSpPr txBox="1"/>
           <p:nvPr/>
         </p:nvSpPr>
         <p:spPr>
           <a:xfrm>
-            <a:off x="8988552" y="4361688"/>
-            <a:ext cx="548640" cy="411480"/>
-          </a:xfrm>
-          <a:prstGeom prst="rect">
-            <a:avLst/>
-          </a:prstGeom>
-          <a:noFill/>
-        </p:spPr>
-        <p:txBody>
-          <a:bodyPr wrap="square">
-            <a:spAutoFit/>
-          </a:bodyPr>
-          <a:lstStyle/>
-          <a:p>
-            <a:pPr algn="ctr"/>
-            <a:r>
-              <a:rPr sz="1100" b="1" i="0">
+            <a:off x="530352" y="4251960"/>
+            <a:ext cx="9601200" cy="347472"/>
+          </a:xfrm>
+          <a:prstGeom prst="rect">
+            <a:avLst/>
+          </a:prstGeom>
+          <a:noFill/>
+        </p:spPr>
+        <p:txBody>
+          <a:bodyPr wrap="square">
+            <a:spAutoFit/>
+          </a:bodyPr>
+          <a:lstStyle/>
+          <a:p>
+            <a:pPr algn="r" rtl="1"/>
+            <a:r>
+              <a:rPr sz="1300" b="1" i="0">
+                <a:solidFill>
+                  <a:srgbClr val="FFFFFF"/>
+                </a:solidFill>
+                <a:latin typeface="Montserrat"/>
+              </a:rPr>
+              <a:t>المؤشرات والأثر</a:t>
+            </a:r>
+          </a:p>
+        </p:txBody>
+      </p:sp>
+      <p:sp>
+        <p:nvSpPr>
+          <p:cNvPr id="30" name="TextBox 29"/>
+          <p:cNvSpPr txBox="1"/>
+          <p:nvPr/>
+        </p:nvSpPr>
+        <p:spPr>
+          <a:xfrm>
+            <a:off x="530352" y="4590288"/>
+            <a:ext cx="9601200" cy="320040"/>
+          </a:xfrm>
+          <a:prstGeom prst="rect">
+            <a:avLst/>
+          </a:prstGeom>
+          <a:noFill/>
+        </p:spPr>
+        <p:txBody>
+          <a:bodyPr wrap="square">
+            <a:spAutoFit/>
+          </a:bodyPr>
+          <a:lstStyle/>
+          <a:p>
+            <a:pPr algn="r" rtl="1"/>
+            <a:r>
+              <a:rPr sz="900" b="0" i="0">
                 <a:solidFill>
                   <a:srgbClr val="C8A24C"/>
                 </a:solidFill>
-                <a:latin typeface="Montserrat"/>
-              </a:rPr>
-              <a:t>05</a:t>
-            </a:r>
-          </a:p>
-        </p:txBody>
-      </p:sp>
-      <p:sp>
-        <p:nvSpPr>
-          <p:cNvPr id="30" name="TextBox 29"/>
-          <p:cNvSpPr txBox="1"/>
-          <p:nvPr/>
-        </p:nvSpPr>
-        <p:spPr>
-          <a:xfrm>
-            <a:off x="1280160" y="4315968"/>
-            <a:ext cx="7434072" cy="320040"/>
-          </a:xfrm>
-          <a:prstGeom prst="rect">
-            <a:avLst/>
-          </a:prstGeom>
-          <a:noFill/>
-        </p:spPr>
-        <p:txBody>
-          <a:bodyPr wrap="square">
-            <a:spAutoFit/>
-          </a:bodyPr>
-          <a:lstStyle/>
-          <a:p>
-            <a:pPr algn="r" rtl="1"/>
-            <a:r>
-              <a:rPr sz="1300" b="1" i="0">
-                <a:solidFill>
-                  <a:srgbClr val="FFFFFF"/>
-                </a:solidFill>
-                <a:latin typeface="Montserrat"/>
-              </a:rPr>
-              <a:t>المؤشرات والأثر</a:t>
-            </a:r>
-          </a:p>
-        </p:txBody>
-      </p:sp>
-      <p:sp>
-        <p:nvSpPr>
-          <p:cNvPr id="31" name="TextBox 30"/>
-          <p:cNvSpPr txBox="1"/>
-          <p:nvPr/>
-        </p:nvSpPr>
-        <p:spPr>
-          <a:xfrm>
-            <a:off x="1280160" y="4636008"/>
-            <a:ext cx="7434072" cy="320040"/>
-          </a:xfrm>
-          <a:prstGeom prst="rect">
-            <a:avLst/>
-          </a:prstGeom>
-          <a:noFill/>
-        </p:spPr>
-        <p:txBody>
-          <a:bodyPr wrap="square">
-            <a:spAutoFit/>
-          </a:bodyPr>
-          <a:lstStyle/>
-          <a:p>
-            <a:pPr algn="r" rtl="1"/>
-            <a:r>
-              <a:rPr sz="900" b="0" i="0">
-                <a:solidFill>
-                  <a:srgbClr val="C8A24C"/>
-                </a:solidFill>
                 <a:latin typeface="Inter"/>
               </a:rPr>
               <a:t>أرقام نقدمها ونتحمل مسؤوليتها</a:t>
@@ -11247,14 +11204,14 @@
       </p:sp>
       <p:sp>
         <p:nvSpPr>
-          <p:cNvPr id="32" name="Rectangle 31"/>
+          <p:cNvPr id="31" name="Rectangle 30"/>
           <p:cNvSpPr/>
           <p:nvPr/>
         </p:nvSpPr>
         <p:spPr>
           <a:xfrm>
-            <a:off x="1280160" y="5107940"/>
-            <a:ext cx="9628632" cy="12700"/>
+            <a:off x="530352" y="5016500"/>
+            <a:ext cx="10789920" cy="12700"/>
           </a:xfrm>
           <a:prstGeom prst="rect">
             <a:avLst/>
@@ -11290,7 +11247,7 @@
       </p:sp>
       <p:pic>
         <p:nvPicPr>
-          <p:cNvPr id="33" name="Picture 32" descr="image-10-7.png"/>
+          <p:cNvPr id="32" name="Picture 31" descr="image-10-7.png"/>
           <p:cNvPicPr>
             <a:picLocks noChangeAspect="1"/>
           </p:cNvPicPr>
@@ -11304,8 +11261,8 @@
         </p:blipFill>
         <p:spPr>
           <a:xfrm>
-            <a:off x="9811512" y="5120640"/>
-            <a:ext cx="502920" cy="502920"/>
+            <a:off x="10908792" y="5202936"/>
+            <a:ext cx="475488" cy="475488"/>
           </a:xfrm>
           <a:prstGeom prst="rect">
             <a:avLst/>
@@ -11314,102 +11271,102 @@
       </p:pic>
       <p:sp>
         <p:nvSpPr>
+          <p:cNvPr id="33" name="TextBox 32"/>
+          <p:cNvSpPr txBox="1"/>
+          <p:nvPr/>
+        </p:nvSpPr>
+        <p:spPr>
+          <a:xfrm>
+            <a:off x="10314432" y="5212080"/>
+            <a:ext cx="502920" cy="384048"/>
+          </a:xfrm>
+          <a:prstGeom prst="rect">
+            <a:avLst/>
+          </a:prstGeom>
+          <a:noFill/>
+        </p:spPr>
+        <p:txBody>
+          <a:bodyPr wrap="square">
+            <a:spAutoFit/>
+          </a:bodyPr>
+          <a:lstStyle/>
+          <a:p>
+            <a:pPr algn="ctr"/>
+            <a:r>
+              <a:rPr sz="1000" b="1" i="0">
+                <a:solidFill>
+                  <a:srgbClr val="C8A24C"/>
+                </a:solidFill>
+                <a:latin typeface="Montserrat"/>
+              </a:rPr>
+              <a:t>06</a:t>
+            </a:r>
+          </a:p>
+        </p:txBody>
+      </p:sp>
+      <p:sp>
+        <p:nvSpPr>
           <p:cNvPr id="34" name="TextBox 33"/>
           <p:cNvSpPr txBox="1"/>
           <p:nvPr/>
         </p:nvSpPr>
         <p:spPr>
           <a:xfrm>
-            <a:off x="8988552" y="5166360"/>
-            <a:ext cx="548640" cy="411480"/>
-          </a:xfrm>
-          <a:prstGeom prst="rect">
-            <a:avLst/>
-          </a:prstGeom>
-          <a:noFill/>
-        </p:spPr>
-        <p:txBody>
-          <a:bodyPr wrap="square">
-            <a:spAutoFit/>
-          </a:bodyPr>
-          <a:lstStyle/>
-          <a:p>
-            <a:pPr algn="ctr"/>
-            <a:r>
-              <a:rPr sz="1100" b="1" i="0">
+            <a:off x="530352" y="5074920"/>
+            <a:ext cx="9601200" cy="347472"/>
+          </a:xfrm>
+          <a:prstGeom prst="rect">
+            <a:avLst/>
+          </a:prstGeom>
+          <a:noFill/>
+        </p:spPr>
+        <p:txBody>
+          <a:bodyPr wrap="square">
+            <a:spAutoFit/>
+          </a:bodyPr>
+          <a:lstStyle/>
+          <a:p>
+            <a:pPr algn="r" rtl="1"/>
+            <a:r>
+              <a:rPr sz="1300" b="1" i="0">
+                <a:solidFill>
+                  <a:srgbClr val="FFFFFF"/>
+                </a:solidFill>
+                <a:latin typeface="Montserrat"/>
+              </a:rPr>
+              <a:t>التوافق والطلب</a:t>
+            </a:r>
+          </a:p>
+        </p:txBody>
+      </p:sp>
+      <p:sp>
+        <p:nvSpPr>
+          <p:cNvPr id="35" name="TextBox 34"/>
+          <p:cNvSpPr txBox="1"/>
+          <p:nvPr/>
+        </p:nvSpPr>
+        <p:spPr>
+          <a:xfrm>
+            <a:off x="530352" y="5413248"/>
+            <a:ext cx="9601200" cy="320040"/>
+          </a:xfrm>
+          <a:prstGeom prst="rect">
+            <a:avLst/>
+          </a:prstGeom>
+          <a:noFill/>
+        </p:spPr>
+        <p:txBody>
+          <a:bodyPr wrap="square">
+            <a:spAutoFit/>
+          </a:bodyPr>
+          <a:lstStyle/>
+          <a:p>
+            <a:pPr algn="r" rtl="1"/>
+            <a:r>
+              <a:rPr sz="900" b="0" i="0">
                 <a:solidFill>
                   <a:srgbClr val="C8A24C"/>
                 </a:solidFill>
-                <a:latin typeface="Montserrat"/>
-              </a:rPr>
-              <a:t>06</a:t>
-            </a:r>
-          </a:p>
-        </p:txBody>
-      </p:sp>
-      <p:sp>
-        <p:nvSpPr>
-          <p:cNvPr id="35" name="TextBox 34"/>
-          <p:cNvSpPr txBox="1"/>
-          <p:nvPr/>
-        </p:nvSpPr>
-        <p:spPr>
-          <a:xfrm>
-            <a:off x="1280160" y="5120640"/>
-            <a:ext cx="7434072" cy="320040"/>
-          </a:xfrm>
-          <a:prstGeom prst="rect">
-            <a:avLst/>
-          </a:prstGeom>
-          <a:noFill/>
-        </p:spPr>
-        <p:txBody>
-          <a:bodyPr wrap="square">
-            <a:spAutoFit/>
-          </a:bodyPr>
-          <a:lstStyle/>
-          <a:p>
-            <a:pPr algn="r" rtl="1"/>
-            <a:r>
-              <a:rPr sz="1300" b="1" i="0">
-                <a:solidFill>
-                  <a:srgbClr val="FFFFFF"/>
-                </a:solidFill>
-                <a:latin typeface="Montserrat"/>
-              </a:rPr>
-              <a:t>التوافق والطلب</a:t>
-            </a:r>
-          </a:p>
-        </p:txBody>
-      </p:sp>
-      <p:sp>
-        <p:nvSpPr>
-          <p:cNvPr id="36" name="TextBox 35"/>
-          <p:cNvSpPr txBox="1"/>
-          <p:nvPr/>
-        </p:nvSpPr>
-        <p:spPr>
-          <a:xfrm>
-            <a:off x="1280160" y="5440680"/>
-            <a:ext cx="7434072" cy="320040"/>
-          </a:xfrm>
-          <a:prstGeom prst="rect">
-            <a:avLst/>
-          </a:prstGeom>
-          <a:noFill/>
-        </p:spPr>
-        <p:txBody>
-          <a:bodyPr wrap="square">
-            <a:spAutoFit/>
-          </a:bodyPr>
-          <a:lstStyle/>
-          <a:p>
-            <a:pPr algn="r" rtl="1"/>
-            <a:r>
-              <a:rPr sz="900" b="0" i="0">
-                <a:solidFill>
-                  <a:srgbClr val="C8A24C"/>
-                </a:solidFill>
                 <a:latin typeface="Inter"/>
               </a:rPr>
               <a:t>تحالف محكم مع أولويات الوزارة</a:t>
@@ -11419,7 +11376,7 @@
       </p:sp>
       <p:sp>
         <p:nvSpPr>
-          <p:cNvPr id="37" name="Rectangle 36"/>
+          <p:cNvPr id="36" name="Rectangle 35"/>
           <p:cNvSpPr/>
           <p:nvPr/>
         </p:nvSpPr>
@@ -11462,7 +11419,7 @@
       </p:sp>
       <p:sp>
         <p:nvSpPr>
-          <p:cNvPr id="38" name="TextBox 37"/>
+          <p:cNvPr id="37" name="TextBox 36"/>
           <p:cNvSpPr txBox="1"/>
           <p:nvPr/>
         </p:nvSpPr>
@@ -11497,7 +11454,7 @@
       </p:sp>
       <p:sp>
         <p:nvSpPr>
-          <p:cNvPr id="39" name="TextBox 38"/>
+          <p:cNvPr id="38" name="TextBox 37"/>
           <p:cNvSpPr txBox="1"/>
           <p:nvPr/>
         </p:nvSpPr>
@@ -11558,7 +11515,7 @@
       <p:grpSpPr/>
       <p:pic>
         <p:nvPicPr>
-          <p:cNvPr id="2" name="Picture 1" descr="image-7-1.png"/>
+          <p:cNvPr id="2" name="Picture 1" descr="image-2-1.png"/>
           <p:cNvPicPr>
             <a:picLocks noChangeAspect="1"/>
           </p:cNvPicPr>
@@ -11573,59 +11530,16 @@
         <p:spPr>
           <a:xfrm>
             <a:off x="0" y="0"/>
-            <a:ext cx="12188952" cy="6858000"/>
+            <a:ext cx="347472" cy="6858000"/>
           </a:xfrm>
           <a:prstGeom prst="rect">
             <a:avLst/>
           </a:prstGeom>
         </p:spPr>
       </p:pic>
-      <p:sp>
-        <p:nvSpPr>
-          <p:cNvPr id="3" name="Rectangle 2"/>
-          <p:cNvSpPr/>
-          <p:nvPr/>
-        </p:nvSpPr>
-        <p:spPr>
-          <a:xfrm>
-            <a:off x="0" y="0"/>
-            <a:ext cx="12188952" cy="6858000"/>
-          </a:xfrm>
-          <a:prstGeom prst="rect">
-            <a:avLst/>
-          </a:prstGeom>
-          <a:solidFill>
-            <a:srgbClr val="0E0E0E"/>
-          </a:solidFill>
-          <a:ln>
-            <a:noFill/>
-          </a:ln>
-        </p:spPr>
-        <p:style>
-          <a:lnRef idx="1">
-            <a:schemeClr val="accent1"/>
-          </a:lnRef>
-          <a:fillRef idx="3">
-            <a:schemeClr val="accent1"/>
-          </a:fillRef>
-          <a:effectRef idx="2">
-            <a:schemeClr val="accent1"/>
-          </a:effectRef>
-          <a:fontRef idx="minor">
-            <a:schemeClr val="lt1"/>
-          </a:fontRef>
-        </p:style>
-        <p:txBody>
-          <a:bodyPr rtlCol="0" anchor="ctr"/>
-          <a:lstStyle/>
-          <a:p>
-            <a:pPr algn="ctr"/>
-          </a:p>
-        </p:txBody>
-      </p:sp>
       <p:pic>
         <p:nvPicPr>
-          <p:cNvPr id="4" name="Picture 3" descr="image-2-1.png"/>
+          <p:cNvPr id="3" name="Picture 2" descr="image-1-1.png"/>
           <p:cNvPicPr>
             <a:picLocks noChangeAspect="1"/>
           </p:cNvPicPr>
@@ -11639,48 +11553,24 @@
         </p:blipFill>
         <p:spPr>
           <a:xfrm>
-            <a:off x="0" y="0"/>
-            <a:ext cx="822960" cy="6858000"/>
+            <a:off x="11503152" y="0"/>
+            <a:ext cx="685800" cy="6858000"/>
           </a:xfrm>
           <a:prstGeom prst="rect">
             <a:avLst/>
           </a:prstGeom>
         </p:spPr>
       </p:pic>
-      <p:pic>
-        <p:nvPicPr>
-          <p:cNvPr id="5" name="Picture 4" descr="image-1-1.png"/>
-          <p:cNvPicPr>
-            <a:picLocks noChangeAspect="1"/>
-          </p:cNvPicPr>
-          <p:nvPr/>
-        </p:nvPicPr>
-        <p:blipFill>
-          <a:blip r:embed="rId4"/>
-          <a:stretch>
-            <a:fillRect/>
-          </a:stretch>
-        </p:blipFill>
-        <p:spPr>
-          <a:xfrm>
-            <a:off x="11274552" y="0"/>
-            <a:ext cx="914400" cy="6858000"/>
-          </a:xfrm>
-          <a:prstGeom prst="rect">
-            <a:avLst/>
-          </a:prstGeom>
-        </p:spPr>
-      </p:pic>
-      <p:sp>
-        <p:nvSpPr>
-          <p:cNvPr id="6" name="Rectangle 5"/>
+      <p:sp>
+        <p:nvSpPr>
+          <p:cNvPr id="4" name="Rectangle 3"/>
           <p:cNvSpPr/>
           <p:nvPr/>
         </p:nvSpPr>
         <p:spPr>
           <a:xfrm>
-            <a:off x="822960" y="0"/>
-            <a:ext cx="10451592" cy="50800"/>
+            <a:off x="347472" y="0"/>
+            <a:ext cx="11155680" cy="50800"/>
           </a:xfrm>
           <a:prstGeom prst="rect">
             <a:avLst/>
@@ -11716,7 +11606,7 @@
       </p:sp>
       <p:sp>
         <p:nvSpPr>
-          <p:cNvPr id="7" name="TextBox 6"/>
+          <p:cNvPr id="5" name="TextBox 4"/>
           <p:cNvSpPr txBox="1"/>
           <p:nvPr/>
         </p:nvSpPr>
@@ -11751,14 +11641,14 @@
       </p:sp>
       <p:sp>
         <p:nvSpPr>
-          <p:cNvPr id="8" name="TextBox 7"/>
-          <p:cNvSpPr txBox="1"/>
-          <p:nvPr/>
-        </p:nvSpPr>
-        <p:spPr>
-          <a:xfrm>
-            <a:off x="1005840" y="457200"/>
-            <a:ext cx="9994392" cy="731520"/>
+          <p:cNvPr id="6" name="TextBox 5"/>
+          <p:cNvSpPr txBox="1"/>
+          <p:nvPr/>
+        </p:nvSpPr>
+        <p:spPr>
+          <a:xfrm>
+            <a:off x="530352" y="411480"/>
+            <a:ext cx="10789920" cy="685800"/>
           </a:xfrm>
           <a:prstGeom prst="rect">
             <a:avLst/>
@@ -11786,14 +11676,14 @@
       </p:sp>
       <p:sp>
         <p:nvSpPr>
-          <p:cNvPr id="9" name="Rectangle 8"/>
+          <p:cNvPr id="7" name="Rectangle 6"/>
           <p:cNvSpPr/>
           <p:nvPr/>
         </p:nvSpPr>
         <p:spPr>
           <a:xfrm>
-            <a:off x="1005840" y="1234440"/>
-            <a:ext cx="7772400" cy="25400"/>
+            <a:off x="530352" y="1143000"/>
+            <a:ext cx="10789920" cy="25400"/>
           </a:xfrm>
           <a:prstGeom prst="rect">
             <a:avLst/>
@@ -11829,14 +11719,14 @@
       </p:sp>
       <p:sp>
         <p:nvSpPr>
-          <p:cNvPr id="10" name="TextBox 9"/>
-          <p:cNvSpPr txBox="1"/>
-          <p:nvPr/>
-        </p:nvSpPr>
-        <p:spPr>
-          <a:xfrm>
-            <a:off x="1005840" y="1371600"/>
-            <a:ext cx="6400800" cy="2011680"/>
+          <p:cNvPr id="8" name="TextBox 7"/>
+          <p:cNvSpPr txBox="1"/>
+          <p:nvPr/>
+        </p:nvSpPr>
+        <p:spPr>
+          <a:xfrm>
+            <a:off x="530352" y="1280160"/>
+            <a:ext cx="6858000" cy="1920240"/>
           </a:xfrm>
           <a:prstGeom prst="rect">
             <a:avLst/>
@@ -11851,7 +11741,7 @@
           <a:p>
             <a:pPr algn="r" rtl="1"/>
             <a:r>
-              <a:rPr sz="1300" b="0" i="0">
+              <a:rPr sz="1200" b="0" i="0">
                 <a:solidFill>
                   <a:srgbClr val="FFFFFF"/>
                 </a:solidFill>
@@ -11865,14 +11755,14 @@
       </p:sp>
       <p:sp>
         <p:nvSpPr>
-          <p:cNvPr id="11" name="Rectangle 10"/>
+          <p:cNvPr id="9" name="Rectangle 8"/>
           <p:cNvSpPr/>
           <p:nvPr/>
         </p:nvSpPr>
         <p:spPr>
           <a:xfrm>
-            <a:off x="1161288" y="3657600"/>
-            <a:ext cx="3200400" cy="1828800"/>
+            <a:off x="530352" y="3566160"/>
+            <a:ext cx="3462528" cy="1920240"/>
           </a:xfrm>
           <a:prstGeom prst="rect">
             <a:avLst/>
@@ -11910,22 +11800,22 @@
       </p:sp>
       <p:pic>
         <p:nvPicPr>
-          <p:cNvPr id="12" name="Picture 11" descr="image-8-1.png"/>
+          <p:cNvPr id="10" name="Picture 9" descr="image-8-1.png"/>
           <p:cNvPicPr>
             <a:picLocks noChangeAspect="1"/>
           </p:cNvPicPr>
           <p:nvPr/>
         </p:nvPicPr>
         <p:blipFill>
-          <a:blip r:embed="rId5"/>
+          <a:blip r:embed="rId4"/>
           <a:stretch>
             <a:fillRect/>
           </a:stretch>
         </p:blipFill>
         <p:spPr>
           <a:xfrm>
-            <a:off x="3767328" y="3749040"/>
-            <a:ext cx="502920" cy="502920"/>
+            <a:off x="3425952" y="3675888"/>
+            <a:ext cx="457200" cy="457200"/>
           </a:xfrm>
           <a:prstGeom prst="rect">
             <a:avLst/>
@@ -11934,14 +11824,84 @@
       </p:pic>
       <p:sp>
         <p:nvSpPr>
+          <p:cNvPr id="11" name="TextBox 10"/>
+          <p:cNvSpPr txBox="1"/>
+          <p:nvPr/>
+        </p:nvSpPr>
+        <p:spPr>
+          <a:xfrm>
+            <a:off x="621792" y="3840480"/>
+            <a:ext cx="2776728" cy="777240"/>
+          </a:xfrm>
+          <a:prstGeom prst="rect">
+            <a:avLst/>
+          </a:prstGeom>
+          <a:noFill/>
+        </p:spPr>
+        <p:txBody>
+          <a:bodyPr wrap="square">
+            <a:spAutoFit/>
+          </a:bodyPr>
+          <a:lstStyle/>
+          <a:p>
+            <a:pPr algn="r"/>
+            <a:r>
+              <a:rPr sz="3800" b="1" i="0">
+                <a:solidFill>
+                  <a:srgbClr val="C8A24C"/>
+                </a:solidFill>
+                <a:latin typeface="Montserrat"/>
+              </a:rPr>
+              <a:t>13.2%</a:t>
+            </a:r>
+          </a:p>
+        </p:txBody>
+      </p:sp>
+      <p:sp>
+        <p:nvSpPr>
+          <p:cNvPr id="12" name="TextBox 11"/>
+          <p:cNvSpPr txBox="1"/>
+          <p:nvPr/>
+        </p:nvSpPr>
+        <p:spPr>
+          <a:xfrm>
+            <a:off x="621792" y="4572000"/>
+            <a:ext cx="3279648" cy="548640"/>
+          </a:xfrm>
+          <a:prstGeom prst="rect">
+            <a:avLst/>
+          </a:prstGeom>
+          <a:noFill/>
+        </p:spPr>
+        <p:txBody>
+          <a:bodyPr wrap="square">
+            <a:spAutoFit/>
+          </a:bodyPr>
+          <a:lstStyle/>
+          <a:p>
+            <a:pPr algn="r" rtl="1"/>
+            <a:r>
+              <a:rPr sz="1000" b="0" i="0">
+                <a:solidFill>
+                  <a:srgbClr val="FFFFFF"/>
+                </a:solidFill>
+                <a:latin typeface="Inter"/>
+              </a:rPr>
+              <a:t>معدل بطالة الشباب — مصر 2025</a:t>
+            </a:r>
+          </a:p>
+        </p:txBody>
+      </p:sp>
+      <p:sp>
+        <p:nvSpPr>
           <p:cNvPr id="13" name="TextBox 12"/>
           <p:cNvSpPr txBox="1"/>
           <p:nvPr/>
         </p:nvSpPr>
         <p:spPr>
           <a:xfrm>
-            <a:off x="1161288" y="3977640"/>
-            <a:ext cx="3108960" cy="731520"/>
+            <a:off x="621792" y="5138928"/>
+            <a:ext cx="3279648" cy="256032"/>
           </a:xfrm>
           <a:prstGeom prst="rect">
             <a:avLst/>
@@ -11956,82 +11916,12 @@
           <a:p>
             <a:pPr algn="r"/>
             <a:r>
-              <a:rPr sz="4000" b="1" i="0">
+              <a:rPr sz="700" b="0" i="1">
                 <a:solidFill>
                   <a:srgbClr val="C8A24C"/>
                 </a:solidFill>
-                <a:latin typeface="Montserrat"/>
-              </a:rPr>
-              <a:t>13.2%</a:t>
-            </a:r>
-          </a:p>
-        </p:txBody>
-      </p:sp>
-      <p:sp>
-        <p:nvSpPr>
-          <p:cNvPr id="14" name="TextBox 13"/>
-          <p:cNvSpPr txBox="1"/>
-          <p:nvPr/>
-        </p:nvSpPr>
-        <p:spPr>
-          <a:xfrm>
-            <a:off x="1161288" y="4663440"/>
-            <a:ext cx="3108960" cy="502920"/>
-          </a:xfrm>
-          <a:prstGeom prst="rect">
-            <a:avLst/>
-          </a:prstGeom>
-          <a:noFill/>
-        </p:spPr>
-        <p:txBody>
-          <a:bodyPr wrap="square">
-            <a:spAutoFit/>
-          </a:bodyPr>
-          <a:lstStyle/>
-          <a:p>
-            <a:pPr algn="r" rtl="1"/>
-            <a:r>
-              <a:rPr sz="1000" b="0" i="0">
-                <a:solidFill>
-                  <a:srgbClr val="FFFFFF"/>
-                </a:solidFill>
                 <a:latin typeface="Inter"/>
               </a:rPr>
-              <a:t>معدل بطالة الشباب — مصر 2025</a:t>
-            </a:r>
-          </a:p>
-        </p:txBody>
-      </p:sp>
-      <p:sp>
-        <p:nvSpPr>
-          <p:cNvPr id="15" name="TextBox 14"/>
-          <p:cNvSpPr txBox="1"/>
-          <p:nvPr/>
-        </p:nvSpPr>
-        <p:spPr>
-          <a:xfrm>
-            <a:off x="1161288" y="5166360"/>
-            <a:ext cx="3108960" cy="274320"/>
-          </a:xfrm>
-          <a:prstGeom prst="rect">
-            <a:avLst/>
-          </a:prstGeom>
-          <a:noFill/>
-        </p:spPr>
-        <p:txBody>
-          <a:bodyPr wrap="square">
-            <a:spAutoFit/>
-          </a:bodyPr>
-          <a:lstStyle/>
-          <a:p>
-            <a:pPr algn="r"/>
-            <a:r>
-              <a:rPr sz="700" b="0" i="1">
-                <a:solidFill>
-                  <a:srgbClr val="C8A24C"/>
-                </a:solidFill>
-                <a:latin typeface="Inter"/>
-              </a:rPr>
               <a:t>CAPMAS 2025</a:t>
             </a:r>
           </a:p>
@@ -12039,14 +11929,14 @@
       </p:sp>
       <p:sp>
         <p:nvSpPr>
-          <p:cNvPr id="16" name="Rectangle 15"/>
+          <p:cNvPr id="14" name="Rectangle 13"/>
           <p:cNvSpPr/>
           <p:nvPr/>
         </p:nvSpPr>
         <p:spPr>
           <a:xfrm>
-            <a:off x="4617720" y="3657600"/>
-            <a:ext cx="3200400" cy="1828800"/>
+            <a:off x="4194048" y="3566160"/>
+            <a:ext cx="3462528" cy="1920240"/>
           </a:xfrm>
           <a:prstGeom prst="rect">
             <a:avLst/>
@@ -12084,22 +11974,22 @@
       </p:sp>
       <p:pic>
         <p:nvPicPr>
-          <p:cNvPr id="17" name="Picture 16" descr="image-8-5.png"/>
+          <p:cNvPr id="15" name="Picture 14" descr="image-8-5.png"/>
           <p:cNvPicPr>
             <a:picLocks noChangeAspect="1"/>
           </p:cNvPicPr>
           <p:nvPr/>
         </p:nvPicPr>
         <p:blipFill>
-          <a:blip r:embed="rId6"/>
+          <a:blip r:embed="rId5"/>
           <a:stretch>
             <a:fillRect/>
           </a:stretch>
         </p:blipFill>
         <p:spPr>
           <a:xfrm>
-            <a:off x="7223760" y="3749040"/>
-            <a:ext cx="502920" cy="502920"/>
+            <a:off x="7089648" y="3675888"/>
+            <a:ext cx="457200" cy="457200"/>
           </a:xfrm>
           <a:prstGeom prst="rect">
             <a:avLst/>
@@ -12108,14 +11998,84 @@
       </p:pic>
       <p:sp>
         <p:nvSpPr>
+          <p:cNvPr id="16" name="TextBox 15"/>
+          <p:cNvSpPr txBox="1"/>
+          <p:nvPr/>
+        </p:nvSpPr>
+        <p:spPr>
+          <a:xfrm>
+            <a:off x="4285488" y="3840480"/>
+            <a:ext cx="2776728" cy="777240"/>
+          </a:xfrm>
+          <a:prstGeom prst="rect">
+            <a:avLst/>
+          </a:prstGeom>
+          <a:noFill/>
+        </p:spPr>
+        <p:txBody>
+          <a:bodyPr wrap="square">
+            <a:spAutoFit/>
+          </a:bodyPr>
+          <a:lstStyle/>
+          <a:p>
+            <a:pPr algn="r"/>
+            <a:r>
+              <a:rPr sz="3800" b="1" i="0">
+                <a:solidFill>
+                  <a:srgbClr val="C8A24C"/>
+                </a:solidFill>
+                <a:latin typeface="Montserrat"/>
+              </a:rPr>
+              <a:t>16.9%</a:t>
+            </a:r>
+          </a:p>
+        </p:txBody>
+      </p:sp>
+      <p:sp>
+        <p:nvSpPr>
+          <p:cNvPr id="17" name="TextBox 16"/>
+          <p:cNvSpPr txBox="1"/>
+          <p:nvPr/>
+        </p:nvSpPr>
+        <p:spPr>
+          <a:xfrm>
+            <a:off x="4285488" y="4572000"/>
+            <a:ext cx="3279648" cy="548640"/>
+          </a:xfrm>
+          <a:prstGeom prst="rect">
+            <a:avLst/>
+          </a:prstGeom>
+          <a:noFill/>
+        </p:spPr>
+        <p:txBody>
+          <a:bodyPr wrap="square">
+            <a:spAutoFit/>
+          </a:bodyPr>
+          <a:lstStyle/>
+          <a:p>
+            <a:pPr algn="r" rtl="1"/>
+            <a:r>
+              <a:rPr sz="1000" b="0" i="0">
+                <a:solidFill>
+                  <a:srgbClr val="FFFFFF"/>
+                </a:solidFill>
+                <a:latin typeface="Inter"/>
+              </a:rPr>
+              <a:t>بطالة الفئة العمرية 20–24 سنة</a:t>
+            </a:r>
+          </a:p>
+        </p:txBody>
+      </p:sp>
+      <p:sp>
+        <p:nvSpPr>
           <p:cNvPr id="18" name="TextBox 17"/>
           <p:cNvSpPr txBox="1"/>
           <p:nvPr/>
         </p:nvSpPr>
         <p:spPr>
           <a:xfrm>
-            <a:off x="4617720" y="3977640"/>
-            <a:ext cx="3108960" cy="731520"/>
+            <a:off x="4285488" y="5138928"/>
+            <a:ext cx="3279648" cy="256032"/>
           </a:xfrm>
           <a:prstGeom prst="rect">
             <a:avLst/>
@@ -12130,82 +12090,12 @@
           <a:p>
             <a:pPr algn="r"/>
             <a:r>
-              <a:rPr sz="4000" b="1" i="0">
+              <a:rPr sz="700" b="0" i="1">
                 <a:solidFill>
                   <a:srgbClr val="C8A24C"/>
                 </a:solidFill>
-                <a:latin typeface="Montserrat"/>
-              </a:rPr>
-              <a:t>16.9%</a:t>
-            </a:r>
-          </a:p>
-        </p:txBody>
-      </p:sp>
-      <p:sp>
-        <p:nvSpPr>
-          <p:cNvPr id="19" name="TextBox 18"/>
-          <p:cNvSpPr txBox="1"/>
-          <p:nvPr/>
-        </p:nvSpPr>
-        <p:spPr>
-          <a:xfrm>
-            <a:off x="4617720" y="4663440"/>
-            <a:ext cx="3108960" cy="502920"/>
-          </a:xfrm>
-          <a:prstGeom prst="rect">
-            <a:avLst/>
-          </a:prstGeom>
-          <a:noFill/>
-        </p:spPr>
-        <p:txBody>
-          <a:bodyPr wrap="square">
-            <a:spAutoFit/>
-          </a:bodyPr>
-          <a:lstStyle/>
-          <a:p>
-            <a:pPr algn="r" rtl="1"/>
-            <a:r>
-              <a:rPr sz="1000" b="0" i="0">
-                <a:solidFill>
-                  <a:srgbClr val="FFFFFF"/>
-                </a:solidFill>
                 <a:latin typeface="Inter"/>
               </a:rPr>
-              <a:t>بطالة الفئة العمرية 20–24 سنة</a:t>
-            </a:r>
-          </a:p>
-        </p:txBody>
-      </p:sp>
-      <p:sp>
-        <p:nvSpPr>
-          <p:cNvPr id="20" name="TextBox 19"/>
-          <p:cNvSpPr txBox="1"/>
-          <p:nvPr/>
-        </p:nvSpPr>
-        <p:spPr>
-          <a:xfrm>
-            <a:off x="4617720" y="5166360"/>
-            <a:ext cx="3108960" cy="274320"/>
-          </a:xfrm>
-          <a:prstGeom prst="rect">
-            <a:avLst/>
-          </a:prstGeom>
-          <a:noFill/>
-        </p:spPr>
-        <p:txBody>
-          <a:bodyPr wrap="square">
-            <a:spAutoFit/>
-          </a:bodyPr>
-          <a:lstStyle/>
-          <a:p>
-            <a:pPr algn="r"/>
-            <a:r>
-              <a:rPr sz="700" b="0" i="1">
-                <a:solidFill>
-                  <a:srgbClr val="C8A24C"/>
-                </a:solidFill>
-                <a:latin typeface="Inter"/>
-              </a:rPr>
               <a:t>CAPMAS 2025</a:t>
             </a:r>
           </a:p>
@@ -12213,14 +12103,14 @@
       </p:sp>
       <p:sp>
         <p:nvSpPr>
-          <p:cNvPr id="21" name="Rectangle 20"/>
+          <p:cNvPr id="19" name="Rectangle 18"/>
           <p:cNvSpPr/>
           <p:nvPr/>
         </p:nvSpPr>
         <p:spPr>
           <a:xfrm>
-            <a:off x="8074152" y="3657600"/>
-            <a:ext cx="3200400" cy="1828800"/>
+            <a:off x="7857744" y="3566160"/>
+            <a:ext cx="3462528" cy="1920240"/>
           </a:xfrm>
           <a:prstGeom prst="rect">
             <a:avLst/>
@@ -12258,22 +12148,22 @@
       </p:sp>
       <p:pic>
         <p:nvPicPr>
-          <p:cNvPr id="22" name="Picture 21" descr="image-8-9.png"/>
+          <p:cNvPr id="20" name="Picture 19" descr="image-8-9.png"/>
           <p:cNvPicPr>
             <a:picLocks noChangeAspect="1"/>
           </p:cNvPicPr>
           <p:nvPr/>
         </p:nvPicPr>
         <p:blipFill>
-          <a:blip r:embed="rId7"/>
+          <a:blip r:embed="rId6"/>
           <a:stretch>
             <a:fillRect/>
           </a:stretch>
         </p:blipFill>
         <p:spPr>
           <a:xfrm>
-            <a:off x="10680192" y="3749040"/>
-            <a:ext cx="502920" cy="502920"/>
+            <a:off x="10753344" y="3675888"/>
+            <a:ext cx="457200" cy="457200"/>
           </a:xfrm>
           <a:prstGeom prst="rect">
             <a:avLst/>
@@ -12282,14 +12172,84 @@
       </p:pic>
       <p:sp>
         <p:nvSpPr>
+          <p:cNvPr id="21" name="TextBox 20"/>
+          <p:cNvSpPr txBox="1"/>
+          <p:nvPr/>
+        </p:nvSpPr>
+        <p:spPr>
+          <a:xfrm>
+            <a:off x="7949184" y="3840480"/>
+            <a:ext cx="2776728" cy="777240"/>
+          </a:xfrm>
+          <a:prstGeom prst="rect">
+            <a:avLst/>
+          </a:prstGeom>
+          <a:noFill/>
+        </p:spPr>
+        <p:txBody>
+          <a:bodyPr wrap="square">
+            <a:spAutoFit/>
+          </a:bodyPr>
+          <a:lstStyle/>
+          <a:p>
+            <a:pPr algn="r"/>
+            <a:r>
+              <a:rPr sz="3800" b="1" i="0">
+                <a:solidFill>
+                  <a:srgbClr val="C8A24C"/>
+                </a:solidFill>
+                <a:latin typeface="Montserrat"/>
+              </a:rPr>
+              <a:t>33.8%</a:t>
+            </a:r>
+          </a:p>
+        </p:txBody>
+      </p:sp>
+      <p:sp>
+        <p:nvSpPr>
+          <p:cNvPr id="22" name="TextBox 21"/>
+          <p:cNvSpPr txBox="1"/>
+          <p:nvPr/>
+        </p:nvSpPr>
+        <p:spPr>
+          <a:xfrm>
+            <a:off x="7949184" y="4572000"/>
+            <a:ext cx="3279648" cy="548640"/>
+          </a:xfrm>
+          <a:prstGeom prst="rect">
+            <a:avLst/>
+          </a:prstGeom>
+          <a:noFill/>
+        </p:spPr>
+        <p:txBody>
+          <a:bodyPr wrap="square">
+            <a:spAutoFit/>
+          </a:bodyPr>
+          <a:lstStyle/>
+          <a:p>
+            <a:pPr algn="r" rtl="1"/>
+            <a:r>
+              <a:rPr sz="1000" b="0" i="0">
+                <a:solidFill>
+                  <a:srgbClr val="FFFFFF"/>
+                </a:solidFill>
+                <a:latin typeface="Inter"/>
+              </a:rPr>
+              <a:t>بطالة الشابات — الأعلى تاريخياً</a:t>
+            </a:r>
+          </a:p>
+        </p:txBody>
+      </p:sp>
+      <p:sp>
+        <p:nvSpPr>
           <p:cNvPr id="23" name="TextBox 22"/>
           <p:cNvSpPr txBox="1"/>
           <p:nvPr/>
         </p:nvSpPr>
         <p:spPr>
           <a:xfrm>
-            <a:off x="8074152" y="3977640"/>
-            <a:ext cx="3108960" cy="731520"/>
+            <a:off x="7949184" y="5138928"/>
+            <a:ext cx="3279648" cy="256032"/>
           </a:xfrm>
           <a:prstGeom prst="rect">
             <a:avLst/>
@@ -12304,82 +12264,12 @@
           <a:p>
             <a:pPr algn="r"/>
             <a:r>
-              <a:rPr sz="4000" b="1" i="0">
+              <a:rPr sz="700" b="0" i="1">
                 <a:solidFill>
                   <a:srgbClr val="C8A24C"/>
                 </a:solidFill>
-                <a:latin typeface="Montserrat"/>
-              </a:rPr>
-              <a:t>33.8%</a:t>
-            </a:r>
-          </a:p>
-        </p:txBody>
-      </p:sp>
-      <p:sp>
-        <p:nvSpPr>
-          <p:cNvPr id="24" name="TextBox 23"/>
-          <p:cNvSpPr txBox="1"/>
-          <p:nvPr/>
-        </p:nvSpPr>
-        <p:spPr>
-          <a:xfrm>
-            <a:off x="8074152" y="4663440"/>
-            <a:ext cx="3108960" cy="502920"/>
-          </a:xfrm>
-          <a:prstGeom prst="rect">
-            <a:avLst/>
-          </a:prstGeom>
-          <a:noFill/>
-        </p:spPr>
-        <p:txBody>
-          <a:bodyPr wrap="square">
-            <a:spAutoFit/>
-          </a:bodyPr>
-          <a:lstStyle/>
-          <a:p>
-            <a:pPr algn="r" rtl="1"/>
-            <a:r>
-              <a:rPr sz="1000" b="0" i="0">
-                <a:solidFill>
-                  <a:srgbClr val="FFFFFF"/>
-                </a:solidFill>
                 <a:latin typeface="Inter"/>
               </a:rPr>
-              <a:t>بطالة الشابات — الأعلى تاريخياً</a:t>
-            </a:r>
-          </a:p>
-        </p:txBody>
-      </p:sp>
-      <p:sp>
-        <p:nvSpPr>
-          <p:cNvPr id="25" name="TextBox 24"/>
-          <p:cNvSpPr txBox="1"/>
-          <p:nvPr/>
-        </p:nvSpPr>
-        <p:spPr>
-          <a:xfrm>
-            <a:off x="8074152" y="5166360"/>
-            <a:ext cx="3108960" cy="274320"/>
-          </a:xfrm>
-          <a:prstGeom prst="rect">
-            <a:avLst/>
-          </a:prstGeom>
-          <a:noFill/>
-        </p:spPr>
-        <p:txBody>
-          <a:bodyPr wrap="square">
-            <a:spAutoFit/>
-          </a:bodyPr>
-          <a:lstStyle/>
-          <a:p>
-            <a:pPr algn="r"/>
-            <a:r>
-              <a:rPr sz="700" b="0" i="1">
-                <a:solidFill>
-                  <a:srgbClr val="C8A24C"/>
-                </a:solidFill>
-                <a:latin typeface="Inter"/>
-              </a:rPr>
               <a:t>CAPMAS 2025</a:t>
             </a:r>
           </a:p>
@@ -12387,7 +12277,7 @@
       </p:sp>
       <p:sp>
         <p:nvSpPr>
-          <p:cNvPr id="26" name="Rectangle 25"/>
+          <p:cNvPr id="24" name="Rectangle 23"/>
           <p:cNvSpPr/>
           <p:nvPr/>
         </p:nvSpPr>
@@ -12430,7 +12320,7 @@
       </p:sp>
       <p:sp>
         <p:nvSpPr>
-          <p:cNvPr id="27" name="TextBox 26"/>
+          <p:cNvPr id="25" name="TextBox 24"/>
           <p:cNvSpPr txBox="1"/>
           <p:nvPr/>
         </p:nvSpPr>
@@ -12465,7 +12355,7 @@
       </p:sp>
       <p:sp>
         <p:nvSpPr>
-          <p:cNvPr id="28" name="TextBox 27"/>
+          <p:cNvPr id="26" name="TextBox 25"/>
           <p:cNvSpPr txBox="1"/>
           <p:nvPr/>
         </p:nvSpPr>
@@ -12541,7 +12431,7 @@
         <p:spPr>
           <a:xfrm>
             <a:off x="0" y="0"/>
-            <a:ext cx="12188952" cy="6858000"/>
+            <a:ext cx="5850696" cy="6858000"/>
           </a:xfrm>
           <a:prstGeom prst="rect">
             <a:avLst/>
@@ -12556,8 +12446,8 @@
         </p:nvSpPr>
         <p:spPr>
           <a:xfrm>
-            <a:off x="4875580" y="0"/>
-            <a:ext cx="7313371" cy="6858000"/>
+            <a:off x="5485028" y="0"/>
+            <a:ext cx="6703923" cy="6858000"/>
           </a:xfrm>
           <a:prstGeom prst="rect">
             <a:avLst/>
@@ -12600,7 +12490,7 @@
         <p:spPr>
           <a:xfrm>
             <a:off x="0" y="0"/>
-            <a:ext cx="109728" cy="6858000"/>
+            <a:ext cx="63500" cy="6858000"/>
           </a:xfrm>
           <a:prstGeom prst="rect">
             <a:avLst/>
@@ -12642,8 +12532,8 @@
         </p:nvSpPr>
         <p:spPr>
           <a:xfrm>
-            <a:off x="109728" y="2400300"/>
-            <a:ext cx="54864" cy="2057400"/>
+            <a:off x="63500" y="2606040"/>
+            <a:ext cx="50800" cy="1645920"/>
           </a:xfrm>
           <a:prstGeom prst="rect">
             <a:avLst/>
@@ -12693,8 +12583,8 @@
         </p:blipFill>
         <p:spPr>
           <a:xfrm>
-            <a:off x="11274552" y="0"/>
-            <a:ext cx="914400" cy="6858000"/>
+            <a:off x="11503152" y="0"/>
+            <a:ext cx="685800" cy="6858000"/>
           </a:xfrm>
           <a:prstGeom prst="rect">
             <a:avLst/>
@@ -12709,8 +12599,8 @@
         </p:nvSpPr>
         <p:spPr>
           <a:xfrm>
-            <a:off x="274320" y="1097280"/>
-            <a:ext cx="4572000" cy="2743200"/>
+            <a:off x="457200" y="731520"/>
+            <a:ext cx="5486400" cy="3200400"/>
           </a:xfrm>
           <a:prstGeom prst="rect">
             <a:avLst/>
@@ -12725,9 +12615,9 @@
           <a:p>
             <a:pPr algn="l"/>
             <a:r>
-              <a:rPr sz="14000" b="1" i="0">
-                <a:solidFill>
-                  <a:srgbClr val="282008"/>
+              <a:rPr sz="16000" b="1" i="0">
+                <a:solidFill>
+                  <a:srgbClr val="221A06"/>
                 </a:solidFill>
                 <a:latin typeface="Montserrat"/>
               </a:rPr>
@@ -12744,8 +12634,8 @@
         </p:nvSpPr>
         <p:spPr>
           <a:xfrm>
-            <a:off x="274320" y="2286000"/>
-            <a:ext cx="10725912" cy="1097280"/>
+            <a:off x="457200" y="2194560"/>
+            <a:ext cx="10863072" cy="1188720"/>
           </a:xfrm>
           <a:prstGeom prst="rect">
             <a:avLst/>
@@ -12760,7 +12650,7 @@
           <a:p>
             <a:pPr algn="r" rtl="1"/>
             <a:r>
-              <a:rPr sz="5200" b="1" i="0">
+              <a:rPr sz="5400" b="1" i="0">
                 <a:solidFill>
                   <a:srgbClr val="FFFFFF"/>
                 </a:solidFill>
@@ -12779,8 +12669,8 @@
         </p:nvSpPr>
         <p:spPr>
           <a:xfrm>
-            <a:off x="274320" y="3474720"/>
-            <a:ext cx="10725912" cy="38100"/>
+            <a:off x="457200" y="3474720"/>
+            <a:ext cx="10863072" cy="38100"/>
           </a:xfrm>
           <a:prstGeom prst="rect">
             <a:avLst/>
@@ -12822,8 +12712,8 @@
         </p:nvSpPr>
         <p:spPr>
           <a:xfrm>
-            <a:off x="274320" y="3611880"/>
-            <a:ext cx="10725912" cy="548640"/>
+            <a:off x="457200" y="3611880"/>
+            <a:ext cx="10863072" cy="594360"/>
           </a:xfrm>
           <a:prstGeom prst="rect">
             <a:avLst/>
@@ -12838,7 +12728,7 @@
           <a:p>
             <a:pPr algn="r" rtl="1"/>
             <a:r>
-              <a:rPr sz="1800" b="0" i="0">
+              <a:rPr sz="2000" b="0" i="0">
                 <a:solidFill>
                   <a:srgbClr val="C8A24C"/>
                 </a:solidFill>
@@ -13005,7 +12895,7 @@
         <p:spPr>
           <a:xfrm>
             <a:off x="0" y="0"/>
-            <a:ext cx="914400" cy="6858000"/>
+            <a:ext cx="347472" cy="6858000"/>
           </a:xfrm>
           <a:prstGeom prst="rect">
             <a:avLst/>
@@ -13028,8 +12918,8 @@
         </p:blipFill>
         <p:spPr>
           <a:xfrm>
-            <a:off x="11274552" y="0"/>
-            <a:ext cx="914400" cy="6858000"/>
+            <a:off x="11503152" y="0"/>
+            <a:ext cx="685800" cy="6858000"/>
           </a:xfrm>
           <a:prstGeom prst="rect">
             <a:avLst/>
@@ -13044,8 +12934,8 @@
         </p:nvSpPr>
         <p:spPr>
           <a:xfrm>
-            <a:off x="914400" y="0"/>
-            <a:ext cx="10360152" cy="50800"/>
+            <a:off x="347472" y="0"/>
+            <a:ext cx="11155680" cy="50800"/>
           </a:xfrm>
           <a:prstGeom prst="rect">
             <a:avLst/>
@@ -13122,8 +13012,8 @@
         </p:nvSpPr>
         <p:spPr>
           <a:xfrm>
-            <a:off x="1097280" y="411480"/>
-            <a:ext cx="9902952" cy="640080"/>
+            <a:off x="530352" y="411480"/>
+            <a:ext cx="10789920" cy="640080"/>
           </a:xfrm>
           <a:prstGeom prst="rect">
             <a:avLst/>
@@ -13157,8 +13047,8 @@
         </p:nvSpPr>
         <p:spPr>
           <a:xfrm>
-            <a:off x="1097280" y="1097280"/>
-            <a:ext cx="9902952" cy="25400"/>
+            <a:off x="530352" y="1097280"/>
+            <a:ext cx="10789920" cy="25400"/>
           </a:xfrm>
           <a:prstGeom prst="rect">
             <a:avLst/>
@@ -13200,8 +13090,8 @@
         </p:nvSpPr>
         <p:spPr>
           <a:xfrm>
-            <a:off x="6048756" y="1234440"/>
-            <a:ext cx="4677156" cy="1188720"/>
+            <a:off x="6039612" y="1234440"/>
+            <a:ext cx="5280660" cy="1170432"/>
           </a:xfrm>
           <a:prstGeom prst="rect">
             <a:avLst/>
@@ -13253,8 +13143,8 @@
         </p:blipFill>
         <p:spPr>
           <a:xfrm>
-            <a:off x="6121908" y="1307592"/>
-            <a:ext cx="457200" cy="457200"/>
+            <a:off x="6131052" y="1325880"/>
+            <a:ext cx="420624" cy="420624"/>
           </a:xfrm>
           <a:prstGeom prst="rect">
             <a:avLst/>
@@ -13269,8 +13159,8 @@
         </p:nvSpPr>
         <p:spPr>
           <a:xfrm>
-            <a:off x="6048756" y="1307592"/>
-            <a:ext cx="4585716" cy="594360"/>
+            <a:off x="6633972" y="1289304"/>
+            <a:ext cx="4549140" cy="566928"/>
           </a:xfrm>
           <a:prstGeom prst="rect">
             <a:avLst/>
@@ -13285,7 +13175,7 @@
           <a:p>
             <a:pPr algn="r"/>
             <a:r>
-              <a:rPr sz="3200" b="1" i="0">
+              <a:rPr sz="3000" b="1" i="0">
                 <a:solidFill>
                   <a:srgbClr val="C8A24C"/>
                 </a:solidFill>
@@ -13304,8 +13194,8 @@
         </p:nvSpPr>
         <p:spPr>
           <a:xfrm>
-            <a:off x="6048756" y="1874520"/>
-            <a:ext cx="4585716" cy="411480"/>
+            <a:off x="6131052" y="1856232"/>
+            <a:ext cx="5097780" cy="402336"/>
           </a:xfrm>
           <a:prstGeom prst="rect">
             <a:avLst/>
@@ -13339,8 +13229,8 @@
         </p:nvSpPr>
         <p:spPr>
           <a:xfrm>
-            <a:off x="6048756" y="2258568"/>
-            <a:ext cx="4585716" cy="201168"/>
+            <a:off x="6131052" y="2240280"/>
+            <a:ext cx="5097780" cy="182880"/>
           </a:xfrm>
           <a:prstGeom prst="rect">
             <a:avLst/>
@@ -13374,182 +13264,8 @@
         </p:nvSpPr>
         <p:spPr>
           <a:xfrm>
-            <a:off x="1097280" y="1234440"/>
-            <a:ext cx="4677156" cy="1188720"/>
-          </a:xfrm>
-          <a:prstGeom prst="rect">
-            <a:avLst/>
-          </a:prstGeom>
-          <a:solidFill>
-            <a:srgbClr val="161004"/>
-          </a:solidFill>
-          <a:ln w="12700">
-            <a:solidFill>
-              <a:srgbClr val="C8A24C"/>
-            </a:solidFill>
-          </a:ln>
-        </p:spPr>
-        <p:style>
-          <a:lnRef idx="1">
-            <a:schemeClr val="accent1"/>
-          </a:lnRef>
-          <a:fillRef idx="3">
-            <a:schemeClr val="accent1"/>
-          </a:fillRef>
-          <a:effectRef idx="2">
-            <a:schemeClr val="accent1"/>
-          </a:effectRef>
-          <a:fontRef idx="minor">
-            <a:schemeClr val="lt1"/>
-          </a:fontRef>
-        </p:style>
-        <p:txBody>
-          <a:bodyPr rtlCol="0" anchor="ctr"/>
-          <a:lstStyle/>
-          <a:p>
-            <a:pPr algn="ctr"/>
-          </a:p>
-        </p:txBody>
-      </p:sp>
-      <p:pic>
-        <p:nvPicPr>
-          <p:cNvPr id="14" name="Picture 13" descr="image-10-5.png"/>
-          <p:cNvPicPr>
-            <a:picLocks noChangeAspect="1"/>
-          </p:cNvPicPr>
-          <p:nvPr/>
-        </p:nvPicPr>
-        <p:blipFill>
-          <a:blip r:embed="rId4"/>
-          <a:stretch>
-            <a:fillRect/>
-          </a:stretch>
-        </p:blipFill>
-        <p:spPr>
-          <a:xfrm>
-            <a:off x="1170432" y="1307592"/>
-            <a:ext cx="457200" cy="457200"/>
-          </a:xfrm>
-          <a:prstGeom prst="rect">
-            <a:avLst/>
-          </a:prstGeom>
-        </p:spPr>
-      </p:pic>
-      <p:sp>
-        <p:nvSpPr>
-          <p:cNvPr id="15" name="TextBox 14"/>
-          <p:cNvSpPr txBox="1"/>
-          <p:nvPr/>
-        </p:nvSpPr>
-        <p:spPr>
-          <a:xfrm>
-            <a:off x="1097280" y="1307592"/>
-            <a:ext cx="4585716" cy="594360"/>
-          </a:xfrm>
-          <a:prstGeom prst="rect">
-            <a:avLst/>
-          </a:prstGeom>
-          <a:noFill/>
-        </p:spPr>
-        <p:txBody>
-          <a:bodyPr wrap="square">
-            <a:spAutoFit/>
-          </a:bodyPr>
-          <a:lstStyle/>
-          <a:p>
-            <a:pPr algn="r"/>
-            <a:r>
-              <a:rPr sz="3200" b="1" i="0">
-                <a:solidFill>
-                  <a:srgbClr val="C8A24C"/>
-                </a:solidFill>
-                <a:latin typeface="Montserrat"/>
-              </a:rPr>
-              <a:t>16.8%</a:t>
-            </a:r>
-          </a:p>
-        </p:txBody>
-      </p:sp>
-      <p:sp>
-        <p:nvSpPr>
-          <p:cNvPr id="16" name="TextBox 15"/>
-          <p:cNvSpPr txBox="1"/>
-          <p:nvPr/>
-        </p:nvSpPr>
-        <p:spPr>
-          <a:xfrm>
-            <a:off x="1097280" y="1874520"/>
-            <a:ext cx="4585716" cy="411480"/>
-          </a:xfrm>
-          <a:prstGeom prst="rect">
-            <a:avLst/>
-          </a:prstGeom>
-          <a:noFill/>
-        </p:spPr>
-        <p:txBody>
-          <a:bodyPr wrap="square">
-            <a:spAutoFit/>
-          </a:bodyPr>
-          <a:lstStyle/>
-          <a:p>
-            <a:pPr algn="r" rtl="1"/>
-            <a:r>
-              <a:rPr sz="900" b="0" i="0">
-                <a:solidFill>
-                  <a:srgbClr val="FFFFFF"/>
-                </a:solidFill>
-                <a:latin typeface="Inter"/>
-              </a:rPr>
-              <a:t>بطالة خريجي الجامعات تحديداً</a:t>
-            </a:r>
-          </a:p>
-        </p:txBody>
-      </p:sp>
-      <p:sp>
-        <p:nvSpPr>
-          <p:cNvPr id="17" name="TextBox 16"/>
-          <p:cNvSpPr txBox="1"/>
-          <p:nvPr/>
-        </p:nvSpPr>
-        <p:spPr>
-          <a:xfrm>
-            <a:off x="1097280" y="2258568"/>
-            <a:ext cx="4585716" cy="201168"/>
-          </a:xfrm>
-          <a:prstGeom prst="rect">
-            <a:avLst/>
-          </a:prstGeom>
-          <a:noFill/>
-        </p:spPr>
-        <p:txBody>
-          <a:bodyPr wrap="square">
-            <a:spAutoFit/>
-          </a:bodyPr>
-          <a:lstStyle/>
-          <a:p>
-            <a:pPr algn="r"/>
-            <a:r>
-              <a:rPr sz="650" b="0" i="1">
-                <a:solidFill>
-                  <a:srgbClr val="C8A24C"/>
-                </a:solidFill>
-                <a:latin typeface="Inter"/>
-              </a:rPr>
-              <a:t>CAPMAS 2025</a:t>
-            </a:r>
-          </a:p>
-        </p:txBody>
-      </p:sp>
-      <p:sp>
-        <p:nvSpPr>
-          <p:cNvPr id="18" name="Rectangle 17"/>
-          <p:cNvSpPr/>
-          <p:nvPr/>
-        </p:nvSpPr>
-        <p:spPr>
-          <a:xfrm>
-            <a:off x="6048756" y="2560320"/>
-            <a:ext cx="4677156" cy="1188720"/>
+            <a:off x="530352" y="1234440"/>
+            <a:ext cx="5280660" cy="1170432"/>
           </a:xfrm>
           <a:prstGeom prst="rect">
             <a:avLst/>
@@ -13587,22 +13303,22 @@
       </p:sp>
       <p:pic>
         <p:nvPicPr>
-          <p:cNvPr id="19" name="Picture 18" descr="image-8-7.png"/>
+          <p:cNvPr id="14" name="Picture 13" descr="image-10-5.png"/>
           <p:cNvPicPr>
             <a:picLocks noChangeAspect="1"/>
           </p:cNvPicPr>
           <p:nvPr/>
         </p:nvPicPr>
         <p:blipFill>
-          <a:blip r:embed="rId5"/>
+          <a:blip r:embed="rId4"/>
           <a:stretch>
             <a:fillRect/>
           </a:stretch>
         </p:blipFill>
         <p:spPr>
           <a:xfrm>
-            <a:off x="6121908" y="2633472"/>
-            <a:ext cx="457200" cy="457200"/>
+            <a:off x="621792" y="1325880"/>
+            <a:ext cx="420624" cy="420624"/>
           </a:xfrm>
           <a:prstGeom prst="rect">
             <a:avLst/>
@@ -13611,14 +13327,14 @@
       </p:pic>
       <p:sp>
         <p:nvSpPr>
-          <p:cNvPr id="20" name="TextBox 19"/>
-          <p:cNvSpPr txBox="1"/>
-          <p:nvPr/>
-        </p:nvSpPr>
-        <p:spPr>
-          <a:xfrm>
-            <a:off x="6048756" y="2633472"/>
-            <a:ext cx="4585716" cy="594360"/>
+          <p:cNvPr id="15" name="TextBox 14"/>
+          <p:cNvSpPr txBox="1"/>
+          <p:nvPr/>
+        </p:nvSpPr>
+        <p:spPr>
+          <a:xfrm>
+            <a:off x="1124712" y="1289304"/>
+            <a:ext cx="4549140" cy="566928"/>
           </a:xfrm>
           <a:prstGeom prst="rect">
             <a:avLst/>
@@ -13633,27 +13349,27 @@
           <a:p>
             <a:pPr algn="r"/>
             <a:r>
-              <a:rPr sz="3200" b="1" i="0">
+              <a:rPr sz="3000" b="1" i="0">
                 <a:solidFill>
                   <a:srgbClr val="C8A24C"/>
                 </a:solidFill>
                 <a:latin typeface="Montserrat"/>
               </a:rPr>
-              <a:t>72%</a:t>
-            </a:r>
-          </a:p>
-        </p:txBody>
-      </p:sp>
-      <p:sp>
-        <p:nvSpPr>
-          <p:cNvPr id="21" name="TextBox 20"/>
-          <p:cNvSpPr txBox="1"/>
-          <p:nvPr/>
-        </p:nvSpPr>
-        <p:spPr>
-          <a:xfrm>
-            <a:off x="6048756" y="3200400"/>
-            <a:ext cx="4585716" cy="411480"/>
+              <a:t>16.8%</a:t>
+            </a:r>
+          </a:p>
+        </p:txBody>
+      </p:sp>
+      <p:sp>
+        <p:nvSpPr>
+          <p:cNvPr id="16" name="TextBox 15"/>
+          <p:cNvSpPr txBox="1"/>
+          <p:nvPr/>
+        </p:nvSpPr>
+        <p:spPr>
+          <a:xfrm>
+            <a:off x="621792" y="1856232"/>
+            <a:ext cx="5097780" cy="402336"/>
           </a:xfrm>
           <a:prstGeom prst="rect">
             <a:avLst/>
@@ -13674,21 +13390,21 @@
                 </a:solidFill>
                 <a:latin typeface="Inter"/>
               </a:rPr>
-              <a:t>من أصحاب العمل: الخريجون غير مؤهلين عملياً</a:t>
-            </a:r>
-          </a:p>
-        </p:txBody>
-      </p:sp>
-      <p:sp>
-        <p:nvSpPr>
-          <p:cNvPr id="22" name="TextBox 21"/>
-          <p:cNvSpPr txBox="1"/>
-          <p:nvPr/>
-        </p:nvSpPr>
-        <p:spPr>
-          <a:xfrm>
-            <a:off x="6048756" y="3584448"/>
-            <a:ext cx="4585716" cy="201168"/>
+              <a:t>بطالة خريجي الجامعات تحديداً</a:t>
+            </a:r>
+          </a:p>
+        </p:txBody>
+      </p:sp>
+      <p:sp>
+        <p:nvSpPr>
+          <p:cNvPr id="17" name="TextBox 16"/>
+          <p:cNvSpPr txBox="1"/>
+          <p:nvPr/>
+        </p:nvSpPr>
+        <p:spPr>
+          <a:xfrm>
+            <a:off x="621792" y="2240280"/>
+            <a:ext cx="5097780" cy="182880"/>
           </a:xfrm>
           <a:prstGeom prst="rect">
             <a:avLst/>
@@ -13716,188 +13432,14 @@
       </p:sp>
       <p:sp>
         <p:nvSpPr>
-          <p:cNvPr id="23" name="Rectangle 22"/>
+          <p:cNvPr id="18" name="Rectangle 17"/>
           <p:cNvSpPr/>
           <p:nvPr/>
         </p:nvSpPr>
         <p:spPr>
           <a:xfrm>
-            <a:off x="1097280" y="2560320"/>
-            <a:ext cx="4677156" cy="1188720"/>
-          </a:xfrm>
-          <a:prstGeom prst="rect">
-            <a:avLst/>
-          </a:prstGeom>
-          <a:solidFill>
-            <a:srgbClr val="161004"/>
-          </a:solidFill>
-          <a:ln w="12700">
-            <a:solidFill>
-              <a:srgbClr val="C8A24C"/>
-            </a:solidFill>
-          </a:ln>
-        </p:spPr>
-        <p:style>
-          <a:lnRef idx="1">
-            <a:schemeClr val="accent1"/>
-          </a:lnRef>
-          <a:fillRef idx="3">
-            <a:schemeClr val="accent1"/>
-          </a:fillRef>
-          <a:effectRef idx="2">
-            <a:schemeClr val="accent1"/>
-          </a:effectRef>
-          <a:fontRef idx="minor">
-            <a:schemeClr val="lt1"/>
-          </a:fontRef>
-        </p:style>
-        <p:txBody>
-          <a:bodyPr rtlCol="0" anchor="ctr"/>
-          <a:lstStyle/>
-          <a:p>
-            <a:pPr algn="ctr"/>
-          </a:p>
-        </p:txBody>
-      </p:sp>
-      <p:pic>
-        <p:nvPicPr>
-          <p:cNvPr id="24" name="Picture 23" descr="image-8-10.png"/>
-          <p:cNvPicPr>
-            <a:picLocks noChangeAspect="1"/>
-          </p:cNvPicPr>
-          <p:nvPr/>
-        </p:nvPicPr>
-        <p:blipFill>
-          <a:blip r:embed="rId6"/>
-          <a:stretch>
-            <a:fillRect/>
-          </a:stretch>
-        </p:blipFill>
-        <p:spPr>
-          <a:xfrm>
-            <a:off x="1170432" y="2633472"/>
-            <a:ext cx="457200" cy="457200"/>
-          </a:xfrm>
-          <a:prstGeom prst="rect">
-            <a:avLst/>
-          </a:prstGeom>
-        </p:spPr>
-      </p:pic>
-      <p:sp>
-        <p:nvSpPr>
-          <p:cNvPr id="25" name="TextBox 24"/>
-          <p:cNvSpPr txBox="1"/>
-          <p:nvPr/>
-        </p:nvSpPr>
-        <p:spPr>
-          <a:xfrm>
-            <a:off x="1097280" y="2633472"/>
-            <a:ext cx="4585716" cy="594360"/>
-          </a:xfrm>
-          <a:prstGeom prst="rect">
-            <a:avLst/>
-          </a:prstGeom>
-          <a:noFill/>
-        </p:spPr>
-        <p:txBody>
-          <a:bodyPr wrap="square">
-            <a:spAutoFit/>
-          </a:bodyPr>
-          <a:lstStyle/>
-          <a:p>
-            <a:pPr algn="r"/>
-            <a:r>
-              <a:rPr sz="3200" b="1" i="0">
-                <a:solidFill>
-                  <a:srgbClr val="C8A24C"/>
-                </a:solidFill>
-                <a:latin typeface="Montserrat"/>
-              </a:rPr>
-              <a:t>31</a:t>
-            </a:r>
-          </a:p>
-        </p:txBody>
-      </p:sp>
-      <p:sp>
-        <p:nvSpPr>
-          <p:cNvPr id="26" name="TextBox 25"/>
-          <p:cNvSpPr txBox="1"/>
-          <p:nvPr/>
-        </p:nvSpPr>
-        <p:spPr>
-          <a:xfrm>
-            <a:off x="1097280" y="3200400"/>
-            <a:ext cx="4585716" cy="411480"/>
-          </a:xfrm>
-          <a:prstGeom prst="rect">
-            <a:avLst/>
-          </a:prstGeom>
-          <a:noFill/>
-        </p:spPr>
-        <p:txBody>
-          <a:bodyPr wrap="square">
-            <a:spAutoFit/>
-          </a:bodyPr>
-          <a:lstStyle/>
-          <a:p>
-            <a:pPr algn="r" rtl="1"/>
-            <a:r>
-              <a:rPr sz="900" b="0" i="0">
-                <a:solidFill>
-                  <a:srgbClr val="FFFFFF"/>
-                </a:solidFill>
-                <a:latin typeface="Inter"/>
-              </a:rPr>
-              <a:t>وحدة جامعية تضامن اجتماعي تخدم 250,000 طالب</a:t>
-            </a:r>
-          </a:p>
-        </p:txBody>
-      </p:sp>
-      <p:sp>
-        <p:nvSpPr>
-          <p:cNvPr id="27" name="TextBox 26"/>
-          <p:cNvSpPr txBox="1"/>
-          <p:nvPr/>
-        </p:nvSpPr>
-        <p:spPr>
-          <a:xfrm>
-            <a:off x="1097280" y="3584448"/>
-            <a:ext cx="4585716" cy="201168"/>
-          </a:xfrm>
-          <a:prstGeom prst="rect">
-            <a:avLst/>
-          </a:prstGeom>
-          <a:noFill/>
-        </p:spPr>
-        <p:txBody>
-          <a:bodyPr wrap="square">
-            <a:spAutoFit/>
-          </a:bodyPr>
-          <a:lstStyle/>
-          <a:p>
-            <a:pPr algn="r"/>
-            <a:r>
-              <a:rPr sz="650" b="0" i="1">
-                <a:solidFill>
-                  <a:srgbClr val="C8A24C"/>
-                </a:solidFill>
-                <a:latin typeface="Inter"/>
-              </a:rPr>
-              <a:t>وزارة التضامن 2026</a:t>
-            </a:r>
-          </a:p>
-        </p:txBody>
-      </p:sp>
-      <p:sp>
-        <p:nvSpPr>
-          <p:cNvPr id="28" name="Rectangle 27"/>
-          <p:cNvSpPr/>
-          <p:nvPr/>
-        </p:nvSpPr>
-        <p:spPr>
-          <a:xfrm>
-            <a:off x="6048756" y="3886200"/>
-            <a:ext cx="4677156" cy="1188720"/>
+            <a:off x="6039612" y="2532888"/>
+            <a:ext cx="5280660" cy="1170432"/>
           </a:xfrm>
           <a:prstGeom prst="rect">
             <a:avLst/>
@@ -13935,6 +13477,354 @@
       </p:sp>
       <p:pic>
         <p:nvPicPr>
+          <p:cNvPr id="19" name="Picture 18" descr="image-8-7.png"/>
+          <p:cNvPicPr>
+            <a:picLocks noChangeAspect="1"/>
+          </p:cNvPicPr>
+          <p:nvPr/>
+        </p:nvPicPr>
+        <p:blipFill>
+          <a:blip r:embed="rId5"/>
+          <a:stretch>
+            <a:fillRect/>
+          </a:stretch>
+        </p:blipFill>
+        <p:spPr>
+          <a:xfrm>
+            <a:off x="6131052" y="2624328"/>
+            <a:ext cx="420624" cy="420624"/>
+          </a:xfrm>
+          <a:prstGeom prst="rect">
+            <a:avLst/>
+          </a:prstGeom>
+        </p:spPr>
+      </p:pic>
+      <p:sp>
+        <p:nvSpPr>
+          <p:cNvPr id="20" name="TextBox 19"/>
+          <p:cNvSpPr txBox="1"/>
+          <p:nvPr/>
+        </p:nvSpPr>
+        <p:spPr>
+          <a:xfrm>
+            <a:off x="6633972" y="2587752"/>
+            <a:ext cx="4549140" cy="566928"/>
+          </a:xfrm>
+          <a:prstGeom prst="rect">
+            <a:avLst/>
+          </a:prstGeom>
+          <a:noFill/>
+        </p:spPr>
+        <p:txBody>
+          <a:bodyPr wrap="square">
+            <a:spAutoFit/>
+          </a:bodyPr>
+          <a:lstStyle/>
+          <a:p>
+            <a:pPr algn="r"/>
+            <a:r>
+              <a:rPr sz="3000" b="1" i="0">
+                <a:solidFill>
+                  <a:srgbClr val="C8A24C"/>
+                </a:solidFill>
+                <a:latin typeface="Montserrat"/>
+              </a:rPr>
+              <a:t>72%</a:t>
+            </a:r>
+          </a:p>
+        </p:txBody>
+      </p:sp>
+      <p:sp>
+        <p:nvSpPr>
+          <p:cNvPr id="21" name="TextBox 20"/>
+          <p:cNvSpPr txBox="1"/>
+          <p:nvPr/>
+        </p:nvSpPr>
+        <p:spPr>
+          <a:xfrm>
+            <a:off x="6131052" y="3154680"/>
+            <a:ext cx="5097780" cy="402336"/>
+          </a:xfrm>
+          <a:prstGeom prst="rect">
+            <a:avLst/>
+          </a:prstGeom>
+          <a:noFill/>
+        </p:spPr>
+        <p:txBody>
+          <a:bodyPr wrap="square">
+            <a:spAutoFit/>
+          </a:bodyPr>
+          <a:lstStyle/>
+          <a:p>
+            <a:pPr algn="r" rtl="1"/>
+            <a:r>
+              <a:rPr sz="900" b="0" i="0">
+                <a:solidFill>
+                  <a:srgbClr val="FFFFFF"/>
+                </a:solidFill>
+                <a:latin typeface="Inter"/>
+              </a:rPr>
+              <a:t>من أصحاب العمل: الخريجون غير مؤهلين عملياً</a:t>
+            </a:r>
+          </a:p>
+        </p:txBody>
+      </p:sp>
+      <p:sp>
+        <p:nvSpPr>
+          <p:cNvPr id="22" name="TextBox 21"/>
+          <p:cNvSpPr txBox="1"/>
+          <p:nvPr/>
+        </p:nvSpPr>
+        <p:spPr>
+          <a:xfrm>
+            <a:off x="6131052" y="3538728"/>
+            <a:ext cx="5097780" cy="182880"/>
+          </a:xfrm>
+          <a:prstGeom prst="rect">
+            <a:avLst/>
+          </a:prstGeom>
+          <a:noFill/>
+        </p:spPr>
+        <p:txBody>
+          <a:bodyPr wrap="square">
+            <a:spAutoFit/>
+          </a:bodyPr>
+          <a:lstStyle/>
+          <a:p>
+            <a:pPr algn="r"/>
+            <a:r>
+              <a:rPr sz="650" b="0" i="1">
+                <a:solidFill>
+                  <a:srgbClr val="C8A24C"/>
+                </a:solidFill>
+                <a:latin typeface="Inter"/>
+              </a:rPr>
+              <a:t>CAPMAS 2025</a:t>
+            </a:r>
+          </a:p>
+        </p:txBody>
+      </p:sp>
+      <p:sp>
+        <p:nvSpPr>
+          <p:cNvPr id="23" name="Rectangle 22"/>
+          <p:cNvSpPr/>
+          <p:nvPr/>
+        </p:nvSpPr>
+        <p:spPr>
+          <a:xfrm>
+            <a:off x="530352" y="2532888"/>
+            <a:ext cx="5280660" cy="1170432"/>
+          </a:xfrm>
+          <a:prstGeom prst="rect">
+            <a:avLst/>
+          </a:prstGeom>
+          <a:solidFill>
+            <a:srgbClr val="1A1406"/>
+          </a:solidFill>
+          <a:ln w="12700">
+            <a:solidFill>
+              <a:srgbClr val="C8A24C"/>
+            </a:solidFill>
+          </a:ln>
+        </p:spPr>
+        <p:style>
+          <a:lnRef idx="1">
+            <a:schemeClr val="accent1"/>
+          </a:lnRef>
+          <a:fillRef idx="3">
+            <a:schemeClr val="accent1"/>
+          </a:fillRef>
+          <a:effectRef idx="2">
+            <a:schemeClr val="accent1"/>
+          </a:effectRef>
+          <a:fontRef idx="minor">
+            <a:schemeClr val="lt1"/>
+          </a:fontRef>
+        </p:style>
+        <p:txBody>
+          <a:bodyPr rtlCol="0" anchor="ctr"/>
+          <a:lstStyle/>
+          <a:p>
+            <a:pPr algn="ctr"/>
+          </a:p>
+        </p:txBody>
+      </p:sp>
+      <p:pic>
+        <p:nvPicPr>
+          <p:cNvPr id="24" name="Picture 23" descr="image-8-10.png"/>
+          <p:cNvPicPr>
+            <a:picLocks noChangeAspect="1"/>
+          </p:cNvPicPr>
+          <p:nvPr/>
+        </p:nvPicPr>
+        <p:blipFill>
+          <a:blip r:embed="rId6"/>
+          <a:stretch>
+            <a:fillRect/>
+          </a:stretch>
+        </p:blipFill>
+        <p:spPr>
+          <a:xfrm>
+            <a:off x="621792" y="2624328"/>
+            <a:ext cx="420624" cy="420624"/>
+          </a:xfrm>
+          <a:prstGeom prst="rect">
+            <a:avLst/>
+          </a:prstGeom>
+        </p:spPr>
+      </p:pic>
+      <p:sp>
+        <p:nvSpPr>
+          <p:cNvPr id="25" name="TextBox 24"/>
+          <p:cNvSpPr txBox="1"/>
+          <p:nvPr/>
+        </p:nvSpPr>
+        <p:spPr>
+          <a:xfrm>
+            <a:off x="1124712" y="2587752"/>
+            <a:ext cx="4549140" cy="566928"/>
+          </a:xfrm>
+          <a:prstGeom prst="rect">
+            <a:avLst/>
+          </a:prstGeom>
+          <a:noFill/>
+        </p:spPr>
+        <p:txBody>
+          <a:bodyPr wrap="square">
+            <a:spAutoFit/>
+          </a:bodyPr>
+          <a:lstStyle/>
+          <a:p>
+            <a:pPr algn="r"/>
+            <a:r>
+              <a:rPr sz="3000" b="1" i="0">
+                <a:solidFill>
+                  <a:srgbClr val="C8A24C"/>
+                </a:solidFill>
+                <a:latin typeface="Montserrat"/>
+              </a:rPr>
+              <a:t>31</a:t>
+            </a:r>
+          </a:p>
+        </p:txBody>
+      </p:sp>
+      <p:sp>
+        <p:nvSpPr>
+          <p:cNvPr id="26" name="TextBox 25"/>
+          <p:cNvSpPr txBox="1"/>
+          <p:nvPr/>
+        </p:nvSpPr>
+        <p:spPr>
+          <a:xfrm>
+            <a:off x="621792" y="3154680"/>
+            <a:ext cx="5097780" cy="402336"/>
+          </a:xfrm>
+          <a:prstGeom prst="rect">
+            <a:avLst/>
+          </a:prstGeom>
+          <a:noFill/>
+        </p:spPr>
+        <p:txBody>
+          <a:bodyPr wrap="square">
+            <a:spAutoFit/>
+          </a:bodyPr>
+          <a:lstStyle/>
+          <a:p>
+            <a:pPr algn="r" rtl="1"/>
+            <a:r>
+              <a:rPr sz="900" b="0" i="0">
+                <a:solidFill>
+                  <a:srgbClr val="FFFFFF"/>
+                </a:solidFill>
+                <a:latin typeface="Inter"/>
+              </a:rPr>
+              <a:t>وحدة جامعية تضامن اجتماعي تخدم 250,000 طالب</a:t>
+            </a:r>
+          </a:p>
+        </p:txBody>
+      </p:sp>
+      <p:sp>
+        <p:nvSpPr>
+          <p:cNvPr id="27" name="TextBox 26"/>
+          <p:cNvSpPr txBox="1"/>
+          <p:nvPr/>
+        </p:nvSpPr>
+        <p:spPr>
+          <a:xfrm>
+            <a:off x="621792" y="3538728"/>
+            <a:ext cx="5097780" cy="182880"/>
+          </a:xfrm>
+          <a:prstGeom prst="rect">
+            <a:avLst/>
+          </a:prstGeom>
+          <a:noFill/>
+        </p:spPr>
+        <p:txBody>
+          <a:bodyPr wrap="square">
+            <a:spAutoFit/>
+          </a:bodyPr>
+          <a:lstStyle/>
+          <a:p>
+            <a:pPr algn="r"/>
+            <a:r>
+              <a:rPr sz="650" b="0" i="1">
+                <a:solidFill>
+                  <a:srgbClr val="C8A24C"/>
+                </a:solidFill>
+                <a:latin typeface="Inter"/>
+              </a:rPr>
+              <a:t>وزارة التضامن 2026</a:t>
+            </a:r>
+          </a:p>
+        </p:txBody>
+      </p:sp>
+      <p:sp>
+        <p:nvSpPr>
+          <p:cNvPr id="28" name="Rectangle 27"/>
+          <p:cNvSpPr/>
+          <p:nvPr/>
+        </p:nvSpPr>
+        <p:spPr>
+          <a:xfrm>
+            <a:off x="6039612" y="3831336"/>
+            <a:ext cx="5280660" cy="1170432"/>
+          </a:xfrm>
+          <a:prstGeom prst="rect">
+            <a:avLst/>
+          </a:prstGeom>
+          <a:solidFill>
+            <a:srgbClr val="1A1406"/>
+          </a:solidFill>
+          <a:ln w="12700">
+            <a:solidFill>
+              <a:srgbClr val="C8A24C"/>
+            </a:solidFill>
+          </a:ln>
+        </p:spPr>
+        <p:style>
+          <a:lnRef idx="1">
+            <a:schemeClr val="accent1"/>
+          </a:lnRef>
+          <a:fillRef idx="3">
+            <a:schemeClr val="accent1"/>
+          </a:fillRef>
+          <a:effectRef idx="2">
+            <a:schemeClr val="accent1"/>
+          </a:effectRef>
+          <a:fontRef idx="minor">
+            <a:schemeClr val="lt1"/>
+          </a:fontRef>
+        </p:style>
+        <p:txBody>
+          <a:bodyPr rtlCol="0" anchor="ctr"/>
+          <a:lstStyle/>
+          <a:p>
+            <a:pPr algn="ctr"/>
+          </a:p>
+        </p:txBody>
+      </p:sp>
+      <p:pic>
+        <p:nvPicPr>
           <p:cNvPr id="29" name="Picture 28" descr="image-8-13.png"/>
           <p:cNvPicPr>
             <a:picLocks noChangeAspect="1"/>
@@ -13949,8 +13839,8 @@
         </p:blipFill>
         <p:spPr>
           <a:xfrm>
-            <a:off x="6121908" y="3959352"/>
-            <a:ext cx="457200" cy="457200"/>
+            <a:off x="6131052" y="3922776"/>
+            <a:ext cx="420624" cy="420624"/>
           </a:xfrm>
           <a:prstGeom prst="rect">
             <a:avLst/>
@@ -13965,8 +13855,8 @@
         </p:nvSpPr>
         <p:spPr>
           <a:xfrm>
-            <a:off x="6048756" y="3959352"/>
-            <a:ext cx="4585716" cy="594360"/>
+            <a:off x="6633972" y="3886200"/>
+            <a:ext cx="4549140" cy="566928"/>
           </a:xfrm>
           <a:prstGeom prst="rect">
             <a:avLst/>
@@ -13981,7 +13871,7 @@
           <a:p>
             <a:pPr algn="r"/>
             <a:r>
-              <a:rPr sz="3200" b="1" i="0">
+              <a:rPr sz="3000" b="1" i="0">
                 <a:solidFill>
                   <a:srgbClr val="C8A24C"/>
                 </a:solidFill>
@@ -14000,8 +13890,8 @@
         </p:nvSpPr>
         <p:spPr>
           <a:xfrm>
-            <a:off x="6048756" y="4526280"/>
-            <a:ext cx="4585716" cy="411480"/>
+            <a:off x="6131052" y="4453128"/>
+            <a:ext cx="5097780" cy="402336"/>
           </a:xfrm>
           <a:prstGeom prst="rect">
             <a:avLst/>
@@ -14035,8 +13925,8 @@
         </p:nvSpPr>
         <p:spPr>
           <a:xfrm>
-            <a:off x="6048756" y="4910328"/>
-            <a:ext cx="4585716" cy="201168"/>
+            <a:off x="6131052" y="4837176"/>
+            <a:ext cx="5097780" cy="182880"/>
           </a:xfrm>
           <a:prstGeom prst="rect">
             <a:avLst/>
@@ -14218,7 +14108,7 @@
         <p:spPr>
           <a:xfrm>
             <a:off x="0" y="0"/>
-            <a:ext cx="12188952" cy="6858000"/>
+            <a:ext cx="5850696" cy="6858000"/>
           </a:xfrm>
           <a:prstGeom prst="rect">
             <a:avLst/>
@@ -14233,8 +14123,8 @@
         </p:nvSpPr>
         <p:spPr>
           <a:xfrm>
-            <a:off x="4875580" y="0"/>
-            <a:ext cx="7313371" cy="6858000"/>
+            <a:off x="5485028" y="0"/>
+            <a:ext cx="6703923" cy="6858000"/>
           </a:xfrm>
           <a:prstGeom prst="rect">
             <a:avLst/>
@@ -14277,7 +14167,7 @@
         <p:spPr>
           <a:xfrm>
             <a:off x="0" y="0"/>
-            <a:ext cx="109728" cy="6858000"/>
+            <a:ext cx="63500" cy="6858000"/>
           </a:xfrm>
           <a:prstGeom prst="rect">
             <a:avLst/>
@@ -14319,8 +14209,8 @@
         </p:nvSpPr>
         <p:spPr>
           <a:xfrm>
-            <a:off x="109728" y="2400300"/>
-            <a:ext cx="54864" cy="2057400"/>
+            <a:off x="63500" y="2606040"/>
+            <a:ext cx="50800" cy="1645920"/>
           </a:xfrm>
           <a:prstGeom prst="rect">
             <a:avLst/>
@@ -14370,8 +14260,8 @@
         </p:blipFill>
         <p:spPr>
           <a:xfrm>
-            <a:off x="11274552" y="0"/>
-            <a:ext cx="914400" cy="6858000"/>
+            <a:off x="11503152" y="0"/>
+            <a:ext cx="685800" cy="6858000"/>
           </a:xfrm>
           <a:prstGeom prst="rect">
             <a:avLst/>
@@ -14386,8 +14276,8 @@
         </p:nvSpPr>
         <p:spPr>
           <a:xfrm>
-            <a:off x="274320" y="1097280"/>
-            <a:ext cx="4572000" cy="2743200"/>
+            <a:off x="457200" y="731520"/>
+            <a:ext cx="5486400" cy="3200400"/>
           </a:xfrm>
           <a:prstGeom prst="rect">
             <a:avLst/>
@@ -14402,9 +14292,9 @@
           <a:p>
             <a:pPr algn="l"/>
             <a:r>
-              <a:rPr sz="14000" b="1" i="0">
-                <a:solidFill>
-                  <a:srgbClr val="282008"/>
+              <a:rPr sz="16000" b="1" i="0">
+                <a:solidFill>
+                  <a:srgbClr val="221A06"/>
                 </a:solidFill>
                 <a:latin typeface="Montserrat"/>
               </a:rPr>
@@ -14421,8 +14311,8 @@
         </p:nvSpPr>
         <p:spPr>
           <a:xfrm>
-            <a:off x="274320" y="2286000"/>
-            <a:ext cx="10725912" cy="1097280"/>
+            <a:off x="457200" y="2194560"/>
+            <a:ext cx="10863072" cy="1188720"/>
           </a:xfrm>
           <a:prstGeom prst="rect">
             <a:avLst/>
@@ -14437,7 +14327,7 @@
           <a:p>
             <a:pPr algn="r" rtl="1"/>
             <a:r>
-              <a:rPr sz="5200" b="1" i="0">
+              <a:rPr sz="5400" b="1" i="0">
                 <a:solidFill>
                   <a:srgbClr val="FFFFFF"/>
                 </a:solidFill>
@@ -14456,8 +14346,8 @@
         </p:nvSpPr>
         <p:spPr>
           <a:xfrm>
-            <a:off x="274320" y="3474720"/>
-            <a:ext cx="10725912" cy="38100"/>
+            <a:off x="457200" y="3474720"/>
+            <a:ext cx="10863072" cy="38100"/>
           </a:xfrm>
           <a:prstGeom prst="rect">
             <a:avLst/>
@@ -14499,8 +14389,8 @@
         </p:nvSpPr>
         <p:spPr>
           <a:xfrm>
-            <a:off x="274320" y="3611880"/>
-            <a:ext cx="10725912" cy="548640"/>
+            <a:off x="457200" y="3611880"/>
+            <a:ext cx="10863072" cy="594360"/>
           </a:xfrm>
           <a:prstGeom prst="rect">
             <a:avLst/>
@@ -14515,7 +14405,7 @@
           <a:p>
             <a:pPr algn="r" rtl="1"/>
             <a:r>
-              <a:rPr sz="1800" b="0" i="0">
+              <a:rPr sz="2000" b="0" i="0">
                 <a:solidFill>
                   <a:srgbClr val="C8A24C"/>
                 </a:solidFill>
@@ -14682,7 +14572,7 @@
         <p:spPr>
           <a:xfrm>
             <a:off x="0" y="0"/>
-            <a:ext cx="914400" cy="6858000"/>
+            <a:ext cx="347472" cy="6858000"/>
           </a:xfrm>
           <a:prstGeom prst="rect">
             <a:avLst/>
@@ -14705,8 +14595,8 @@
         </p:blipFill>
         <p:spPr>
           <a:xfrm>
-            <a:off x="11274552" y="0"/>
-            <a:ext cx="914400" cy="6858000"/>
+            <a:off x="11503152" y="0"/>
+            <a:ext cx="685800" cy="6858000"/>
           </a:xfrm>
           <a:prstGeom prst="rect">
             <a:avLst/>
@@ -14721,8 +14611,8 @@
         </p:nvSpPr>
         <p:spPr>
           <a:xfrm>
-            <a:off x="914400" y="0"/>
-            <a:ext cx="10360152" cy="50800"/>
+            <a:off x="347472" y="0"/>
+            <a:ext cx="11155680" cy="50800"/>
           </a:xfrm>
           <a:prstGeom prst="rect">
             <a:avLst/>
@@ -14799,8 +14689,8 @@
         </p:nvSpPr>
         <p:spPr>
           <a:xfrm>
-            <a:off x="1097280" y="411480"/>
-            <a:ext cx="9902952" cy="594360"/>
+            <a:off x="530352" y="411480"/>
+            <a:ext cx="10789920" cy="594360"/>
           </a:xfrm>
           <a:prstGeom prst="rect">
             <a:avLst/>
@@ -14834,8 +14724,8 @@
         </p:nvSpPr>
         <p:spPr>
           <a:xfrm>
-            <a:off x="1097280" y="1051560"/>
-            <a:ext cx="9902952" cy="25400"/>
+            <a:off x="530352" y="1051560"/>
+            <a:ext cx="10789920" cy="25400"/>
           </a:xfrm>
           <a:prstGeom prst="rect">
             <a:avLst/>
@@ -14877,8 +14767,8 @@
         </p:nvSpPr>
         <p:spPr>
           <a:xfrm>
-            <a:off x="1097280" y="1188720"/>
-            <a:ext cx="3072384" cy="3200400"/>
+            <a:off x="530352" y="1188720"/>
+            <a:ext cx="3474720" cy="3200400"/>
           </a:xfrm>
           <a:prstGeom prst="rect">
             <a:avLst/>
@@ -14930,7 +14820,7 @@
         </p:blipFill>
         <p:spPr>
           <a:xfrm>
-            <a:off x="2313432" y="1325880"/>
+            <a:off x="1947672" y="1353312"/>
             <a:ext cx="640080" cy="640080"/>
           </a:xfrm>
           <a:prstGeom prst="rect">
@@ -14946,8 +14836,8 @@
         </p:nvSpPr>
         <p:spPr>
           <a:xfrm>
-            <a:off x="1188720" y="2103120"/>
-            <a:ext cx="457200" cy="365760"/>
+            <a:off x="640080" y="2148840"/>
+            <a:ext cx="438912" cy="329184"/>
           </a:xfrm>
           <a:prstGeom prst="rect">
             <a:avLst/>
@@ -14989,8 +14879,8 @@
         </p:nvSpPr>
         <p:spPr>
           <a:xfrm>
-            <a:off x="1188720" y="2103120"/>
-            <a:ext cx="457200" cy="365760"/>
+            <a:off x="640080" y="2148840"/>
+            <a:ext cx="438912" cy="329184"/>
           </a:xfrm>
           <a:prstGeom prst="rect">
             <a:avLst/>
@@ -15024,8 +14914,8 @@
         </p:nvSpPr>
         <p:spPr>
           <a:xfrm>
-            <a:off x="1097280" y="2560320"/>
-            <a:ext cx="2980944" cy="502920"/>
+            <a:off x="621792" y="2560320"/>
+            <a:ext cx="3291840" cy="475488"/>
           </a:xfrm>
           <a:prstGeom prst="rect">
             <a:avLst/>
@@ -15040,7 +14930,7 @@
           <a:p>
             <a:pPr algn="r" rtl="1"/>
             <a:r>
-              <a:rPr sz="1600" b="1" i="0">
+              <a:rPr sz="1500" b="1" i="0">
                 <a:solidFill>
                   <a:srgbClr val="FFFFFF"/>
                 </a:solidFill>
@@ -15059,8 +14949,8 @@
         </p:nvSpPr>
         <p:spPr>
           <a:xfrm>
-            <a:off x="1097280" y="3108960"/>
-            <a:ext cx="2980944" cy="1188720"/>
+            <a:off x="621792" y="3090672"/>
+            <a:ext cx="3291840" cy="1188720"/>
           </a:xfrm>
           <a:prstGeom prst="rect">
             <a:avLst/>
@@ -15094,8 +14984,8 @@
         </p:nvSpPr>
         <p:spPr>
           <a:xfrm>
-            <a:off x="4375404" y="1188720"/>
-            <a:ext cx="3072384" cy="3200400"/>
+            <a:off x="4187952" y="1188720"/>
+            <a:ext cx="3474720" cy="3200400"/>
           </a:xfrm>
           <a:prstGeom prst="rect">
             <a:avLst/>
@@ -15147,7 +15037,7 @@
         </p:blipFill>
         <p:spPr>
           <a:xfrm>
-            <a:off x="5591556" y="1325880"/>
+            <a:off x="5605272" y="1353312"/>
             <a:ext cx="640080" cy="640080"/>
           </a:xfrm>
           <a:prstGeom prst="rect">
@@ -15163,8 +15053,8 @@
         </p:nvSpPr>
         <p:spPr>
           <a:xfrm>
-            <a:off x="4466844" y="2103120"/>
-            <a:ext cx="457200" cy="365760"/>
+            <a:off x="4297680" y="2148840"/>
+            <a:ext cx="438912" cy="329184"/>
           </a:xfrm>
           <a:prstGeom prst="rect">
             <a:avLst/>
@@ -15206,8 +15096,8 @@
         </p:nvSpPr>
         <p:spPr>
           <a:xfrm>
-            <a:off x="4466844" y="2103120"/>
-            <a:ext cx="457200" cy="365760"/>
+            <a:off x="4297680" y="2148840"/>
+            <a:ext cx="438912" cy="329184"/>
           </a:xfrm>
           <a:prstGeom prst="rect">
             <a:avLst/>
@@ -15241,8 +15131,8 @@
         </p:nvSpPr>
         <p:spPr>
           <a:xfrm>
-            <a:off x="4375404" y="2560320"/>
-            <a:ext cx="2980944" cy="502920"/>
+            <a:off x="4279392" y="2560320"/>
+            <a:ext cx="3291840" cy="475488"/>
           </a:xfrm>
           <a:prstGeom prst="rect">
             <a:avLst/>
@@ -15257,7 +15147,7 @@
           <a:p>
             <a:pPr algn="r" rtl="1"/>
             <a:r>
-              <a:rPr sz="1600" b="1" i="0">
+              <a:rPr sz="1500" b="1" i="0">
                 <a:solidFill>
                   <a:srgbClr val="FFFFFF"/>
                 </a:solidFill>
@@ -15276,8 +15166,8 @@
         </p:nvSpPr>
         <p:spPr>
           <a:xfrm>
-            <a:off x="4375404" y="3108960"/>
-            <a:ext cx="2980944" cy="1188720"/>
+            <a:off x="4279392" y="3090672"/>
+            <a:ext cx="3291840" cy="1188720"/>
           </a:xfrm>
           <a:prstGeom prst="rect">
             <a:avLst/>
@@ -15311,8 +15201,8 @@
         </p:nvSpPr>
         <p:spPr>
           <a:xfrm>
-            <a:off x="7653528" y="1188720"/>
-            <a:ext cx="3072384" cy="3200400"/>
+            <a:off x="7845552" y="1188720"/>
+            <a:ext cx="3474720" cy="3200400"/>
           </a:xfrm>
           <a:prstGeom prst="rect">
             <a:avLst/>
@@ -15364,7 +15254,7 @@
         </p:blipFill>
         <p:spPr>
           <a:xfrm>
-            <a:off x="8869680" y="1325880"/>
+            <a:off x="9262872" y="1353312"/>
             <a:ext cx="640080" cy="640080"/>
           </a:xfrm>
           <a:prstGeom prst="rect">
@@ -15380,8 +15270,8 @@
         </p:nvSpPr>
         <p:spPr>
           <a:xfrm>
-            <a:off x="7744968" y="2103120"/>
-            <a:ext cx="457200" cy="365760"/>
+            <a:off x="7955280" y="2148840"/>
+            <a:ext cx="438912" cy="329184"/>
           </a:xfrm>
           <a:prstGeom prst="rect">
             <a:avLst/>
@@ -15423,8 +15313,8 @@
         </p:nvSpPr>
         <p:spPr>
           <a:xfrm>
-            <a:off x="7744968" y="2103120"/>
-            <a:ext cx="457200" cy="365760"/>
+            <a:off x="7955280" y="2148840"/>
+            <a:ext cx="438912" cy="329184"/>
           </a:xfrm>
           <a:prstGeom prst="rect">
             <a:avLst/>
@@ -15458,8 +15348,8 @@
         </p:nvSpPr>
         <p:spPr>
           <a:xfrm>
-            <a:off x="7653528" y="2560320"/>
-            <a:ext cx="2980944" cy="502920"/>
+            <a:off x="7936992" y="2560320"/>
+            <a:ext cx="3291840" cy="475488"/>
           </a:xfrm>
           <a:prstGeom prst="rect">
             <a:avLst/>
@@ -15474,7 +15364,7 @@
           <a:p>
             <a:pPr algn="r" rtl="1"/>
             <a:r>
-              <a:rPr sz="1600" b="1" i="0">
+              <a:rPr sz="1500" b="1" i="0">
                 <a:solidFill>
                   <a:srgbClr val="FFFFFF"/>
                 </a:solidFill>
@@ -15493,8 +15383,8 @@
         </p:nvSpPr>
         <p:spPr>
           <a:xfrm>
-            <a:off x="7653528" y="3108960"/>
-            <a:ext cx="2980944" cy="1188720"/>
+            <a:off x="7936992" y="3090672"/>
+            <a:ext cx="3291840" cy="1188720"/>
           </a:xfrm>
           <a:prstGeom prst="rect">
             <a:avLst/>
@@ -15528,8 +15418,8 @@
         </p:nvSpPr>
         <p:spPr>
           <a:xfrm>
-            <a:off x="1097280" y="4572000"/>
-            <a:ext cx="9902952" cy="1051560"/>
+            <a:off x="530352" y="4526280"/>
+            <a:ext cx="10789920" cy="1024128"/>
           </a:xfrm>
           <a:prstGeom prst="rect">
             <a:avLst/>
@@ -15573,8 +15463,8 @@
         </p:nvSpPr>
         <p:spPr>
           <a:xfrm>
-            <a:off x="1280160" y="4617720"/>
-            <a:ext cx="9537192" cy="960120"/>
+            <a:off x="713232" y="4572000"/>
+            <a:ext cx="10424160" cy="932688"/>
           </a:xfrm>
           <a:prstGeom prst="rect">
             <a:avLst/>
@@ -15756,7 +15646,7 @@
         <p:spPr>
           <a:xfrm>
             <a:off x="0" y="0"/>
-            <a:ext cx="12188952" cy="6858000"/>
+            <a:ext cx="5850696" cy="6858000"/>
           </a:xfrm>
           <a:prstGeom prst="rect">
             <a:avLst/>
@@ -15771,8 +15661,8 @@
         </p:nvSpPr>
         <p:spPr>
           <a:xfrm>
-            <a:off x="4875580" y="0"/>
-            <a:ext cx="7313371" cy="6858000"/>
+            <a:off x="5485028" y="0"/>
+            <a:ext cx="6703923" cy="6858000"/>
           </a:xfrm>
           <a:prstGeom prst="rect">
             <a:avLst/>
@@ -15815,7 +15705,7 @@
         <p:spPr>
           <a:xfrm>
             <a:off x="0" y="0"/>
-            <a:ext cx="109728" cy="6858000"/>
+            <a:ext cx="63500" cy="6858000"/>
           </a:xfrm>
           <a:prstGeom prst="rect">
             <a:avLst/>
@@ -15857,8 +15747,8 @@
         </p:nvSpPr>
         <p:spPr>
           <a:xfrm>
-            <a:off x="109728" y="2400300"/>
-            <a:ext cx="54864" cy="2057400"/>
+            <a:off x="63500" y="2606040"/>
+            <a:ext cx="50800" cy="1645920"/>
           </a:xfrm>
           <a:prstGeom prst="rect">
             <a:avLst/>
@@ -15908,8 +15798,8 @@
         </p:blipFill>
         <p:spPr>
           <a:xfrm>
-            <a:off x="11274552" y="0"/>
-            <a:ext cx="914400" cy="6858000"/>
+            <a:off x="11503152" y="0"/>
+            <a:ext cx="685800" cy="6858000"/>
           </a:xfrm>
           <a:prstGeom prst="rect">
             <a:avLst/>
@@ -15924,8 +15814,8 @@
         </p:nvSpPr>
         <p:spPr>
           <a:xfrm>
-            <a:off x="274320" y="1097280"/>
-            <a:ext cx="4572000" cy="2743200"/>
+            <a:off x="457200" y="731520"/>
+            <a:ext cx="5486400" cy="3200400"/>
           </a:xfrm>
           <a:prstGeom prst="rect">
             <a:avLst/>
@@ -15940,9 +15830,9 @@
           <a:p>
             <a:pPr algn="l"/>
             <a:r>
-              <a:rPr sz="14000" b="1" i="0">
-                <a:solidFill>
-                  <a:srgbClr val="282008"/>
+              <a:rPr sz="16000" b="1" i="0">
+                <a:solidFill>
+                  <a:srgbClr val="221A06"/>
                 </a:solidFill>
                 <a:latin typeface="Montserrat"/>
               </a:rPr>
@@ -15959,8 +15849,8 @@
         </p:nvSpPr>
         <p:spPr>
           <a:xfrm>
-            <a:off x="274320" y="2286000"/>
-            <a:ext cx="10725912" cy="1097280"/>
+            <a:off x="457200" y="2194560"/>
+            <a:ext cx="10863072" cy="1188720"/>
           </a:xfrm>
           <a:prstGeom prst="rect">
             <a:avLst/>
@@ -15975,7 +15865,7 @@
           <a:p>
             <a:pPr algn="r" rtl="1"/>
             <a:r>
-              <a:rPr sz="5200" b="1" i="0">
+              <a:rPr sz="5400" b="1" i="0">
                 <a:solidFill>
                   <a:srgbClr val="FFFFFF"/>
                 </a:solidFill>
@@ -15994,8 +15884,8 @@
         </p:nvSpPr>
         <p:spPr>
           <a:xfrm>
-            <a:off x="274320" y="3474720"/>
-            <a:ext cx="10725912" cy="38100"/>
+            <a:off x="457200" y="3474720"/>
+            <a:ext cx="10863072" cy="38100"/>
           </a:xfrm>
           <a:prstGeom prst="rect">
             <a:avLst/>
@@ -16037,8 +15927,8 @@
         </p:nvSpPr>
         <p:spPr>
           <a:xfrm>
-            <a:off x="274320" y="3611880"/>
-            <a:ext cx="10725912" cy="548640"/>
+            <a:off x="457200" y="3611880"/>
+            <a:ext cx="10863072" cy="594360"/>
           </a:xfrm>
           <a:prstGeom prst="rect">
             <a:avLst/>
@@ -16053,7 +15943,7 @@
           <a:p>
             <a:pPr algn="r" rtl="1"/>
             <a:r>
-              <a:rPr sz="1800" b="0" i="0">
+              <a:rPr sz="2000" b="0" i="0">
                 <a:solidFill>
                   <a:srgbClr val="C8A24C"/>
                 </a:solidFill>
@@ -16220,7 +16110,7 @@
         <p:spPr>
           <a:xfrm>
             <a:off x="0" y="0"/>
-            <a:ext cx="914400" cy="6858000"/>
+            <a:ext cx="347472" cy="6858000"/>
           </a:xfrm>
           <a:prstGeom prst="rect">
             <a:avLst/>
@@ -16243,8 +16133,8 @@
         </p:blipFill>
         <p:spPr>
           <a:xfrm>
-            <a:off x="11274552" y="0"/>
-            <a:ext cx="914400" cy="6858000"/>
+            <a:off x="11503152" y="0"/>
+            <a:ext cx="685800" cy="6858000"/>
           </a:xfrm>
           <a:prstGeom prst="rect">
             <a:avLst/>
@@ -16259,8 +16149,8 @@
         </p:nvSpPr>
         <p:spPr>
           <a:xfrm>
-            <a:off x="914400" y="0"/>
-            <a:ext cx="10360152" cy="50800"/>
+            <a:off x="347472" y="0"/>
+            <a:ext cx="11155680" cy="50800"/>
           </a:xfrm>
           <a:prstGeom prst="rect">
             <a:avLst/>
@@ -16337,8 +16227,8 @@
         </p:nvSpPr>
         <p:spPr>
           <a:xfrm>
-            <a:off x="1097280" y="411480"/>
-            <a:ext cx="9902952" cy="640080"/>
+            <a:off x="530352" y="411480"/>
+            <a:ext cx="10789920" cy="640080"/>
           </a:xfrm>
           <a:prstGeom prst="rect">
             <a:avLst/>
@@ -16372,8 +16262,8 @@
         </p:nvSpPr>
         <p:spPr>
           <a:xfrm>
-            <a:off x="1097280" y="1097280"/>
-            <a:ext cx="9902952" cy="25400"/>
+            <a:off x="530352" y="1097280"/>
+            <a:ext cx="10789920" cy="25400"/>
           </a:xfrm>
           <a:prstGeom prst="rect">
             <a:avLst/>
@@ -16415,8 +16305,8 @@
         </p:nvSpPr>
         <p:spPr>
           <a:xfrm>
-            <a:off x="1097280" y="1188720"/>
-            <a:ext cx="5486400" cy="1005840"/>
+            <a:off x="530352" y="1207008"/>
+            <a:ext cx="7251192" cy="960120"/>
           </a:xfrm>
           <a:prstGeom prst="rect">
             <a:avLst/>
@@ -16458,8 +16348,8 @@
         </p:blipFill>
         <p:spPr>
           <a:xfrm>
-            <a:off x="9811512" y="2377440"/>
-            <a:ext cx="457200" cy="457200"/>
+            <a:off x="10972800" y="2441448"/>
+            <a:ext cx="438912" cy="438912"/>
           </a:xfrm>
           <a:prstGeom prst="rect">
             <a:avLst/>
@@ -16474,8 +16364,8 @@
         </p:nvSpPr>
         <p:spPr>
           <a:xfrm>
-            <a:off x="1097280" y="2542032"/>
-            <a:ext cx="54864" cy="164592"/>
+            <a:off x="530352" y="2542032"/>
+            <a:ext cx="64008" cy="201168"/>
           </a:xfrm>
           <a:prstGeom prst="rect">
             <a:avLst/>
@@ -16517,8 +16407,8 @@
         </p:nvSpPr>
         <p:spPr>
           <a:xfrm>
-            <a:off x="1280160" y="2377440"/>
-            <a:ext cx="9171432" cy="502920"/>
+            <a:off x="667512" y="2359152"/>
+            <a:ext cx="10213848" cy="594360"/>
           </a:xfrm>
           <a:prstGeom prst="rect">
             <a:avLst/>
@@ -16541,12 +16431,55 @@
               </a:rPr>
               <a:t>نسبة توظيف 85% خلال 90 يوماً من إتمام البرنامج</a:t>
             </a:r>
+          </a:p>
+        </p:txBody>
+      </p:sp>
+      <p:sp>
+        <p:nvSpPr>
+          <p:cNvPr id="12" name="Rectangle 11"/>
+          <p:cNvSpPr/>
+          <p:nvPr/>
+        </p:nvSpPr>
+        <p:spPr>
+          <a:xfrm>
+            <a:off x="530352" y="3023108"/>
+            <a:ext cx="10789920" cy="12700"/>
+          </a:xfrm>
+          <a:prstGeom prst="rect">
+            <a:avLst/>
+          </a:prstGeom>
+          <a:solidFill>
+            <a:srgbClr val="221C08"/>
+          </a:solidFill>
+          <a:ln>
+            <a:noFill/>
+          </a:ln>
+        </p:spPr>
+        <p:style>
+          <a:lnRef idx="1">
+            <a:schemeClr val="accent1"/>
+          </a:lnRef>
+          <a:fillRef idx="3">
+            <a:schemeClr val="accent1"/>
+          </a:fillRef>
+          <a:effectRef idx="2">
+            <a:schemeClr val="accent1"/>
+          </a:effectRef>
+          <a:fontRef idx="minor">
+            <a:schemeClr val="lt1"/>
+          </a:fontRef>
+        </p:style>
+        <p:txBody>
+          <a:bodyPr rtlCol="0" anchor="ctr"/>
+          <a:lstStyle/>
+          <a:p>
+            <a:pPr algn="ctr"/>
           </a:p>
         </p:txBody>
       </p:sp>
       <p:pic>
         <p:nvPicPr>
-          <p:cNvPr id="12" name="Picture 11" descr="image-8-10.png"/>
+          <p:cNvPr id="13" name="Picture 12" descr="image-8-10.png"/>
           <p:cNvPicPr>
             <a:picLocks noChangeAspect="1"/>
           </p:cNvPicPr>
@@ -16560,8 +16493,8 @@
         </p:blipFill>
         <p:spPr>
           <a:xfrm>
-            <a:off x="9811512" y="3063240"/>
-            <a:ext cx="457200" cy="457200"/>
+            <a:off x="10972800" y="3191256"/>
+            <a:ext cx="438912" cy="438912"/>
           </a:xfrm>
           <a:prstGeom prst="rect">
             <a:avLst/>
@@ -16570,14 +16503,14 @@
       </p:pic>
       <p:sp>
         <p:nvSpPr>
-          <p:cNvPr id="13" name="Rectangle 12"/>
+          <p:cNvPr id="14" name="Rectangle 13"/>
           <p:cNvSpPr/>
           <p:nvPr/>
         </p:nvSpPr>
         <p:spPr>
           <a:xfrm>
-            <a:off x="1097280" y="3227832"/>
-            <a:ext cx="54864" cy="164592"/>
+            <a:off x="530352" y="3291840"/>
+            <a:ext cx="64008" cy="201168"/>
           </a:xfrm>
           <a:prstGeom prst="rect">
             <a:avLst/>
@@ -16613,14 +16546,14 @@
       </p:sp>
       <p:sp>
         <p:nvSpPr>
-          <p:cNvPr id="14" name="TextBox 13"/>
-          <p:cNvSpPr txBox="1"/>
-          <p:nvPr/>
-        </p:nvSpPr>
-        <p:spPr>
-          <a:xfrm>
-            <a:off x="1280160" y="3063240"/>
-            <a:ext cx="9171432" cy="502920"/>
+          <p:cNvPr id="15" name="TextBox 14"/>
+          <p:cNvSpPr txBox="1"/>
+          <p:nvPr/>
+        </p:nvSpPr>
+        <p:spPr>
+          <a:xfrm>
+            <a:off x="667512" y="3108960"/>
+            <a:ext cx="10213848" cy="594360"/>
           </a:xfrm>
           <a:prstGeom prst="rect">
             <a:avLst/>
@@ -16643,12 +16576,55 @@
               </a:rPr>
               <a:t>200+ متدرب أتموا البرنامج بنجاح في الدفعات الأولى</a:t>
             </a:r>
+          </a:p>
+        </p:txBody>
+      </p:sp>
+      <p:sp>
+        <p:nvSpPr>
+          <p:cNvPr id="16" name="Rectangle 15"/>
+          <p:cNvSpPr/>
+          <p:nvPr/>
+        </p:nvSpPr>
+        <p:spPr>
+          <a:xfrm>
+            <a:off x="530352" y="3772916"/>
+            <a:ext cx="10789920" cy="12700"/>
+          </a:xfrm>
+          <a:prstGeom prst="rect">
+            <a:avLst/>
+          </a:prstGeom>
+          <a:solidFill>
+            <a:srgbClr val="221C08"/>
+          </a:solidFill>
+          <a:ln>
+            <a:noFill/>
+          </a:ln>
+        </p:spPr>
+        <p:style>
+          <a:lnRef idx="1">
+            <a:schemeClr val="accent1"/>
+          </a:lnRef>
+          <a:fillRef idx="3">
+            <a:schemeClr val="accent1"/>
+          </a:fillRef>
+          <a:effectRef idx="2">
+            <a:schemeClr val="accent1"/>
+          </a:effectRef>
+          <a:fontRef idx="minor">
+            <a:schemeClr val="lt1"/>
+          </a:fontRef>
+        </p:style>
+        <p:txBody>
+          <a:bodyPr rtlCol="0" anchor="ctr"/>
+          <a:lstStyle/>
+          <a:p>
+            <a:pPr algn="ctr"/>
           </a:p>
         </p:txBody>
       </p:sp>
       <p:pic>
         <p:nvPicPr>
-          <p:cNvPr id="15" name="Picture 14" descr="image-8-17.png"/>
+          <p:cNvPr id="17" name="Picture 16" descr="image-8-17.png"/>
           <p:cNvPicPr>
             <a:picLocks noChangeAspect="1"/>
           </p:cNvPicPr>
@@ -16662,8 +16638,8 @@
         </p:blipFill>
         <p:spPr>
           <a:xfrm>
-            <a:off x="9811512" y="3749040"/>
-            <a:ext cx="457200" cy="457200"/>
+            <a:off x="10972800" y="3941064"/>
+            <a:ext cx="438912" cy="438912"/>
           </a:xfrm>
           <a:prstGeom prst="rect">
             <a:avLst/>
@@ -16672,14 +16648,14 @@
       </p:pic>
       <p:sp>
         <p:nvSpPr>
-          <p:cNvPr id="16" name="Rectangle 15"/>
+          <p:cNvPr id="18" name="Rectangle 17"/>
           <p:cNvSpPr/>
           <p:nvPr/>
         </p:nvSpPr>
         <p:spPr>
           <a:xfrm>
-            <a:off x="1097280" y="3913632"/>
-            <a:ext cx="54864" cy="164592"/>
+            <a:off x="530352" y="4041648"/>
+            <a:ext cx="64008" cy="201168"/>
           </a:xfrm>
           <a:prstGeom prst="rect">
             <a:avLst/>
@@ -16715,14 +16691,14 @@
       </p:sp>
       <p:sp>
         <p:nvSpPr>
-          <p:cNvPr id="17" name="TextBox 16"/>
-          <p:cNvSpPr txBox="1"/>
-          <p:nvPr/>
-        </p:nvSpPr>
-        <p:spPr>
-          <a:xfrm>
-            <a:off x="1280160" y="3749040"/>
-            <a:ext cx="9171432" cy="502920"/>
+          <p:cNvPr id="19" name="TextBox 18"/>
+          <p:cNvSpPr txBox="1"/>
+          <p:nvPr/>
+        </p:nvSpPr>
+        <p:spPr>
+          <a:xfrm>
+            <a:off x="667512" y="3858768"/>
+            <a:ext cx="10213848" cy="594360"/>
           </a:xfrm>
           <a:prstGeom prst="rect">
             <a:avLst/>
@@ -16745,12 +16721,55 @@
               </a:rPr>
               <a:t>تقييم رضا المتدربين: 4.8 / 5.0</a:t>
             </a:r>
+          </a:p>
+        </p:txBody>
+      </p:sp>
+      <p:sp>
+        <p:nvSpPr>
+          <p:cNvPr id="20" name="Rectangle 19"/>
+          <p:cNvSpPr/>
+          <p:nvPr/>
+        </p:nvSpPr>
+        <p:spPr>
+          <a:xfrm>
+            <a:off x="530352" y="4522724"/>
+            <a:ext cx="10789920" cy="12700"/>
+          </a:xfrm>
+          <a:prstGeom prst="rect">
+            <a:avLst/>
+          </a:prstGeom>
+          <a:solidFill>
+            <a:srgbClr val="221C08"/>
+          </a:solidFill>
+          <a:ln>
+            <a:noFill/>
+          </a:ln>
+        </p:spPr>
+        <p:style>
+          <a:lnRef idx="1">
+            <a:schemeClr val="accent1"/>
+          </a:lnRef>
+          <a:fillRef idx="3">
+            <a:schemeClr val="accent1"/>
+          </a:fillRef>
+          <a:effectRef idx="2">
+            <a:schemeClr val="accent1"/>
+          </a:effectRef>
+          <a:fontRef idx="minor">
+            <a:schemeClr val="lt1"/>
+          </a:fontRef>
+        </p:style>
+        <p:txBody>
+          <a:bodyPr rtlCol="0" anchor="ctr"/>
+          <a:lstStyle/>
+          <a:p>
+            <a:pPr algn="ctr"/>
           </a:p>
         </p:txBody>
       </p:sp>
       <p:pic>
         <p:nvPicPr>
-          <p:cNvPr id="18" name="Picture 17" descr="image-8-24.png"/>
+          <p:cNvPr id="21" name="Picture 20" descr="image-8-24.png"/>
           <p:cNvPicPr>
             <a:picLocks noChangeAspect="1"/>
           </p:cNvPicPr>
@@ -16764,8 +16783,8 @@
         </p:blipFill>
         <p:spPr>
           <a:xfrm>
-            <a:off x="9811512" y="4434840"/>
-            <a:ext cx="457200" cy="457200"/>
+            <a:off x="10972800" y="4690872"/>
+            <a:ext cx="438912" cy="438912"/>
           </a:xfrm>
           <a:prstGeom prst="rect">
             <a:avLst/>
@@ -16774,14 +16793,14 @@
       </p:pic>
       <p:sp>
         <p:nvSpPr>
-          <p:cNvPr id="19" name="Rectangle 18"/>
+          <p:cNvPr id="22" name="Rectangle 21"/>
           <p:cNvSpPr/>
           <p:nvPr/>
         </p:nvSpPr>
         <p:spPr>
           <a:xfrm>
-            <a:off x="1097280" y="4599432"/>
-            <a:ext cx="54864" cy="164592"/>
+            <a:off x="530352" y="4791456"/>
+            <a:ext cx="64008" cy="201168"/>
           </a:xfrm>
           <a:prstGeom prst="rect">
             <a:avLst/>
@@ -16817,14 +16836,14 @@
       </p:sp>
       <p:sp>
         <p:nvSpPr>
-          <p:cNvPr id="20" name="TextBox 19"/>
-          <p:cNvSpPr txBox="1"/>
-          <p:nvPr/>
-        </p:nvSpPr>
-        <p:spPr>
-          <a:xfrm>
-            <a:off x="1280160" y="4434840"/>
-            <a:ext cx="9171432" cy="502920"/>
+          <p:cNvPr id="23" name="TextBox 22"/>
+          <p:cNvSpPr txBox="1"/>
+          <p:nvPr/>
+        </p:nvSpPr>
+        <p:spPr>
+          <a:xfrm>
+            <a:off x="667512" y="4608576"/>
+            <a:ext cx="10213848" cy="594360"/>
           </a:xfrm>
           <a:prstGeom prst="rect">
             <a:avLst/>
@@ -16852,7 +16871,7 @@
       </p:sp>
       <p:pic>
         <p:nvPicPr>
-          <p:cNvPr id="21" name="Picture 20" descr="image-18-1.png"/>
+          <p:cNvPr id="24" name="Picture 23" descr="image-18-1.png"/>
           <p:cNvPicPr>
             <a:picLocks noChangeAspect="1"/>
           </p:cNvPicPr>
@@ -16866,8 +16885,8 @@
         </p:blipFill>
         <p:spPr>
           <a:xfrm>
-            <a:off x="1097280" y="5303520"/>
-            <a:ext cx="10085832" cy="822960"/>
+            <a:off x="347472" y="6126480"/>
+            <a:ext cx="11155680" cy="384048"/>
           </a:xfrm>
           <a:prstGeom prst="rect">
             <a:avLst/>
@@ -16876,7 +16895,7 @@
       </p:pic>
       <p:sp>
         <p:nvSpPr>
-          <p:cNvPr id="22" name="Rectangle 21"/>
+          <p:cNvPr id="25" name="Rectangle 24"/>
           <p:cNvSpPr/>
           <p:nvPr/>
         </p:nvSpPr>
@@ -16919,7 +16938,7 @@
       </p:sp>
       <p:sp>
         <p:nvSpPr>
-          <p:cNvPr id="23" name="TextBox 22"/>
+          <p:cNvPr id="26" name="TextBox 25"/>
           <p:cNvSpPr txBox="1"/>
           <p:nvPr/>
         </p:nvSpPr>
@@ -16954,7 +16973,7 @@
       </p:sp>
       <p:sp>
         <p:nvSpPr>
-          <p:cNvPr id="24" name="TextBox 23"/>
+          <p:cNvPr id="27" name="TextBox 26"/>
           <p:cNvSpPr txBox="1"/>
           <p:nvPr/>
         </p:nvSpPr>
